--- a/slides/argo-rollouts.pptx
+++ b/slides/argo-rollouts.pptx
@@ -3674,98 +3674,7 @@
                   <a:srgbClr val="EF7627"/>
                 </a:solidFill>
               </a:rPr>
-              <a:t>set image … :green  →  le rollout progresse :</a:t>
-            </a:r>
-          </a:p>
-          <a:p>
-            <a:pPr>
-              <a:spcBef>
-                <a:spcPts val="200"/>
-              </a:spcBef>
-              <a:spcAft>
-                <a:spcPts val="200"/>
-              </a:spcAft>
-            </a:pPr>
-            <a:r>
-              <a:rPr sz="1500">
-                <a:solidFill>
-                  <a:srgbClr val="555A66"/>
-                </a:solidFill>
-                <a:latin typeface="Consolas"/>
-              </a:rPr>
-              <a:t>Step 1/9  setWeight 20%   ▸ 1 pod green / 4 pods blue</a:t>
-            </a:r>
-          </a:p>
-          <a:p>
-            <a:pPr>
-              <a:spcBef>
-                <a:spcPts val="200"/>
-              </a:spcBef>
-              <a:spcAft>
-                <a:spcPts val="200"/>
-              </a:spcAft>
-            </a:pPr>
-            <a:r>
-              <a:rPr sz="1500">
-                <a:solidFill>
-                  <a:srgbClr val="555A66"/>
-                </a:solidFill>
-                <a:latin typeface="Consolas"/>
-              </a:rPr>
-              <a:t>Step 4/9  setWeight 40%   ▸ AnalysisRun lancé</a:t>
-            </a:r>
-          </a:p>
-          <a:p>
-            <a:pPr>
-              <a:spcBef>
-                <a:spcPts val="200"/>
-              </a:spcBef>
-              <a:spcAft>
-                <a:spcPts val="200"/>
-              </a:spcAft>
-            </a:pPr>
-            <a:r>
-              <a:rPr sz="1500">
-                <a:solidFill>
-                  <a:srgbClr val="555A66"/>
-                </a:solidFill>
-                <a:latin typeface="Consolas"/>
-              </a:rPr>
-              <a:t>   probe ▸ "30/30 requetes en succes -&gt; 100% (seuil 95%)  ANALYSE OK"</a:t>
-            </a:r>
-          </a:p>
-          <a:p>
-            <a:pPr>
-              <a:spcBef>
-                <a:spcPts val="200"/>
-              </a:spcBef>
-              <a:spcAft>
-                <a:spcPts val="200"/>
-              </a:spcAft>
-            </a:pPr>
-            <a:r>
-              <a:rPr sz="1500">
-                <a:solidFill>
-                  <a:srgbClr val="555A66"/>
-                </a:solidFill>
-                <a:latin typeface="Consolas"/>
-              </a:rPr>
-              <a:t>Step 9/9  setWeight 100%  ▸ Healthy, stable = green</a:t>
-            </a:r>
-          </a:p>
-          <a:p>
-            <a:pPr>
-              <a:spcAft>
-                <a:spcPts val="400"/>
-              </a:spcAft>
-            </a:pPr>
-            <a:r>
-              <a:rPr sz="1800" b="0">
-                <a:solidFill>
-                  <a:srgbClr val="1B1F2A"/>
-                </a:solidFill>
-              </a:rPr>
-              <a:t/>
+              <a:t>nouvelle version → canary 20%→40% ; l'AnalysisRun sonde le canary :</a:t>
             </a:r>
           </a:p>
           <a:p>
@@ -3776,11 +3685,35 @@
                   <a:srgbClr val="2EA043"/>
                 </a:solidFill>
               </a:rPr>
-              <a:t>Analyse réussie → promotion automatique jusqu'à 100%.</a:t>
-            </a:r>
-          </a:p>
-        </p:txBody>
-      </p:sp>
+              <a:t>"30/30 requetes en succes -&gt; 100% (seuil 95%)" → promotion automatique 100%</a:t>
+            </a:r>
+          </a:p>
+        </p:txBody>
+      </p:sp>
+      <p:pic>
+        <p:nvPicPr>
+          <p:cNvPr id="6" name="Picture 5" descr="demo-canary-inprogress.png"/>
+          <p:cNvPicPr>
+            <a:picLocks noChangeAspect="1"/>
+          </p:cNvPicPr>
+          <p:nvPr/>
+        </p:nvPicPr>
+        <p:blipFill>
+          <a:blip r:embed="rId2"/>
+          <a:stretch>
+            <a:fillRect/>
+          </a:stretch>
+        </p:blipFill>
+        <p:spPr>
+          <a:xfrm>
+            <a:off x="2587003" y="2103120"/>
+            <a:ext cx="7017688" cy="4480560"/>
+          </a:xfrm>
+          <a:prstGeom prst="rect">
+            <a:avLst/>
+          </a:prstGeom>
+        </p:spPr>
+      </p:pic>
     </p:spTree>
   </p:cSld>
   <p:clrMapOvr>
@@ -3953,117 +3886,7 @@
                   <a:srgbClr val="EF7627"/>
                 </a:solidFill>
               </a:rPr>
-              <a:t>set image … :bad-red  →  l'analyse sonde le canary :</a:t>
-            </a:r>
-          </a:p>
-          <a:p>
-            <a:pPr>
-              <a:spcBef>
-                <a:spcPts val="200"/>
-              </a:spcBef>
-              <a:spcAft>
-                <a:spcPts val="200"/>
-              </a:spcAft>
-            </a:pPr>
-            <a:r>
-              <a:rPr sz="1500">
-                <a:solidFill>
-                  <a:srgbClr val="555A66"/>
-                </a:solidFill>
-                <a:latin typeface="Consolas"/>
-              </a:rPr>
-              <a:t>probe ▸ HTTP/1.1 500 Internal Server Error  (x25)</a:t>
-            </a:r>
-          </a:p>
-          <a:p>
-            <a:pPr>
-              <a:spcBef>
-                <a:spcPts val="200"/>
-              </a:spcBef>
-              <a:spcAft>
-                <a:spcPts val="200"/>
-              </a:spcAft>
-            </a:pPr>
-            <a:r>
-              <a:rPr sz="1500">
-                <a:solidFill>
-                  <a:srgbClr val="555A66"/>
-                </a:solidFill>
-                <a:latin typeface="Consolas"/>
-              </a:rPr>
-              <a:t>probe ▸ "5/30 requetes en succes -&gt; 16% (seuil 95%)  ANALYSE KO"</a:t>
-            </a:r>
-          </a:p>
-          <a:p>
-            <a:pPr>
-              <a:spcBef>
-                <a:spcPts val="200"/>
-              </a:spcBef>
-              <a:spcAft>
-                <a:spcPts val="200"/>
-              </a:spcAft>
-            </a:pPr>
-            <a:r>
-              <a:rPr sz="1500">
-                <a:solidFill>
-                  <a:srgbClr val="555A66"/>
-                </a:solidFill>
-                <a:latin typeface="Consolas"/>
-              </a:rPr>
-              <a:t>Status: Degraded</a:t>
-            </a:r>
-          </a:p>
-          <a:p>
-            <a:pPr>
-              <a:spcBef>
-                <a:spcPts val="200"/>
-              </a:spcBef>
-              <a:spcAft>
-                <a:spcPts val="200"/>
-              </a:spcAft>
-            </a:pPr>
-            <a:r>
-              <a:rPr sz="1500">
-                <a:solidFill>
-                  <a:srgbClr val="555A66"/>
-                </a:solidFill>
-                <a:latin typeface="Consolas"/>
-              </a:rPr>
-              <a:t>Message: RolloutAborted: Metric "http-success-rate" assessed Failed</a:t>
-            </a:r>
-          </a:p>
-          <a:p>
-            <a:pPr>
-              <a:spcBef>
-                <a:spcPts val="200"/>
-              </a:spcBef>
-              <a:spcAft>
-                <a:spcPts val="200"/>
-              </a:spcAft>
-            </a:pPr>
-            <a:r>
-              <a:rPr sz="1500">
-                <a:solidFill>
-                  <a:srgbClr val="555A66"/>
-                </a:solidFill>
-                <a:latin typeface="Consolas"/>
-              </a:rPr>
-              <a:t>         due to failed (1) &gt; failureLimit (0)</a:t>
-            </a:r>
-          </a:p>
-          <a:p>
-            <a:pPr>
-              <a:spcAft>
-                <a:spcPts val="400"/>
-              </a:spcAft>
-            </a:pPr>
-            <a:r>
-              <a:rPr sz="1800" b="0">
-                <a:solidFill>
-                  <a:srgbClr val="1B1F2A"/>
-                </a:solidFill>
-              </a:rPr>
-              <a:t/>
+              <a:t>bad-red → HTTP 500 ; sonde 5/30 = 16% → ANALYSE KO</a:t>
             </a:r>
           </a:p>
           <a:p>
@@ -4074,22 +3897,35 @@
                   <a:srgbClr val="C0392B"/>
                 </a:solidFill>
               </a:rPr>
-              <a:t>Analyse échouée → rollback automatique : trafic gardé sur green,</a:t>
-            </a:r>
-          </a:p>
-          <a:p>
-            <a:pPr/>
-            <a:r>
-              <a:rPr sz="1800" b="1">
-                <a:solidFill>
-                  <a:srgbClr val="C0392B"/>
-                </a:solidFill>
-              </a:rPr>
-              <a:t>zéro impact utilisateur, zéro intervention humaine.</a:t>
-            </a:r>
-          </a:p>
-        </p:txBody>
-      </p:sp>
+              <a:t>Metric Failed → RolloutAborted → trafic gardé sur green, 0 downtime</a:t>
+            </a:r>
+          </a:p>
+        </p:txBody>
+      </p:sp>
+      <p:pic>
+        <p:nvPicPr>
+          <p:cNvPr id="6" name="Picture 5" descr="demo-rollback.png"/>
+          <p:cNvPicPr>
+            <a:picLocks noChangeAspect="1"/>
+          </p:cNvPicPr>
+          <p:nvPr/>
+        </p:nvPicPr>
+        <p:blipFill>
+          <a:blip r:embed="rId2"/>
+          <a:stretch>
+            <a:fillRect/>
+          </a:stretch>
+        </p:blipFill>
+        <p:spPr>
+          <a:xfrm>
+            <a:off x="2498126" y="2468880"/>
+            <a:ext cx="7195441" cy="4023360"/>
+          </a:xfrm>
+          <a:prstGeom prst="rect">
+            <a:avLst/>
+          </a:prstGeom>
+        </p:spPr>
+      </p:pic>
     </p:spTree>
   </p:cSld>
   <p:clrMapOvr>

--- a/slides/argo-rollouts.pptx
+++ b/slides/argo-rollouts.pptx
@@ -18,6 +18,7 @@
     <p:sldId id="266" r:id="rId17"/>
     <p:sldId id="267" r:id="rId18"/>
     <p:sldId id="268" r:id="rId19"/>
+    <p:sldId id="269" r:id="rId20"/>
   </p:sldIdLst>
   <p:sldSz cx="12191695" cy="6858000" type="screen4x3"/>
   <p:notesSz cx="6858000" cy="9144000"/>
@@ -4841,7 +4842,7 @@
                 </a:solidFill>
                 <a:latin typeface="Calibri"/>
               </a:rPr>
-              <a:t>CONCLUSION</a:t>
+              <a:t>LE DASHBOARD ARGO ROLLOUTS</a:t>
             </a:r>
           </a:p>
           <a:p>
@@ -4860,7 +4861,7 @@
                 </a:solidFill>
                 <a:latin typeface="Calibri"/>
               </a:rPr>
-              <a:t>Bilan, avis &amp; améliorations</a:t>
+              <a:t>Pilotage &amp; observabilité</a:t>
             </a:r>
           </a:p>
         </p:txBody>
@@ -5002,7 +5003,7 @@
         <p:spPr>
           <a:xfrm>
             <a:off x="777240" y="1600200"/>
-            <a:ext cx="5257800" cy="2697480"/>
+            <a:ext cx="3246120" cy="4206240"/>
           </a:xfrm>
           <a:prstGeom prst="roundRect">
             <a:avLst>
@@ -5094,7 +5095,7 @@
         <p:spPr>
           <a:xfrm>
             <a:off x="1051560" y="1783080"/>
-            <a:ext cx="4800600" cy="411480"/>
+            <a:ext cx="2788920" cy="411480"/>
           </a:xfrm>
           <a:prstGeom prst="rect">
             <a:avLst/>
@@ -5122,7 +5123,7 @@
                 </a:solidFill>
                 <a:latin typeface="Calibri"/>
               </a:rPr>
-              <a:t>Ce que j'ai appris</a:t>
+              <a:t>Vue temps réel</a:t>
             </a:r>
           </a:p>
         </p:txBody>
@@ -5136,7 +5137,7 @@
         <p:spPr>
           <a:xfrm>
             <a:off x="1051560" y="2313432"/>
-            <a:ext cx="4754880" cy="1783080"/>
+            <a:ext cx="2743200" cy="3291839"/>
           </a:xfrm>
           <a:prstGeom prst="rect">
             <a:avLst/>
@@ -5173,7 +5174,7 @@
                 </a:solidFill>
                 <a:latin typeface="Calibri"/>
               </a:rPr>
-              <a:t>Le progressive delivery en pratique</a:t>
+              <a:t>Stratégie &amp; poids actuel (40 %)</a:t>
             </a:r>
           </a:p>
           <a:p>
@@ -5201,7 +5202,7 @@
                 </a:solidFill>
                 <a:latin typeface="Calibri"/>
               </a:rPr>
-              <a:t>L'imbrication GitOps ↔ Rollouts</a:t>
+              <a:t>Révisions stable / canary</a:t>
             </a:r>
           </a:p>
           <a:p>
@@ -5229,7 +5230,63 @@
                 </a:solidFill>
                 <a:latin typeface="Calibri"/>
               </a:rPr>
-              <a:t>Les métriques comme contrat de qualité</a:t>
+              <a:t>État des pods et analyses</a:t>
+            </a:r>
+          </a:p>
+          <a:p>
+            <a:pPr>
+              <a:spcBef>
+                <a:spcPts val="0"/>
+              </a:spcBef>
+              <a:spcAft>
+                <a:spcPts val="600"/>
+              </a:spcAft>
+            </a:pPr>
+            <a:r>
+              <a:rPr sz="1400" b="1">
+                <a:solidFill>
+                  <a:srgbClr val="EF7627"/>
+                </a:solidFill>
+                <a:latin typeface="Calibri"/>
+              </a:rPr>
+              <a:t>▸  </a:t>
+            </a:r>
+            <a:r>
+              <a:rPr sz="1400" b="0">
+                <a:solidFill>
+                  <a:srgbClr val="E8EAED"/>
+                </a:solidFill>
+                <a:latin typeface="Calibri"/>
+              </a:rPr>
+              <a:t>Pause / Promote / Restart en 1 clic</a:t>
+            </a:r>
+          </a:p>
+          <a:p>
+            <a:pPr>
+              <a:spcBef>
+                <a:spcPts val="0"/>
+              </a:spcBef>
+              <a:spcAft>
+                <a:spcPts val="600"/>
+              </a:spcAft>
+            </a:pPr>
+            <a:r>
+              <a:rPr sz="1400" b="1">
+                <a:solidFill>
+                  <a:srgbClr val="979FB0"/>
+                </a:solidFill>
+                <a:latin typeface="Calibri"/>
+              </a:rPr>
+              <a:t>▸  </a:t>
+            </a:r>
+            <a:r>
+              <a:rPr sz="1400" b="0">
+                <a:solidFill>
+                  <a:srgbClr val="979FB0"/>
+                </a:solidFill>
+                <a:latin typeface="Calibri"/>
+              </a:rPr>
+              <a:t>Capture pendant un canary figé</a:t>
             </a:r>
           </a:p>
         </p:txBody>
@@ -5242,12 +5299,12 @@
         </p:nvSpPr>
         <p:spPr>
           <a:xfrm>
-            <a:off x="6263640" y="1600200"/>
-            <a:ext cx="5120640" cy="2697480"/>
+            <a:off x="4197096" y="1545336"/>
+            <a:ext cx="5957642" cy="4407408"/>
           </a:xfrm>
           <a:prstGeom prst="roundRect">
             <a:avLst>
-              <a:gd name="adj" fmla="val 6000"/>
+              <a:gd name="adj" fmla="val 3000"/>
             </a:avLst>
           </a:prstGeom>
           <a:solidFill>
@@ -5282,16 +5339,66 @@
           </a:p>
         </p:txBody>
       </p:sp>
-      <p:sp>
-        <p:nvSpPr>
-          <p:cNvPr id="12" name="Rectangle 11"/>
+      <p:pic>
+        <p:nvPicPr>
+          <p:cNvPr id="12" name="Picture 11" descr="dashboard-canary.png"/>
+          <p:cNvPicPr>
+            <a:picLocks noChangeAspect="1"/>
+          </p:cNvPicPr>
+          <p:nvPr/>
+        </p:nvPicPr>
+        <p:blipFill>
+          <a:blip r:embed="rId2"/>
+          <a:stretch>
+            <a:fillRect/>
+          </a:stretch>
+        </p:blipFill>
+        <p:spPr>
+          <a:xfrm>
+            <a:off x="4251960" y="1600200"/>
+            <a:ext cx="5847914" cy="4297680"/>
+          </a:xfrm>
+          <a:prstGeom prst="rect">
+            <a:avLst/>
+          </a:prstGeom>
+        </p:spPr>
+      </p:pic>
+    </p:spTree>
+  </p:cSld>
+  <p:clrMapOvr>
+    <a:masterClrMapping/>
+  </p:clrMapOvr>
+</p:sld>
+</file>
+
+<file path=ppt/slides/slide13.xml><?xml version="1.0" encoding="utf-8"?>
+<p:sld xmlns:a="http://schemas.openxmlformats.org/drawingml/2006/main" xmlns:p="http://schemas.openxmlformats.org/presentationml/2006/main" xmlns:r="http://schemas.openxmlformats.org/officeDocument/2006/relationships">
+  <p:cSld>
+    <p:bg>
+      <p:bgPr>
+        <a:solidFill>
+          <a:srgbClr val="141823"/>
+        </a:solidFill>
+        <a:effectLst/>
+      </p:bgPr>
+    </p:bg>
+    <p:spTree>
+      <p:nvGrpSpPr>
+        <p:cNvPr id="1" name=""/>
+        <p:cNvGrpSpPr/>
+        <p:nvPr/>
+      </p:nvGrpSpPr>
+      <p:grpSpPr/>
+      <p:sp>
+        <p:nvSpPr>
+          <p:cNvPr id="2" name="Rectangle 1"/>
           <p:cNvSpPr/>
           <p:nvPr/>
         </p:nvSpPr>
         <p:spPr>
           <a:xfrm>
-            <a:off x="6263640" y="1764792"/>
-            <a:ext cx="91440" cy="384048"/>
+            <a:off x="502920" y="566928"/>
+            <a:ext cx="146304" cy="457200"/>
           </a:xfrm>
           <a:prstGeom prst="rect">
             <a:avLst/>
@@ -5328,14 +5435,119 @@
       </p:sp>
       <p:sp>
         <p:nvSpPr>
-          <p:cNvPr id="13" name="TextBox 12"/>
+          <p:cNvPr id="3" name="TextBox 2"/>
           <p:cNvSpPr txBox="1"/>
           <p:nvPr/>
         </p:nvSpPr>
         <p:spPr>
           <a:xfrm>
-            <a:off x="6537959" y="1783080"/>
-            <a:ext cx="4663440" cy="411480"/>
+            <a:off x="777240" y="457200"/>
+            <a:ext cx="10607040" cy="914400"/>
+          </a:xfrm>
+          <a:prstGeom prst="rect">
+            <a:avLst/>
+          </a:prstGeom>
+          <a:noFill/>
+        </p:spPr>
+        <p:txBody>
+          <a:bodyPr wrap="square" anchor="ctr" lIns="0" rIns="0" tIns="0" bIns="0">
+            <a:spAutoFit/>
+          </a:bodyPr>
+          <a:lstStyle/>
+          <a:p>
+            <a:pPr algn="l">
+              <a:spcBef>
+                <a:spcPts val="0"/>
+              </a:spcBef>
+              <a:spcAft>
+                <a:spcPts val="200"/>
+              </a:spcAft>
+            </a:pPr>
+            <a:r>
+              <a:rPr sz="1100" b="1">
+                <a:solidFill>
+                  <a:srgbClr val="EF7627"/>
+                </a:solidFill>
+                <a:latin typeface="Calibri"/>
+              </a:rPr>
+              <a:t>CONCLUSION</a:t>
+            </a:r>
+          </a:p>
+          <a:p>
+            <a:pPr algn="l">
+              <a:spcBef>
+                <a:spcPts val="0"/>
+              </a:spcBef>
+              <a:spcAft>
+                <a:spcPts val="200"/>
+              </a:spcAft>
+            </a:pPr>
+            <a:r>
+              <a:rPr sz="2700" b="1">
+                <a:solidFill>
+                  <a:srgbClr val="FFFFFF"/>
+                </a:solidFill>
+                <a:latin typeface="Calibri"/>
+              </a:rPr>
+              <a:t>Bilan, avis &amp; améliorations</a:t>
+            </a:r>
+          </a:p>
+        </p:txBody>
+      </p:sp>
+      <p:sp>
+        <p:nvSpPr>
+          <p:cNvPr id="4" name="Rectangle 3"/>
+          <p:cNvSpPr/>
+          <p:nvPr/>
+        </p:nvSpPr>
+        <p:spPr>
+          <a:xfrm>
+            <a:off x="502920" y="1325880"/>
+            <a:ext cx="11183112" cy="20116"/>
+          </a:xfrm>
+          <a:prstGeom prst="rect">
+            <a:avLst/>
+          </a:prstGeom>
+          <a:solidFill>
+            <a:srgbClr val="323C4F"/>
+          </a:solidFill>
+          <a:ln>
+            <a:noFill/>
+          </a:ln>
+          <a:effectLst/>
+        </p:spPr>
+        <p:style>
+          <a:lnRef idx="1">
+            <a:schemeClr val="accent1"/>
+          </a:lnRef>
+          <a:fillRef idx="3">
+            <a:schemeClr val="accent1"/>
+          </a:fillRef>
+          <a:effectRef idx="2">
+            <a:schemeClr val="accent1"/>
+          </a:effectRef>
+          <a:fontRef idx="minor">
+            <a:schemeClr val="lt1"/>
+          </a:fontRef>
+        </p:style>
+        <p:txBody>
+          <a:bodyPr rtlCol="0" anchor="ctr"/>
+          <a:lstStyle/>
+          <a:p>
+            <a:pPr algn="ctr"/>
+          </a:p>
+        </p:txBody>
+      </p:sp>
+      <p:sp>
+        <p:nvSpPr>
+          <p:cNvPr id="5" name="TextBox 4"/>
+          <p:cNvSpPr txBox="1"/>
+          <p:nvPr/>
+        </p:nvSpPr>
+        <p:spPr>
+          <a:xfrm>
+            <a:off x="502920" y="6455664"/>
+            <a:ext cx="7315200" cy="320040"/>
           </a:xfrm>
           <a:prstGeom prst="rect">
             <a:avLst/>
@@ -5357,27 +5569,27 @@
               </a:spcAft>
             </a:pPr>
             <a:r>
-              <a:rPr sz="1600" b="1">
-                <a:solidFill>
-                  <a:srgbClr val="FFFFFF"/>
-                </a:solidFill>
-                <a:latin typeface="Calibri"/>
-              </a:rPr>
-              <a:t>Mon avis</a:t>
-            </a:r>
-          </a:p>
-        </p:txBody>
-      </p:sp>
-      <p:sp>
-        <p:nvSpPr>
-          <p:cNvPr id="14" name="TextBox 13"/>
+              <a:rPr sz="1000" b="0">
+                <a:solidFill>
+                  <a:srgbClr val="979FB0"/>
+                </a:solidFill>
+                <a:latin typeface="Calibri"/>
+              </a:rPr>
+              <a:t>Argo Rollouts — Projet de recherche Kubernetes &amp; GitOps</a:t>
+            </a:r>
+          </a:p>
+        </p:txBody>
+      </p:sp>
+      <p:sp>
+        <p:nvSpPr>
+          <p:cNvPr id="6" name="TextBox 5"/>
           <p:cNvSpPr txBox="1"/>
           <p:nvPr/>
         </p:nvSpPr>
         <p:spPr>
           <a:xfrm>
-            <a:off x="6537959" y="2313432"/>
-            <a:ext cx="4617720" cy="1783080"/>
+            <a:off x="10058400" y="6455664"/>
+            <a:ext cx="1627632" cy="320040"/>
           </a:xfrm>
           <a:prstGeom prst="rect">
             <a:avLst/>
@@ -5385,106 +5597,41 @@
           <a:noFill/>
         </p:spPr>
         <p:txBody>
-          <a:bodyPr wrap="square" lIns="0" rIns="0" tIns="0" bIns="0">
+          <a:bodyPr wrap="square" anchor="t" lIns="0" rIns="0" tIns="0" bIns="0">
             <a:spAutoFit/>
           </a:bodyPr>
           <a:lstStyle/>
           <a:p>
-            <a:pPr>
-              <a:spcBef>
-                <a:spcPts val="0"/>
-              </a:spcBef>
-              <a:spcAft>
-                <a:spcPts val="600"/>
-              </a:spcAft>
-            </a:pPr>
-            <a:r>
-              <a:rPr sz="1400" b="1">
-                <a:solidFill>
-                  <a:srgbClr val="3FC46B"/>
-                </a:solidFill>
-                <a:latin typeface="Calibri"/>
-              </a:rPr>
-              <a:t>✓  </a:t>
-            </a:r>
-            <a:r>
-              <a:rPr sz="1400" b="1">
-                <a:solidFill>
-                  <a:srgbClr val="3FC46B"/>
-                </a:solidFill>
-                <a:latin typeface="Calibri"/>
-              </a:rPr>
-              <a:t>Excellent compromis sécurité / vélocité</a:t>
-            </a:r>
-          </a:p>
-          <a:p>
-            <a:pPr>
-              <a:spcBef>
-                <a:spcPts val="0"/>
-              </a:spcBef>
-              <a:spcAft>
-                <a:spcPts val="600"/>
-              </a:spcAft>
-            </a:pPr>
-            <a:r>
-              <a:rPr sz="1400" b="1">
-                <a:solidFill>
-                  <a:srgbClr val="979FB0"/>
-                </a:solidFill>
-                <a:latin typeface="Calibri"/>
-              </a:rPr>
-              <a:t>▸  </a:t>
-            </a:r>
-            <a:r>
-              <a:rPr sz="1400" b="0">
-                <a:solidFill>
-                  <a:srgbClr val="979FB0"/>
-                </a:solidFill>
-                <a:latin typeface="Calibri"/>
-              </a:rPr>
-              <a:t>Pour des services critiques à fort trafic</a:t>
-            </a:r>
-          </a:p>
-          <a:p>
-            <a:pPr>
-              <a:spcBef>
-                <a:spcPts val="0"/>
-              </a:spcBef>
-              <a:spcAft>
-                <a:spcPts val="600"/>
-              </a:spcAft>
-            </a:pPr>
-            <a:r>
-              <a:rPr sz="1400" b="1">
-                <a:solidFill>
-                  <a:srgbClr val="F0645A"/>
-                </a:solidFill>
-                <a:latin typeface="Calibri"/>
-              </a:rPr>
-              <a:t>✕  </a:t>
-            </a:r>
-            <a:r>
-              <a:rPr sz="1400" b="1">
-                <a:solidFill>
-                  <a:srgbClr val="F0645A"/>
-                </a:solidFill>
-                <a:latin typeface="Calibri"/>
-              </a:rPr>
-              <a:t>Overkill pour un petit mono-service</a:t>
-            </a:r>
-          </a:p>
-        </p:txBody>
-      </p:sp>
-      <p:sp>
-        <p:nvSpPr>
-          <p:cNvPr id="15" name="Rounded Rectangle 14"/>
+            <a:pPr algn="r">
+              <a:spcBef>
+                <a:spcPts val="0"/>
+              </a:spcBef>
+              <a:spcAft>
+                <a:spcPts val="400"/>
+              </a:spcAft>
+            </a:pPr>
+            <a:r>
+              <a:rPr sz="1000" b="1">
+                <a:solidFill>
+                  <a:srgbClr val="EF7627"/>
+                </a:solidFill>
+                <a:latin typeface="Calibri"/>
+              </a:rPr>
+              <a:t>12</a:t>
+            </a:r>
+          </a:p>
+        </p:txBody>
+      </p:sp>
+      <p:sp>
+        <p:nvSpPr>
+          <p:cNvPr id="7" name="Rounded Rectangle 6"/>
           <p:cNvSpPr/>
           <p:nvPr/>
         </p:nvSpPr>
         <p:spPr>
           <a:xfrm>
-            <a:off x="777240" y="4480560"/>
-            <a:ext cx="10607040" cy="1417320"/>
+            <a:off x="777240" y="1600200"/>
+            <a:ext cx="5257800" cy="2697480"/>
           </a:xfrm>
           <a:prstGeom prst="roundRect">
             <a:avLst>
@@ -5525,6 +5672,488 @@
       </p:sp>
       <p:sp>
         <p:nvSpPr>
+          <p:cNvPr id="8" name="Rectangle 7"/>
+          <p:cNvSpPr/>
+          <p:nvPr/>
+        </p:nvSpPr>
+        <p:spPr>
+          <a:xfrm>
+            <a:off x="777240" y="1764792"/>
+            <a:ext cx="91440" cy="384048"/>
+          </a:xfrm>
+          <a:prstGeom prst="rect">
+            <a:avLst/>
+          </a:prstGeom>
+          <a:solidFill>
+            <a:srgbClr val="55A8F5"/>
+          </a:solidFill>
+          <a:ln>
+            <a:noFill/>
+          </a:ln>
+          <a:effectLst/>
+        </p:spPr>
+        <p:style>
+          <a:lnRef idx="1">
+            <a:schemeClr val="accent1"/>
+          </a:lnRef>
+          <a:fillRef idx="3">
+            <a:schemeClr val="accent1"/>
+          </a:fillRef>
+          <a:effectRef idx="2">
+            <a:schemeClr val="accent1"/>
+          </a:effectRef>
+          <a:fontRef idx="minor">
+            <a:schemeClr val="lt1"/>
+          </a:fontRef>
+        </p:style>
+        <p:txBody>
+          <a:bodyPr rtlCol="0" anchor="ctr"/>
+          <a:lstStyle/>
+          <a:p>
+            <a:pPr algn="ctr"/>
+          </a:p>
+        </p:txBody>
+      </p:sp>
+      <p:sp>
+        <p:nvSpPr>
+          <p:cNvPr id="9" name="TextBox 8"/>
+          <p:cNvSpPr txBox="1"/>
+          <p:nvPr/>
+        </p:nvSpPr>
+        <p:spPr>
+          <a:xfrm>
+            <a:off x="1051560" y="1783080"/>
+            <a:ext cx="4800600" cy="411480"/>
+          </a:xfrm>
+          <a:prstGeom prst="rect">
+            <a:avLst/>
+          </a:prstGeom>
+          <a:noFill/>
+        </p:spPr>
+        <p:txBody>
+          <a:bodyPr wrap="square" anchor="t" lIns="0" rIns="0" tIns="0" bIns="0">
+            <a:spAutoFit/>
+          </a:bodyPr>
+          <a:lstStyle/>
+          <a:p>
+            <a:pPr algn="l">
+              <a:spcBef>
+                <a:spcPts val="0"/>
+              </a:spcBef>
+              <a:spcAft>
+                <a:spcPts val="400"/>
+              </a:spcAft>
+            </a:pPr>
+            <a:r>
+              <a:rPr sz="1600" b="1">
+                <a:solidFill>
+                  <a:srgbClr val="FFFFFF"/>
+                </a:solidFill>
+                <a:latin typeface="Calibri"/>
+              </a:rPr>
+              <a:t>Ce que j'ai appris</a:t>
+            </a:r>
+          </a:p>
+        </p:txBody>
+      </p:sp>
+      <p:sp>
+        <p:nvSpPr>
+          <p:cNvPr id="10" name="TextBox 9"/>
+          <p:cNvSpPr txBox="1"/>
+          <p:nvPr/>
+        </p:nvSpPr>
+        <p:spPr>
+          <a:xfrm>
+            <a:off x="1051560" y="2313432"/>
+            <a:ext cx="4754880" cy="1783080"/>
+          </a:xfrm>
+          <a:prstGeom prst="rect">
+            <a:avLst/>
+          </a:prstGeom>
+          <a:noFill/>
+        </p:spPr>
+        <p:txBody>
+          <a:bodyPr wrap="square" lIns="0" rIns="0" tIns="0" bIns="0">
+            <a:spAutoFit/>
+          </a:bodyPr>
+          <a:lstStyle/>
+          <a:p>
+            <a:pPr>
+              <a:spcBef>
+                <a:spcPts val="0"/>
+              </a:spcBef>
+              <a:spcAft>
+                <a:spcPts val="600"/>
+              </a:spcAft>
+            </a:pPr>
+            <a:r>
+              <a:rPr sz="1400" b="1">
+                <a:solidFill>
+                  <a:srgbClr val="EF7627"/>
+                </a:solidFill>
+                <a:latin typeface="Calibri"/>
+              </a:rPr>
+              <a:t>▸  </a:t>
+            </a:r>
+            <a:r>
+              <a:rPr sz="1400" b="0">
+                <a:solidFill>
+                  <a:srgbClr val="E8EAED"/>
+                </a:solidFill>
+                <a:latin typeface="Calibri"/>
+              </a:rPr>
+              <a:t>Le progressive delivery en pratique</a:t>
+            </a:r>
+          </a:p>
+          <a:p>
+            <a:pPr>
+              <a:spcBef>
+                <a:spcPts val="0"/>
+              </a:spcBef>
+              <a:spcAft>
+                <a:spcPts val="600"/>
+              </a:spcAft>
+            </a:pPr>
+            <a:r>
+              <a:rPr sz="1400" b="1">
+                <a:solidFill>
+                  <a:srgbClr val="EF7627"/>
+                </a:solidFill>
+                <a:latin typeface="Calibri"/>
+              </a:rPr>
+              <a:t>▸  </a:t>
+            </a:r>
+            <a:r>
+              <a:rPr sz="1400" b="0">
+                <a:solidFill>
+                  <a:srgbClr val="E8EAED"/>
+                </a:solidFill>
+                <a:latin typeface="Calibri"/>
+              </a:rPr>
+              <a:t>L'imbrication GitOps ↔ Rollouts</a:t>
+            </a:r>
+          </a:p>
+          <a:p>
+            <a:pPr>
+              <a:spcBef>
+                <a:spcPts val="0"/>
+              </a:spcBef>
+              <a:spcAft>
+                <a:spcPts val="600"/>
+              </a:spcAft>
+            </a:pPr>
+            <a:r>
+              <a:rPr sz="1400" b="1">
+                <a:solidFill>
+                  <a:srgbClr val="EF7627"/>
+                </a:solidFill>
+                <a:latin typeface="Calibri"/>
+              </a:rPr>
+              <a:t>▸  </a:t>
+            </a:r>
+            <a:r>
+              <a:rPr sz="1400" b="0">
+                <a:solidFill>
+                  <a:srgbClr val="E8EAED"/>
+                </a:solidFill>
+                <a:latin typeface="Calibri"/>
+              </a:rPr>
+              <a:t>Les métriques comme contrat de qualité</a:t>
+            </a:r>
+          </a:p>
+        </p:txBody>
+      </p:sp>
+      <p:sp>
+        <p:nvSpPr>
+          <p:cNvPr id="11" name="Rounded Rectangle 10"/>
+          <p:cNvSpPr/>
+          <p:nvPr/>
+        </p:nvSpPr>
+        <p:spPr>
+          <a:xfrm>
+            <a:off x="6263640" y="1600200"/>
+            <a:ext cx="5120640" cy="2697480"/>
+          </a:xfrm>
+          <a:prstGeom prst="roundRect">
+            <a:avLst>
+              <a:gd name="adj" fmla="val 6000"/>
+            </a:avLst>
+          </a:prstGeom>
+          <a:solidFill>
+            <a:srgbClr val="1E2533"/>
+          </a:solidFill>
+          <a:ln w="12700">
+            <a:solidFill>
+              <a:srgbClr val="323C4F"/>
+            </a:solidFill>
+          </a:ln>
+          <a:effectLst/>
+        </p:spPr>
+        <p:style>
+          <a:lnRef idx="1">
+            <a:schemeClr val="accent1"/>
+          </a:lnRef>
+          <a:fillRef idx="3">
+            <a:schemeClr val="accent1"/>
+          </a:fillRef>
+          <a:effectRef idx="2">
+            <a:schemeClr val="accent1"/>
+          </a:effectRef>
+          <a:fontRef idx="minor">
+            <a:schemeClr val="lt1"/>
+          </a:fontRef>
+        </p:style>
+        <p:txBody>
+          <a:bodyPr rtlCol="0" anchor="ctr"/>
+          <a:lstStyle/>
+          <a:p>
+            <a:pPr algn="ctr"/>
+          </a:p>
+        </p:txBody>
+      </p:sp>
+      <p:sp>
+        <p:nvSpPr>
+          <p:cNvPr id="12" name="Rectangle 11"/>
+          <p:cNvSpPr/>
+          <p:nvPr/>
+        </p:nvSpPr>
+        <p:spPr>
+          <a:xfrm>
+            <a:off x="6263640" y="1764792"/>
+            <a:ext cx="91440" cy="384048"/>
+          </a:xfrm>
+          <a:prstGeom prst="rect">
+            <a:avLst/>
+          </a:prstGeom>
+          <a:solidFill>
+            <a:srgbClr val="EF7627"/>
+          </a:solidFill>
+          <a:ln>
+            <a:noFill/>
+          </a:ln>
+          <a:effectLst/>
+        </p:spPr>
+        <p:style>
+          <a:lnRef idx="1">
+            <a:schemeClr val="accent1"/>
+          </a:lnRef>
+          <a:fillRef idx="3">
+            <a:schemeClr val="accent1"/>
+          </a:fillRef>
+          <a:effectRef idx="2">
+            <a:schemeClr val="accent1"/>
+          </a:effectRef>
+          <a:fontRef idx="minor">
+            <a:schemeClr val="lt1"/>
+          </a:fontRef>
+        </p:style>
+        <p:txBody>
+          <a:bodyPr rtlCol="0" anchor="ctr"/>
+          <a:lstStyle/>
+          <a:p>
+            <a:pPr algn="ctr"/>
+          </a:p>
+        </p:txBody>
+      </p:sp>
+      <p:sp>
+        <p:nvSpPr>
+          <p:cNvPr id="13" name="TextBox 12"/>
+          <p:cNvSpPr txBox="1"/>
+          <p:nvPr/>
+        </p:nvSpPr>
+        <p:spPr>
+          <a:xfrm>
+            <a:off x="6537959" y="1783080"/>
+            <a:ext cx="4663440" cy="411480"/>
+          </a:xfrm>
+          <a:prstGeom prst="rect">
+            <a:avLst/>
+          </a:prstGeom>
+          <a:noFill/>
+        </p:spPr>
+        <p:txBody>
+          <a:bodyPr wrap="square" anchor="t" lIns="0" rIns="0" tIns="0" bIns="0">
+            <a:spAutoFit/>
+          </a:bodyPr>
+          <a:lstStyle/>
+          <a:p>
+            <a:pPr algn="l">
+              <a:spcBef>
+                <a:spcPts val="0"/>
+              </a:spcBef>
+              <a:spcAft>
+                <a:spcPts val="400"/>
+              </a:spcAft>
+            </a:pPr>
+            <a:r>
+              <a:rPr sz="1600" b="1">
+                <a:solidFill>
+                  <a:srgbClr val="FFFFFF"/>
+                </a:solidFill>
+                <a:latin typeface="Calibri"/>
+              </a:rPr>
+              <a:t>Mon avis</a:t>
+            </a:r>
+          </a:p>
+        </p:txBody>
+      </p:sp>
+      <p:sp>
+        <p:nvSpPr>
+          <p:cNvPr id="14" name="TextBox 13"/>
+          <p:cNvSpPr txBox="1"/>
+          <p:nvPr/>
+        </p:nvSpPr>
+        <p:spPr>
+          <a:xfrm>
+            <a:off x="6537959" y="2313432"/>
+            <a:ext cx="4617720" cy="1783080"/>
+          </a:xfrm>
+          <a:prstGeom prst="rect">
+            <a:avLst/>
+          </a:prstGeom>
+          <a:noFill/>
+        </p:spPr>
+        <p:txBody>
+          <a:bodyPr wrap="square" lIns="0" rIns="0" tIns="0" bIns="0">
+            <a:spAutoFit/>
+          </a:bodyPr>
+          <a:lstStyle/>
+          <a:p>
+            <a:pPr>
+              <a:spcBef>
+                <a:spcPts val="0"/>
+              </a:spcBef>
+              <a:spcAft>
+                <a:spcPts val="600"/>
+              </a:spcAft>
+            </a:pPr>
+            <a:r>
+              <a:rPr sz="1400" b="1">
+                <a:solidFill>
+                  <a:srgbClr val="3FC46B"/>
+                </a:solidFill>
+                <a:latin typeface="Calibri"/>
+              </a:rPr>
+              <a:t>✓  </a:t>
+            </a:r>
+            <a:r>
+              <a:rPr sz="1400" b="1">
+                <a:solidFill>
+                  <a:srgbClr val="3FC46B"/>
+                </a:solidFill>
+                <a:latin typeface="Calibri"/>
+              </a:rPr>
+              <a:t>Excellent compromis sécurité / vélocité</a:t>
+            </a:r>
+          </a:p>
+          <a:p>
+            <a:pPr>
+              <a:spcBef>
+                <a:spcPts val="0"/>
+              </a:spcBef>
+              <a:spcAft>
+                <a:spcPts val="600"/>
+              </a:spcAft>
+            </a:pPr>
+            <a:r>
+              <a:rPr sz="1400" b="1">
+                <a:solidFill>
+                  <a:srgbClr val="979FB0"/>
+                </a:solidFill>
+                <a:latin typeface="Calibri"/>
+              </a:rPr>
+              <a:t>▸  </a:t>
+            </a:r>
+            <a:r>
+              <a:rPr sz="1400" b="0">
+                <a:solidFill>
+                  <a:srgbClr val="979FB0"/>
+                </a:solidFill>
+                <a:latin typeface="Calibri"/>
+              </a:rPr>
+              <a:t>Pour des services critiques à fort trafic</a:t>
+            </a:r>
+          </a:p>
+          <a:p>
+            <a:pPr>
+              <a:spcBef>
+                <a:spcPts val="0"/>
+              </a:spcBef>
+              <a:spcAft>
+                <a:spcPts val="600"/>
+              </a:spcAft>
+            </a:pPr>
+            <a:r>
+              <a:rPr sz="1400" b="1">
+                <a:solidFill>
+                  <a:srgbClr val="F0645A"/>
+                </a:solidFill>
+                <a:latin typeface="Calibri"/>
+              </a:rPr>
+              <a:t>✕  </a:t>
+            </a:r>
+            <a:r>
+              <a:rPr sz="1400" b="1">
+                <a:solidFill>
+                  <a:srgbClr val="F0645A"/>
+                </a:solidFill>
+                <a:latin typeface="Calibri"/>
+              </a:rPr>
+              <a:t>Overkill pour un petit mono-service</a:t>
+            </a:r>
+          </a:p>
+        </p:txBody>
+      </p:sp>
+      <p:sp>
+        <p:nvSpPr>
+          <p:cNvPr id="15" name="Rounded Rectangle 14"/>
+          <p:cNvSpPr/>
+          <p:nvPr/>
+        </p:nvSpPr>
+        <p:spPr>
+          <a:xfrm>
+            <a:off x="777240" y="4480560"/>
+            <a:ext cx="10607040" cy="1417320"/>
+          </a:xfrm>
+          <a:prstGeom prst="roundRect">
+            <a:avLst>
+              <a:gd name="adj" fmla="val 6000"/>
+            </a:avLst>
+          </a:prstGeom>
+          <a:solidFill>
+            <a:srgbClr val="1E2533"/>
+          </a:solidFill>
+          <a:ln w="12700">
+            <a:solidFill>
+              <a:srgbClr val="323C4F"/>
+            </a:solidFill>
+          </a:ln>
+          <a:effectLst/>
+        </p:spPr>
+        <p:style>
+          <a:lnRef idx="1">
+            <a:schemeClr val="accent1"/>
+          </a:lnRef>
+          <a:fillRef idx="3">
+            <a:schemeClr val="accent1"/>
+          </a:fillRef>
+          <a:effectRef idx="2">
+            <a:schemeClr val="accent1"/>
+          </a:effectRef>
+          <a:fontRef idx="minor">
+            <a:schemeClr val="lt1"/>
+          </a:fontRef>
+        </p:style>
+        <p:txBody>
+          <a:bodyPr rtlCol="0" anchor="ctr"/>
+          <a:lstStyle/>
+          <a:p>
+            <a:pPr algn="ctr"/>
+          </a:p>
+        </p:txBody>
+      </p:sp>
+      <p:sp>
+        <p:nvSpPr>
           <p:cNvPr id="16" name="Rectangle 15"/>
           <p:cNvSpPr/>
           <p:nvPr/>
@@ -5668,7 +6297,7 @@
 </p:sld>
 </file>
 
-<file path=ppt/slides/slide13.xml><?xml version="1.0" encoding="utf-8"?>
+<file path=ppt/slides/slide14.xml><?xml version="1.0" encoding="utf-8"?>
 <p:sld xmlns:a="http://schemas.openxmlformats.org/drawingml/2006/main" xmlns:p="http://schemas.openxmlformats.org/presentationml/2006/main" xmlns:r="http://schemas.openxmlformats.org/officeDocument/2006/relationships">
   <p:cSld>
     <p:bg>
@@ -12307,7 +12936,7 @@
         <p:spPr>
           <a:xfrm>
             <a:off x="6300216" y="3739896"/>
-            <a:ext cx="4810315" cy="2258568"/>
+            <a:ext cx="4496943" cy="2258568"/>
           </a:xfrm>
           <a:prstGeom prst="roundRect">
             <a:avLst>
@@ -12348,7 +12977,7 @@
       </p:sp>
       <p:pic>
         <p:nvPicPr>
-          <p:cNvPr id="15" name="Picture 14" descr="ui-app.png"/>
+          <p:cNvPr id="15" name="Picture 14" descr="ui-canary-grid.png"/>
           <p:cNvPicPr>
             <a:picLocks noChangeAspect="1"/>
           </p:cNvPicPr>
@@ -12363,7 +12992,7 @@
         <p:spPr>
           <a:xfrm>
             <a:off x="6355080" y="3794760"/>
-            <a:ext cx="4700587" cy="2148840"/>
+            <a:ext cx="4387215" cy="2148840"/>
           </a:xfrm>
           <a:prstGeom prst="rect">
             <a:avLst/>
@@ -12407,7 +13036,7 @@
                 </a:solidFill>
                 <a:latin typeface="Calibri"/>
               </a:rPr>
-              <a:t>Capture réelle de l'UI de l'app de démo</a:t>
+              <a:t>UI réelle : trafic réparti vert (canary) / bleu (stable)</a:t>
             </a:r>
           </a:p>
         </p:txBody>

--- a/slides/argo-rollouts.pptx
+++ b/slides/argo-rollouts.pptx
@@ -3586,7 +3586,7 @@
                 </a:solidFill>
                 <a:latin typeface="Calibri"/>
               </a:rPr>
-              <a:t>PROMOTION AUTOMATIQUE</a:t>
+              <a:t>DÉCISIONS D'IMPLÉMENTATION</a:t>
             </a:r>
           </a:p>
           <a:p>
@@ -3605,7 +3605,7 @@
                 </a:solidFill>
                 <a:latin typeface="Calibri"/>
               </a:rPr>
-              <a:t>Démo 1 — Canary sain</a:t>
+              <a:t>Choix techniques clés</a:t>
             </a:r>
           </a:p>
         </p:txBody>
@@ -3747,7 +3747,7 @@
         <p:spPr>
           <a:xfrm>
             <a:off x="777240" y="1600200"/>
-            <a:ext cx="3246120" cy="4206240"/>
+            <a:ext cx="10607040" cy="4206240"/>
           </a:xfrm>
           <a:prstGeom prst="roundRect">
             <a:avLst>
@@ -3801,7 +3801,7 @@
             <a:avLst/>
           </a:prstGeom>
           <a:solidFill>
-            <a:srgbClr val="3FC46B"/>
+            <a:srgbClr val="EF7627"/>
           </a:solidFill>
           <a:ln>
             <a:noFill/>
@@ -3839,7 +3839,7 @@
         <p:spPr>
           <a:xfrm>
             <a:off x="1051560" y="1783080"/>
-            <a:ext cx="2788920" cy="411480"/>
+            <a:ext cx="10149840" cy="411480"/>
           </a:xfrm>
           <a:prstGeom prst="rect">
             <a:avLst/>
@@ -3867,7 +3867,7 @@
                 </a:solidFill>
                 <a:latin typeface="Calibri"/>
               </a:rPr>
-              <a:t>Scénario</a:t>
+              <a:t>4 décisions structurantes</a:t>
             </a:r>
           </a:p>
         </p:txBody>
@@ -3881,7 +3881,7 @@
         <p:spPr>
           <a:xfrm>
             <a:off x="1051560" y="2313432"/>
-            <a:ext cx="2743200" cy="3291839"/>
+            <a:ext cx="10104119" cy="3291839"/>
           </a:xfrm>
           <a:prstGeom prst="rect">
             <a:avLst/>
@@ -3903,7 +3903,7 @@
               </a:spcAft>
             </a:pPr>
             <a:r>
-              <a:rPr sz="1400" b="1">
+              <a:rPr sz="1600" b="1">
                 <a:solidFill>
                   <a:srgbClr val="EF7627"/>
                 </a:solidFill>
@@ -3912,13 +3912,13 @@
               <a:t>▸  </a:t>
             </a:r>
             <a:r>
-              <a:rPr sz="1400" b="0">
+              <a:rPr sz="1600" b="0">
                 <a:solidFill>
                   <a:srgbClr val="E8EAED"/>
                 </a:solidFill>
                 <a:latin typeface="Calibri"/>
               </a:rPr>
-              <a:t>Déploiement de la version green</a:t>
+              <a:t>Canary sans service mesh → split par nombre de pods (simple, portable)</a:t>
             </a:r>
           </a:p>
           <a:p>
@@ -3931,22 +3931,106 @@
               </a:spcAft>
             </a:pPr>
             <a:r>
-              <a:rPr sz="1400" b="1">
+              <a:rPr sz="1600" b="1">
+                <a:solidFill>
+                  <a:srgbClr val="EF7627"/>
+                </a:solidFill>
+                <a:latin typeface="Calibri"/>
+              </a:rPr>
+              <a:t>▸  </a:t>
+            </a:r>
+            <a:r>
+              <a:rPr sz="1600" b="0">
+                <a:solidFill>
+                  <a:srgbClr val="E8EAED"/>
+                </a:solidFill>
+                <a:latin typeface="Calibri"/>
+              </a:rPr>
+              <a:t>Services stable + canary : le contrôleur y injecte le pod-template-hash</a:t>
+            </a:r>
+          </a:p>
+          <a:p>
+            <a:pPr lvl="1">
+              <a:spcBef>
+                <a:spcPts val="0"/>
+              </a:spcBef>
+              <a:spcAft>
+                <a:spcPts val="600"/>
+              </a:spcAft>
+            </a:pPr>
+            <a:r>
+              <a:rPr sz="1600" b="1">
                 <a:solidFill>
                   <a:srgbClr val="979FB0"/>
                 </a:solidFill>
                 <a:latin typeface="Calibri"/>
               </a:rPr>
+              <a:t>–  </a:t>
+            </a:r>
+            <a:r>
+              <a:rPr sz="1600" b="0">
+                <a:solidFill>
+                  <a:srgbClr val="E8EAED"/>
+                </a:solidFill>
+                <a:latin typeface="Calibri"/>
+              </a:rPr>
+              <a:t>la sonde cible ainsi précisément les pods canary</a:t>
+            </a:r>
+          </a:p>
+          <a:p>
+            <a:pPr>
+              <a:spcBef>
+                <a:spcPts val="0"/>
+              </a:spcBef>
+              <a:spcAft>
+                <a:spcPts val="600"/>
+              </a:spcAft>
+            </a:pPr>
+            <a:r>
+              <a:rPr sz="1600" b="1">
+                <a:solidFill>
+                  <a:srgbClr val="EF7627"/>
+                </a:solidFill>
+                <a:latin typeface="Calibri"/>
+              </a:rPr>
               <a:t>▸  </a:t>
             </a:r>
             <a:r>
-              <a:rPr sz="1400" b="0">
+              <a:rPr sz="1600" b="0">
+                <a:solidFill>
+                  <a:srgbClr val="E8EAED"/>
+                </a:solidFill>
+                <a:latin typeface="Calibri"/>
+              </a:rPr>
+              <a:t>Probes TCP (et non HTTP /color) : les pods bad-red restent Ready malgré les 500</a:t>
+            </a:r>
+          </a:p>
+          <a:p>
+            <a:pPr lvl="1">
+              <a:spcBef>
+                <a:spcPts val="0"/>
+              </a:spcBef>
+              <a:spcAft>
+                <a:spcPts val="600"/>
+              </a:spcAft>
+            </a:pPr>
+            <a:r>
+              <a:rPr sz="1600" b="1">
                 <a:solidFill>
                   <a:srgbClr val="979FB0"/>
                 </a:solidFill>
                 <a:latin typeface="Calibri"/>
               </a:rPr>
-              <a:t>Canary 20% → 40%</a:t>
+              <a:t>–  </a:t>
+            </a:r>
+            <a:r>
+              <a:rPr sz="1600" b="0">
+                <a:solidFill>
+                  <a:srgbClr val="E8EAED"/>
+                </a:solidFill>
+                <a:latin typeface="Calibri"/>
+              </a:rPr>
+              <a:t>on démontre un rollback piloté par l'ANALYSE, pas par la santé</a:t>
             </a:r>
           </a:p>
           <a:p>
@@ -3959,7 +4043,7 @@
               </a:spcAft>
             </a:pPr>
             <a:r>
-              <a:rPr sz="1400" b="1">
+              <a:rPr sz="1600" b="1">
                 <a:solidFill>
                   <a:srgbClr val="EF7627"/>
                 </a:solidFill>
@@ -3968,17 +4052,17 @@
               <a:t>▸  </a:t>
             </a:r>
             <a:r>
-              <a:rPr sz="1400" b="0">
+              <a:rPr sz="1600" b="0">
                 <a:solidFill>
                   <a:srgbClr val="E8EAED"/>
                 </a:solidFill>
                 <a:latin typeface="Calibri"/>
               </a:rPr>
-              <a:t>AnalysisRun sonde le canary</a:t>
-            </a:r>
-          </a:p>
-          <a:p>
-            <a:pPr>
+              <a:t>AnalysisTemplate de type Job : sonde 30 requêtes, exige ≥ 95 % de succès</a:t>
+            </a:r>
+          </a:p>
+          <a:p>
+            <a:pPr lvl="1">
               <a:spcBef>
                 <a:spcPts val="0"/>
               </a:spcBef>
@@ -3987,126 +4071,26 @@
               </a:spcAft>
             </a:pPr>
             <a:r>
-              <a:rPr sz="1400" b="1">
-                <a:solidFill>
-                  <a:srgbClr val="3FC46B"/>
-                </a:solidFill>
-                <a:latin typeface="Calibri"/>
-              </a:rPr>
-              <a:t>✓  </a:t>
-            </a:r>
-            <a:r>
-              <a:rPr sz="1400" b="1">
-                <a:solidFill>
-                  <a:srgbClr val="3FC46B"/>
-                </a:solidFill>
-                <a:latin typeface="Calibri"/>
-              </a:rPr>
-              <a:t>30/30 = 100 % (seuil 95%)</a:t>
-            </a:r>
-          </a:p>
-          <a:p>
-            <a:pPr>
-              <a:spcBef>
-                <a:spcPts val="0"/>
-              </a:spcBef>
-              <a:spcAft>
-                <a:spcPts val="600"/>
-              </a:spcAft>
-            </a:pPr>
-            <a:r>
-              <a:rPr sz="1400" b="1">
-                <a:solidFill>
-                  <a:srgbClr val="3FC46B"/>
-                </a:solidFill>
-                <a:latin typeface="Calibri"/>
-              </a:rPr>
-              <a:t>✓  </a:t>
-            </a:r>
-            <a:r>
-              <a:rPr sz="1400" b="1">
-                <a:solidFill>
-                  <a:srgbClr val="3FC46B"/>
-                </a:solidFill>
-                <a:latin typeface="Calibri"/>
-              </a:rPr>
-              <a:t>Promotion auto à 100 %</a:t>
-            </a:r>
-          </a:p>
-        </p:txBody>
-      </p:sp>
-      <p:sp>
-        <p:nvSpPr>
-          <p:cNvPr id="11" name="Rounded Rectangle 10"/>
-          <p:cNvSpPr/>
-          <p:nvPr/>
-        </p:nvSpPr>
-        <p:spPr>
-          <a:xfrm>
-            <a:off x="4197096" y="1545336"/>
-            <a:ext cx="6840980" cy="4407408"/>
-          </a:xfrm>
-          <a:prstGeom prst="roundRect">
-            <a:avLst>
-              <a:gd name="adj" fmla="val 3000"/>
-            </a:avLst>
-          </a:prstGeom>
-          <a:solidFill>
-            <a:srgbClr val="1E2533"/>
-          </a:solidFill>
-          <a:ln w="12700">
-            <a:solidFill>
-              <a:srgbClr val="323C4F"/>
-            </a:solidFill>
-          </a:ln>
-          <a:effectLst/>
-        </p:spPr>
-        <p:style>
-          <a:lnRef idx="1">
-            <a:schemeClr val="accent1"/>
-          </a:lnRef>
-          <a:fillRef idx="3">
-            <a:schemeClr val="accent1"/>
-          </a:fillRef>
-          <a:effectRef idx="2">
-            <a:schemeClr val="accent1"/>
-          </a:effectRef>
-          <a:fontRef idx="minor">
-            <a:schemeClr val="lt1"/>
-          </a:fontRef>
-        </p:style>
-        <p:txBody>
-          <a:bodyPr rtlCol="0" anchor="ctr"/>
-          <a:lstStyle/>
-          <a:p>
-            <a:pPr algn="ctr"/>
-          </a:p>
-        </p:txBody>
-      </p:sp>
-      <p:pic>
-        <p:nvPicPr>
-          <p:cNvPr id="12" name="Picture 11" descr="demo-canary-inprogress.png"/>
-          <p:cNvPicPr>
-            <a:picLocks noChangeAspect="1"/>
-          </p:cNvPicPr>
-          <p:nvPr/>
-        </p:nvPicPr>
-        <p:blipFill>
-          <a:blip r:embed="rId2"/>
-          <a:stretch>
-            <a:fillRect/>
-          </a:stretch>
-        </p:blipFill>
-        <p:spPr>
-          <a:xfrm>
-            <a:off x="4251960" y="1600200"/>
-            <a:ext cx="6731252" cy="4297680"/>
-          </a:xfrm>
-          <a:prstGeom prst="rect">
-            <a:avLst/>
-          </a:prstGeom>
-        </p:spPr>
-      </p:pic>
+              <a:rPr sz="1600" b="1">
+                <a:solidFill>
+                  <a:srgbClr val="979FB0"/>
+                </a:solidFill>
+                <a:latin typeface="Calibri"/>
+              </a:rPr>
+              <a:t>–  </a:t>
+            </a:r>
+            <a:r>
+              <a:rPr sz="1600" b="0">
+                <a:solidFill>
+                  <a:srgbClr val="E8EAED"/>
+                </a:solidFill>
+                <a:latin typeface="Calibri"/>
+              </a:rPr>
+              <a:t>autonome ; variante Prometheus fournie pour la production</a:t>
+            </a:r>
+          </a:p>
+        </p:txBody>
+      </p:sp>
     </p:spTree>
   </p:cSld>
   <p:clrMapOvr>
@@ -4214,7 +4198,7 @@
                 </a:solidFill>
                 <a:latin typeface="Calibri"/>
               </a:rPr>
-              <a:t>ROLLBACK AUTOMATIQUE</a:t>
+              <a:t>PROMOTION AUTOMATIQUE</a:t>
             </a:r>
           </a:p>
           <a:p>
@@ -4233,7 +4217,7 @@
                 </a:solidFill>
                 <a:latin typeface="Calibri"/>
               </a:rPr>
-              <a:t>Démo 2 — Canary défaillant</a:t>
+              <a:t>Démo 1 — Canary sain</a:t>
             </a:r>
           </a:p>
         </p:txBody>
@@ -4429,7 +4413,7 @@
             <a:avLst/>
           </a:prstGeom>
           <a:solidFill>
-            <a:srgbClr val="F0645A"/>
+            <a:srgbClr val="3FC46B"/>
           </a:solidFill>
           <a:ln>
             <a:noFill/>
@@ -4546,7 +4530,7 @@
                 </a:solidFill>
                 <a:latin typeface="Calibri"/>
               </a:rPr>
-              <a:t>Déploiement de bad-red</a:t>
+              <a:t>Déploiement de la version green</a:t>
             </a:r>
           </a:p>
           <a:p>
@@ -4561,20 +4545,48 @@
             <a:r>
               <a:rPr sz="1400" b="1">
                 <a:solidFill>
-                  <a:srgbClr val="F0645A"/>
-                </a:solidFill>
-                <a:latin typeface="Calibri"/>
-              </a:rPr>
-              <a:t>✕  </a:t>
-            </a:r>
+                  <a:srgbClr val="979FB0"/>
+                </a:solidFill>
+                <a:latin typeface="Calibri"/>
+              </a:rPr>
+              <a:t>▸  </a:t>
+            </a:r>
+            <a:r>
+              <a:rPr sz="1400" b="0">
+                <a:solidFill>
+                  <a:srgbClr val="979FB0"/>
+                </a:solidFill>
+                <a:latin typeface="Calibri"/>
+              </a:rPr>
+              <a:t>Canary 20% → 40%</a:t>
+            </a:r>
+          </a:p>
+          <a:p>
+            <a:pPr>
+              <a:spcBef>
+                <a:spcPts val="0"/>
+              </a:spcBef>
+              <a:spcAft>
+                <a:spcPts val="600"/>
+              </a:spcAft>
+            </a:pPr>
             <a:r>
               <a:rPr sz="1400" b="1">
                 <a:solidFill>
-                  <a:srgbClr val="F0645A"/>
-                </a:solidFill>
-                <a:latin typeface="Calibri"/>
-              </a:rPr>
-              <a:t>Réponses HTTP 500</a:t>
+                  <a:srgbClr val="EF7627"/>
+                </a:solidFill>
+                <a:latin typeface="Calibri"/>
+              </a:rPr>
+              <a:t>▸  </a:t>
+            </a:r>
+            <a:r>
+              <a:rPr sz="1400" b="0">
+                <a:solidFill>
+                  <a:srgbClr val="E8EAED"/>
+                </a:solidFill>
+                <a:latin typeface="Calibri"/>
+              </a:rPr>
+              <a:t>AnalysisRun sonde le canary</a:t>
             </a:r>
           </a:p>
           <a:p>
@@ -4589,20 +4601,20 @@
             <a:r>
               <a:rPr sz="1400" b="1">
                 <a:solidFill>
-                  <a:srgbClr val="F0645A"/>
-                </a:solidFill>
-                <a:latin typeface="Calibri"/>
-              </a:rPr>
-              <a:t>✕  </a:t>
+                  <a:srgbClr val="3FC46B"/>
+                </a:solidFill>
+                <a:latin typeface="Calibri"/>
+              </a:rPr>
+              <a:t>✓  </a:t>
             </a:r>
             <a:r>
               <a:rPr sz="1400" b="1">
                 <a:solidFill>
-                  <a:srgbClr val="F0645A"/>
-                </a:solidFill>
-                <a:latin typeface="Calibri"/>
-              </a:rPr>
-              <a:t>Sonde : 5/30 = 16 %</a:t>
+                  <a:srgbClr val="3FC46B"/>
+                </a:solidFill>
+                <a:latin typeface="Calibri"/>
+              </a:rPr>
+              <a:t>30/30 = 100 % (seuil 95%)</a:t>
             </a:r>
           </a:p>
           <a:p>
@@ -4617,48 +4629,20 @@
             <a:r>
               <a:rPr sz="1400" b="1">
                 <a:solidFill>
-                  <a:srgbClr val="F0645A"/>
-                </a:solidFill>
-                <a:latin typeface="Calibri"/>
-              </a:rPr>
-              <a:t>✕  </a:t>
+                  <a:srgbClr val="3FC46B"/>
+                </a:solidFill>
+                <a:latin typeface="Calibri"/>
+              </a:rPr>
+              <a:t>✓  </a:t>
             </a:r>
             <a:r>
               <a:rPr sz="1400" b="1">
                 <a:solidFill>
-                  <a:srgbClr val="F0645A"/>
-                </a:solidFill>
-                <a:latin typeface="Calibri"/>
-              </a:rPr>
-              <a:t>Metric Failed → RolloutAborted</a:t>
-            </a:r>
-          </a:p>
-          <a:p>
-            <a:pPr>
-              <a:spcBef>
-                <a:spcPts val="0"/>
-              </a:spcBef>
-              <a:spcAft>
-                <a:spcPts val="600"/>
-              </a:spcAft>
-            </a:pPr>
-            <a:r>
-              <a:rPr sz="1400" b="1">
-                <a:solidFill>
                   <a:srgbClr val="3FC46B"/>
                 </a:solidFill>
                 <a:latin typeface="Calibri"/>
               </a:rPr>
-              <a:t>✓  </a:t>
-            </a:r>
-            <a:r>
-              <a:rPr sz="1400" b="1">
-                <a:solidFill>
-                  <a:srgbClr val="3FC46B"/>
-                </a:solidFill>
-                <a:latin typeface="Calibri"/>
-              </a:rPr>
-              <a:t>Trafic gardé sur green, 0 downtime</a:t>
+              <a:t>Promotion auto à 100 %</a:t>
             </a:r>
           </a:p>
         </p:txBody>
@@ -4671,8 +4655,8 @@
         </p:nvSpPr>
         <p:spPr>
           <a:xfrm>
-            <a:off x="4197096" y="1728216"/>
-            <a:ext cx="7141636" cy="4041648"/>
+            <a:off x="4105656" y="1453895"/>
+            <a:ext cx="7424927" cy="4162744"/>
           </a:xfrm>
           <a:prstGeom prst="roundRect">
             <a:avLst>
@@ -4713,7 +4697,7 @@
       </p:sp>
       <p:pic>
         <p:nvPicPr>
-          <p:cNvPr id="12" name="Picture 11" descr="demo-rollback.png"/>
+          <p:cNvPr id="12" name="Picture 11" descr="dashboard-demo1.png"/>
           <p:cNvPicPr>
             <a:picLocks noChangeAspect="1"/>
           </p:cNvPicPr>
@@ -4727,14 +4711,74 @@
         </p:blipFill>
         <p:spPr>
           <a:xfrm>
-            <a:off x="4251960" y="1783080"/>
-            <a:ext cx="7031908" cy="3931920"/>
+            <a:off x="4160520" y="1508760"/>
+            <a:ext cx="7315200" cy="4053016"/>
           </a:xfrm>
           <a:prstGeom prst="rect">
             <a:avLst/>
           </a:prstGeom>
         </p:spPr>
       </p:pic>
+      <p:sp>
+        <p:nvSpPr>
+          <p:cNvPr id="13" name="TextBox 12"/>
+          <p:cNvSpPr txBox="1"/>
+          <p:nvPr/>
+        </p:nvSpPr>
+        <p:spPr>
+          <a:xfrm>
+            <a:off x="4160520" y="5779008"/>
+            <a:ext cx="7315200" cy="320040"/>
+          </a:xfrm>
+          <a:prstGeom prst="rect">
+            <a:avLst/>
+          </a:prstGeom>
+          <a:noFill/>
+        </p:spPr>
+        <p:txBody>
+          <a:bodyPr wrap="square" anchor="t" lIns="0" rIns="0" tIns="0" bIns="0">
+            <a:spAutoFit/>
+          </a:bodyPr>
+          <a:lstStyle/>
+          <a:p>
+            <a:pPr algn="l">
+              <a:spcBef>
+                <a:spcPts val="0"/>
+              </a:spcBef>
+              <a:spcAft>
+                <a:spcPts val="400"/>
+              </a:spcAft>
+            </a:pPr>
+            <a:r>
+              <a:rPr sz="1100" b="0">
+                <a:solidFill>
+                  <a:srgbClr val="979FB0"/>
+                </a:solidFill>
+                <a:latin typeface="Calibri"/>
+              </a:rPr>
+              <a:t>Dashboard réel : étapes du canary à gauche, </a:t>
+            </a:r>
+            <a:r>
+              <a:rPr sz="1100" b="1">
+                <a:solidFill>
+                  <a:srgbClr val="3FC46B"/>
+                </a:solidFill>
+                <a:latin typeface="Calibri"/>
+              </a:rPr>
+              <a:t>analyse ✓ verte</a:t>
+            </a:r>
+            <a:r>
+              <a:rPr sz="1100" b="0">
+                <a:solidFill>
+                  <a:srgbClr val="979FB0"/>
+                </a:solidFill>
+                <a:latin typeface="Calibri"/>
+              </a:rPr>
+              <a:t> sur la révision canary → la promotion se poursuit.</a:t>
+            </a:r>
+          </a:p>
+        </p:txBody>
+      </p:sp>
     </p:spTree>
   </p:cSld>
   <p:clrMapOvr>
@@ -4842,7 +4886,7 @@
                 </a:solidFill>
                 <a:latin typeface="Calibri"/>
               </a:rPr>
-              <a:t>LE DASHBOARD ARGO ROLLOUTS</a:t>
+              <a:t>ROLLBACK AUTOMATIQUE</a:t>
             </a:r>
           </a:p>
           <a:p>
@@ -4861,7 +4905,7 @@
                 </a:solidFill>
                 <a:latin typeface="Calibri"/>
               </a:rPr>
-              <a:t>Pilotage &amp; observabilité</a:t>
+              <a:t>Démo 2 — Canary défaillant</a:t>
             </a:r>
           </a:p>
         </p:txBody>
@@ -5057,7 +5101,7 @@
             <a:avLst/>
           </a:prstGeom>
           <a:solidFill>
-            <a:srgbClr val="55A8F5"/>
+            <a:srgbClr val="F0645A"/>
           </a:solidFill>
           <a:ln>
             <a:noFill/>
@@ -5123,7 +5167,7 @@
                 </a:solidFill>
                 <a:latin typeface="Calibri"/>
               </a:rPr>
-              <a:t>Vue temps réel</a:t>
+              <a:t>Scénario</a:t>
             </a:r>
           </a:p>
         </p:txBody>
@@ -5174,7 +5218,7 @@
                 </a:solidFill>
                 <a:latin typeface="Calibri"/>
               </a:rPr>
-              <a:t>Stratégie &amp; poids actuel (40 %)</a:t>
+              <a:t>Déploiement de bad-red</a:t>
             </a:r>
           </a:p>
           <a:p>
@@ -5189,20 +5233,20 @@
             <a:r>
               <a:rPr sz="1400" b="1">
                 <a:solidFill>
-                  <a:srgbClr val="EF7627"/>
-                </a:solidFill>
-                <a:latin typeface="Calibri"/>
-              </a:rPr>
-              <a:t>▸  </a:t>
-            </a:r>
-            <a:r>
-              <a:rPr sz="1400" b="0">
-                <a:solidFill>
-                  <a:srgbClr val="E8EAED"/>
-                </a:solidFill>
-                <a:latin typeface="Calibri"/>
-              </a:rPr>
-              <a:t>Révisions stable / canary</a:t>
+                  <a:srgbClr val="F0645A"/>
+                </a:solidFill>
+                <a:latin typeface="Calibri"/>
+              </a:rPr>
+              <a:t>✕  </a:t>
+            </a:r>
+            <a:r>
+              <a:rPr sz="1400" b="1">
+                <a:solidFill>
+                  <a:srgbClr val="F0645A"/>
+                </a:solidFill>
+                <a:latin typeface="Calibri"/>
+              </a:rPr>
+              <a:t>L'app renvoie des HTTP 500</a:t>
             </a:r>
           </a:p>
           <a:p>
@@ -5217,20 +5261,20 @@
             <a:r>
               <a:rPr sz="1400" b="1">
                 <a:solidFill>
-                  <a:srgbClr val="EF7627"/>
-                </a:solidFill>
-                <a:latin typeface="Calibri"/>
-              </a:rPr>
-              <a:t>▸  </a:t>
-            </a:r>
-            <a:r>
-              <a:rPr sz="1400" b="0">
-                <a:solidFill>
-                  <a:srgbClr val="E8EAED"/>
-                </a:solidFill>
-                <a:latin typeface="Calibri"/>
-              </a:rPr>
-              <a:t>État des pods et analyses</a:t>
+                  <a:srgbClr val="F0645A"/>
+                </a:solidFill>
+                <a:latin typeface="Calibri"/>
+              </a:rPr>
+              <a:t>✕  </a:t>
+            </a:r>
+            <a:r>
+              <a:rPr sz="1400" b="1">
+                <a:solidFill>
+                  <a:srgbClr val="F0645A"/>
+                </a:solidFill>
+                <a:latin typeface="Calibri"/>
+              </a:rPr>
+              <a:t>Sonde : 5/30 = 16 % (seuil 95)</a:t>
             </a:r>
           </a:p>
           <a:p>
@@ -5245,20 +5289,20 @@
             <a:r>
               <a:rPr sz="1400" b="1">
                 <a:solidFill>
-                  <a:srgbClr val="EF7627"/>
-                </a:solidFill>
-                <a:latin typeface="Calibri"/>
-              </a:rPr>
-              <a:t>▸  </a:t>
-            </a:r>
-            <a:r>
-              <a:rPr sz="1400" b="0">
-                <a:solidFill>
-                  <a:srgbClr val="E8EAED"/>
-                </a:solidFill>
-                <a:latin typeface="Calibri"/>
-              </a:rPr>
-              <a:t>Pause / Promote / Restart en 1 clic</a:t>
+                  <a:srgbClr val="F0645A"/>
+                </a:solidFill>
+                <a:latin typeface="Calibri"/>
+              </a:rPr>
+              <a:t>✕  </a:t>
+            </a:r>
+            <a:r>
+              <a:rPr sz="1400" b="1">
+                <a:solidFill>
+                  <a:srgbClr val="F0645A"/>
+                </a:solidFill>
+                <a:latin typeface="Calibri"/>
+              </a:rPr>
+              <a:t>Metric Failed → RolloutAborted</a:t>
             </a:r>
           </a:p>
           <a:p>
@@ -5273,20 +5317,20 @@
             <a:r>
               <a:rPr sz="1400" b="1">
                 <a:solidFill>
-                  <a:srgbClr val="979FB0"/>
-                </a:solidFill>
-                <a:latin typeface="Calibri"/>
-              </a:rPr>
-              <a:t>▸  </a:t>
-            </a:r>
-            <a:r>
-              <a:rPr sz="1400" b="0">
-                <a:solidFill>
-                  <a:srgbClr val="979FB0"/>
-                </a:solidFill>
-                <a:latin typeface="Calibri"/>
-              </a:rPr>
-              <a:t>Capture pendant un canary figé</a:t>
+                  <a:srgbClr val="3FC46B"/>
+                </a:solidFill>
+                <a:latin typeface="Calibri"/>
+              </a:rPr>
+              <a:t>✓  </a:t>
+            </a:r>
+            <a:r>
+              <a:rPr sz="1400" b="1">
+                <a:solidFill>
+                  <a:srgbClr val="3FC46B"/>
+                </a:solidFill>
+                <a:latin typeface="Calibri"/>
+              </a:rPr>
+              <a:t>Trafic gardé sur stable, 0 downtime</a:t>
             </a:r>
           </a:p>
         </p:txBody>
@@ -5299,8 +5343,8 @@
         </p:nvSpPr>
         <p:spPr>
           <a:xfrm>
-            <a:off x="4197096" y="1545336"/>
-            <a:ext cx="5957642" cy="4407408"/>
+            <a:off x="4105656" y="1453895"/>
+            <a:ext cx="7424927" cy="4162744"/>
           </a:xfrm>
           <a:prstGeom prst="roundRect">
             <a:avLst>
@@ -5341,7 +5385,7 @@
       </p:sp>
       <p:pic>
         <p:nvPicPr>
-          <p:cNvPr id="12" name="Picture 11" descr="dashboard-canary.png"/>
+          <p:cNvPr id="12" name="Picture 11" descr="dashboard-demo2.png"/>
           <p:cNvPicPr>
             <a:picLocks noChangeAspect="1"/>
           </p:cNvPicPr>
@@ -5355,14 +5399,92 @@
         </p:blipFill>
         <p:spPr>
           <a:xfrm>
-            <a:off x="4251960" y="1600200"/>
-            <a:ext cx="5847914" cy="4297680"/>
+            <a:off x="4160520" y="1508760"/>
+            <a:ext cx="7315200" cy="4053016"/>
           </a:xfrm>
           <a:prstGeom prst="rect">
             <a:avLst/>
           </a:prstGeom>
         </p:spPr>
       </p:pic>
+      <p:sp>
+        <p:nvSpPr>
+          <p:cNvPr id="13" name="TextBox 12"/>
+          <p:cNvSpPr txBox="1"/>
+          <p:nvPr/>
+        </p:nvSpPr>
+        <p:spPr>
+          <a:xfrm>
+            <a:off x="4160520" y="5779008"/>
+            <a:ext cx="7315200" cy="320040"/>
+          </a:xfrm>
+          <a:prstGeom prst="rect">
+            <a:avLst/>
+          </a:prstGeom>
+          <a:noFill/>
+        </p:spPr>
+        <p:txBody>
+          <a:bodyPr wrap="square" anchor="t" lIns="0" rIns="0" tIns="0" bIns="0">
+            <a:spAutoFit/>
+          </a:bodyPr>
+          <a:lstStyle/>
+          <a:p>
+            <a:pPr algn="l">
+              <a:spcBef>
+                <a:spcPts val="0"/>
+              </a:spcBef>
+              <a:spcAft>
+                <a:spcPts val="400"/>
+              </a:spcAft>
+            </a:pPr>
+            <a:r>
+              <a:rPr sz="1100" b="0">
+                <a:solidFill>
+                  <a:srgbClr val="979FB0"/>
+                </a:solidFill>
+                <a:latin typeface="Calibri"/>
+              </a:rPr>
+              <a:t>Dashboard réel : statut </a:t>
+            </a:r>
+            <a:r>
+              <a:rPr sz="1100" b="1">
+                <a:solidFill>
+                  <a:srgbClr val="F0645A"/>
+                </a:solidFill>
+                <a:latin typeface="Calibri"/>
+              </a:rPr>
+              <a:t>Degraded</a:t>
+            </a:r>
+            <a:r>
+              <a:rPr sz="1100" b="0">
+                <a:solidFill>
+                  <a:srgbClr val="979FB0"/>
+                </a:solidFill>
+                <a:latin typeface="Calibri"/>
+              </a:rPr>
+              <a:t> et </a:t>
+            </a:r>
+            <a:r>
+              <a:rPr sz="1100" b="1">
+                <a:solidFill>
+                  <a:srgbClr val="F0645A"/>
+                </a:solidFill>
+                <a:latin typeface="Calibri"/>
+              </a:rPr>
+              <a:t>analyse ✕ rouge</a:t>
+            </a:r>
+            <a:r>
+              <a:rPr sz="1100" b="0">
+                <a:solidFill>
+                  <a:srgbClr val="979FB0"/>
+                </a:solidFill>
+                <a:latin typeface="Calibri"/>
+              </a:rPr>
+              <a:t> → rollback automatique vers la version stable.</a:t>
+            </a:r>
+          </a:p>
+        </p:txBody>
+      </p:sp>
     </p:spTree>
   </p:cSld>
   <p:clrMapOvr>
@@ -6367,8 +6489,8 @@
         </p:nvSpPr>
         <p:spPr>
           <a:xfrm>
-            <a:off x="868680" y="2286000"/>
-            <a:ext cx="10515600" cy="1097280"/>
+            <a:off x="868680" y="1051560"/>
+            <a:ext cx="10515600" cy="914400"/>
           </a:xfrm>
           <a:prstGeom prst="rect">
             <a:avLst/>
@@ -6390,13 +6512,13 @@
               </a:spcAft>
             </a:pPr>
             <a:r>
-              <a:rPr sz="4400" b="1">
+              <a:rPr sz="3800" b="1">
                 <a:solidFill>
                   <a:srgbClr val="FFFFFF"/>
                 </a:solidFill>
                 <a:latin typeface="Calibri"/>
               </a:rPr>
-              <a:t>Merci de votre attention</a:t>
+              <a:t>Pour aller plus loin</a:t>
             </a:r>
           </a:p>
         </p:txBody>
@@ -6409,7 +6531,7 @@
         </p:nvSpPr>
         <p:spPr>
           <a:xfrm>
-            <a:off x="914400" y="3383280"/>
+            <a:off x="914400" y="1965960"/>
             <a:ext cx="2743200" cy="45720"/>
           </a:xfrm>
           <a:prstGeom prst="rect">
@@ -6453,8 +6575,8 @@
         </p:nvSpPr>
         <p:spPr>
           <a:xfrm>
-            <a:off x="868680" y="3611880"/>
-            <a:ext cx="10515600" cy="548640"/>
+            <a:off x="868680" y="2194560"/>
+            <a:ext cx="10515600" cy="640080"/>
           </a:xfrm>
           <a:prstGeom prst="rect">
             <a:avLst/>
@@ -6476,13 +6598,13 @@
               </a:spcAft>
             </a:pPr>
             <a:r>
-              <a:rPr sz="2200" b="0">
+              <a:rPr sz="1600" b="0">
                 <a:solidFill>
                   <a:srgbClr val="979FB0"/>
                 </a:solidFill>
                 <a:latin typeface="Calibri"/>
               </a:rPr>
-              <a:t>Questions ?</a:t>
+              <a:t>L'intégralité du projet (manifests, GitOps, CI, captures) est sur le dépôt :</a:t>
             </a:r>
           </a:p>
         </p:txBody>
@@ -6495,12 +6617,102 @@
         </p:nvSpPr>
         <p:spPr>
           <a:xfrm>
-            <a:off x="868680" y="4480560"/>
-            <a:ext cx="7498079" cy="914400"/>
+            <a:off x="868680" y="2880360"/>
+            <a:ext cx="10424160" cy="914400"/>
           </a:xfrm>
           <a:prstGeom prst="roundRect">
             <a:avLst>
-              <a:gd name="adj" fmla="val 5000"/>
+              <a:gd name="adj" fmla="val 10000"/>
+            </a:avLst>
+          </a:prstGeom>
+          <a:solidFill>
+            <a:srgbClr val="1E2533"/>
+          </a:solidFill>
+          <a:ln w="19050">
+            <a:solidFill>
+              <a:srgbClr val="EF7627"/>
+            </a:solidFill>
+          </a:ln>
+          <a:effectLst/>
+        </p:spPr>
+        <p:style>
+          <a:lnRef idx="1">
+            <a:schemeClr val="accent1"/>
+          </a:lnRef>
+          <a:fillRef idx="3">
+            <a:schemeClr val="accent1"/>
+          </a:fillRef>
+          <a:effectRef idx="2">
+            <a:schemeClr val="accent1"/>
+          </a:effectRef>
+          <a:fontRef idx="minor">
+            <a:schemeClr val="lt1"/>
+          </a:fontRef>
+        </p:style>
+        <p:txBody>
+          <a:bodyPr rtlCol="0" anchor="ctr"/>
+          <a:lstStyle/>
+          <a:p>
+            <a:pPr algn="ctr"/>
+          </a:p>
+        </p:txBody>
+      </p:sp>
+      <p:sp>
+        <p:nvSpPr>
+          <p:cNvPr id="7" name="TextBox 6"/>
+          <p:cNvSpPr txBox="1"/>
+          <p:nvPr/>
+        </p:nvSpPr>
+        <p:spPr>
+          <a:xfrm>
+            <a:off x="1188720" y="2880360"/>
+            <a:ext cx="9875520" cy="914400"/>
+          </a:xfrm>
+          <a:prstGeom prst="rect">
+            <a:avLst/>
+          </a:prstGeom>
+          <a:noFill/>
+        </p:spPr>
+        <p:txBody>
+          <a:bodyPr wrap="square" anchor="ctr" lIns="0" rIns="0" tIns="0" bIns="0">
+            <a:spAutoFit/>
+          </a:bodyPr>
+          <a:lstStyle/>
+          <a:p>
+            <a:pPr algn="l">
+              <a:spcBef>
+                <a:spcPts val="0"/>
+              </a:spcBef>
+              <a:spcAft>
+                <a:spcPts val="400"/>
+              </a:spcAft>
+            </a:pPr>
+            <a:r>
+              <a:rPr sz="2200" b="1">
+                <a:solidFill>
+                  <a:srgbClr val="55A8F5"/>
+                </a:solidFill>
+                <a:latin typeface="Consolas"/>
+              </a:rPr>
+              <a:t>github.com/Louis-JB/argo-rollouts-demo</a:t>
+            </a:r>
+          </a:p>
+        </p:txBody>
+      </p:sp>
+      <p:sp>
+        <p:nvSpPr>
+          <p:cNvPr id="8" name="Rounded Rectangle 7"/>
+          <p:cNvSpPr/>
+          <p:nvPr/>
+        </p:nvSpPr>
+        <p:spPr>
+          <a:xfrm>
+            <a:off x="868680" y="4069080"/>
+            <a:ext cx="5120640" cy="2011680"/>
+          </a:xfrm>
+          <a:prstGeom prst="roundRect">
+            <a:avLst>
+              <a:gd name="adj" fmla="val 6000"/>
             </a:avLst>
           </a:prstGeom>
           <a:solidFill>
@@ -6537,53 +6749,58 @@
       </p:sp>
       <p:sp>
         <p:nvSpPr>
-          <p:cNvPr id="7" name="TextBox 6"/>
+          <p:cNvPr id="9" name="Rectangle 8"/>
+          <p:cNvSpPr/>
+          <p:nvPr/>
+        </p:nvSpPr>
+        <p:spPr>
+          <a:xfrm>
+            <a:off x="868680" y="4233672"/>
+            <a:ext cx="91440" cy="384048"/>
+          </a:xfrm>
+          <a:prstGeom prst="rect">
+            <a:avLst/>
+          </a:prstGeom>
+          <a:solidFill>
+            <a:srgbClr val="EF7627"/>
+          </a:solidFill>
+          <a:ln>
+            <a:noFill/>
+          </a:ln>
+          <a:effectLst/>
+        </p:spPr>
+        <p:style>
+          <a:lnRef idx="1">
+            <a:schemeClr val="accent1"/>
+          </a:lnRef>
+          <a:fillRef idx="3">
+            <a:schemeClr val="accent1"/>
+          </a:fillRef>
+          <a:effectRef idx="2">
+            <a:schemeClr val="accent1"/>
+          </a:effectRef>
+          <a:fontRef idx="minor">
+            <a:schemeClr val="lt1"/>
+          </a:fontRef>
+        </p:style>
+        <p:txBody>
+          <a:bodyPr rtlCol="0" anchor="ctr"/>
+          <a:lstStyle/>
+          <a:p>
+            <a:pPr algn="ctr"/>
+          </a:p>
+        </p:txBody>
+      </p:sp>
+      <p:sp>
+        <p:nvSpPr>
+          <p:cNvPr id="10" name="TextBox 9"/>
           <p:cNvSpPr txBox="1"/>
           <p:nvPr/>
         </p:nvSpPr>
         <p:spPr>
           <a:xfrm>
-            <a:off x="1097280" y="4553712"/>
-            <a:ext cx="7040879" cy="640080"/>
-          </a:xfrm>
-          <a:prstGeom prst="rect">
-            <a:avLst/>
-          </a:prstGeom>
-          <a:noFill/>
-        </p:spPr>
-        <p:txBody>
-          <a:bodyPr wrap="none" lIns="0" tIns="0" rIns="0" bIns="0">
-            <a:spAutoFit/>
-          </a:bodyPr>
-          <a:lstStyle/>
-          <a:p>
-            <a:pPr>
-              <a:spcAft>
-                <a:spcPts val="200"/>
-              </a:spcAft>
-            </a:pPr>
-            <a:r>
-              <a:rPr sz="1500">
-                <a:solidFill>
-                  <a:srgbClr val="3FC46B"/>
-                </a:solidFill>
-                <a:latin typeface="Consolas"/>
-              </a:rPr>
-              <a:t>kubectl argo rollouts get rollout rollouts-demo --watch</a:t>
-            </a:r>
-          </a:p>
-        </p:txBody>
-      </p:sp>
-      <p:sp>
-        <p:nvSpPr>
-          <p:cNvPr id="8" name="TextBox 7"/>
-          <p:cNvSpPr txBox="1"/>
-          <p:nvPr/>
-        </p:nvSpPr>
-        <p:spPr>
-          <a:xfrm>
-            <a:off x="868680" y="5669280"/>
-            <a:ext cx="10515600" cy="457200"/>
+            <a:off x="1143000" y="4251960"/>
+            <a:ext cx="4663440" cy="411480"/>
           </a:xfrm>
           <a:prstGeom prst="rect">
             <a:avLst/>
@@ -6605,13 +6822,361 @@
               </a:spcAft>
             </a:pPr>
             <a:r>
-              <a:rPr sz="1400" b="1">
-                <a:solidFill>
-                  <a:srgbClr val="55A8F5"/>
-                </a:solidFill>
-                <a:latin typeface="Calibri"/>
-              </a:rPr>
-              <a:t>github.com/Louis-JB/argo-rollouts-demo</a:t>
+              <a:rPr sz="1600" b="1">
+                <a:solidFill>
+                  <a:srgbClr val="FFFFFF"/>
+                </a:solidFill>
+                <a:latin typeface="Calibri"/>
+              </a:rPr>
+              <a:t>Le dépôt contient</a:t>
+            </a:r>
+          </a:p>
+        </p:txBody>
+      </p:sp>
+      <p:sp>
+        <p:nvSpPr>
+          <p:cNvPr id="11" name="TextBox 10"/>
+          <p:cNvSpPr txBox="1"/>
+          <p:nvPr/>
+        </p:nvSpPr>
+        <p:spPr>
+          <a:xfrm>
+            <a:off x="1143000" y="4782312"/>
+            <a:ext cx="4617720" cy="1097280"/>
+          </a:xfrm>
+          <a:prstGeom prst="rect">
+            <a:avLst/>
+          </a:prstGeom>
+          <a:noFill/>
+        </p:spPr>
+        <p:txBody>
+          <a:bodyPr wrap="square" lIns="0" rIns="0" tIns="0" bIns="0">
+            <a:spAutoFit/>
+          </a:bodyPr>
+          <a:lstStyle/>
+          <a:p>
+            <a:pPr>
+              <a:spcBef>
+                <a:spcPts val="0"/>
+              </a:spcBef>
+              <a:spcAft>
+                <a:spcPts val="600"/>
+              </a:spcAft>
+            </a:pPr>
+            <a:r>
+              <a:rPr sz="1300" b="1">
+                <a:solidFill>
+                  <a:srgbClr val="EF7627"/>
+                </a:solidFill>
+                <a:latin typeface="Calibri"/>
+              </a:rPr>
+              <a:t>▸  </a:t>
+            </a:r>
+            <a:r>
+              <a:rPr sz="1300" b="0">
+                <a:solidFill>
+                  <a:srgbClr val="E8EAED"/>
+                </a:solidFill>
+                <a:latin typeface="Calibri"/>
+              </a:rPr>
+              <a:t>Manifests Kubernetes (Rollout, Analysis, Services)</a:t>
+            </a:r>
+          </a:p>
+          <a:p>
+            <a:pPr>
+              <a:spcBef>
+                <a:spcPts val="0"/>
+              </a:spcBef>
+              <a:spcAft>
+                <a:spcPts val="600"/>
+              </a:spcAft>
+            </a:pPr>
+            <a:r>
+              <a:rPr sz="1300" b="1">
+                <a:solidFill>
+                  <a:srgbClr val="EF7627"/>
+                </a:solidFill>
+                <a:latin typeface="Calibri"/>
+              </a:rPr>
+              <a:t>▸  </a:t>
+            </a:r>
+            <a:r>
+              <a:rPr sz="1300" b="0">
+                <a:solidFill>
+                  <a:srgbClr val="E8EAED"/>
+                </a:solidFill>
+                <a:latin typeface="Calibri"/>
+              </a:rPr>
+              <a:t>Application ArgoCD (GitOps) + CI GitHub Actions</a:t>
+            </a:r>
+          </a:p>
+          <a:p>
+            <a:pPr>
+              <a:spcBef>
+                <a:spcPts val="0"/>
+              </a:spcBef>
+              <a:spcAft>
+                <a:spcPts val="600"/>
+              </a:spcAft>
+            </a:pPr>
+            <a:r>
+              <a:rPr sz="1300" b="1">
+                <a:solidFill>
+                  <a:srgbClr val="EF7627"/>
+                </a:solidFill>
+                <a:latin typeface="Calibri"/>
+              </a:rPr>
+              <a:t>▸  </a:t>
+            </a:r>
+            <a:r>
+              <a:rPr sz="1300" b="0">
+                <a:solidFill>
+                  <a:srgbClr val="E8EAED"/>
+                </a:solidFill>
+                <a:latin typeface="Calibri"/>
+              </a:rPr>
+              <a:t>Diagrammes, runbook, captures réelles d'exécution</a:t>
+            </a:r>
+          </a:p>
+        </p:txBody>
+      </p:sp>
+      <p:sp>
+        <p:nvSpPr>
+          <p:cNvPr id="12" name="Rounded Rectangle 11"/>
+          <p:cNvSpPr/>
+          <p:nvPr/>
+        </p:nvSpPr>
+        <p:spPr>
+          <a:xfrm>
+            <a:off x="6172200" y="4069080"/>
+            <a:ext cx="5120640" cy="2011680"/>
+          </a:xfrm>
+          <a:prstGeom prst="roundRect">
+            <a:avLst>
+              <a:gd name="adj" fmla="val 6000"/>
+            </a:avLst>
+          </a:prstGeom>
+          <a:solidFill>
+            <a:srgbClr val="1E2533"/>
+          </a:solidFill>
+          <a:ln w="12700">
+            <a:solidFill>
+              <a:srgbClr val="323C4F"/>
+            </a:solidFill>
+          </a:ln>
+          <a:effectLst/>
+        </p:spPr>
+        <p:style>
+          <a:lnRef idx="1">
+            <a:schemeClr val="accent1"/>
+          </a:lnRef>
+          <a:fillRef idx="3">
+            <a:schemeClr val="accent1"/>
+          </a:fillRef>
+          <a:effectRef idx="2">
+            <a:schemeClr val="accent1"/>
+          </a:effectRef>
+          <a:fontRef idx="minor">
+            <a:schemeClr val="lt1"/>
+          </a:fontRef>
+        </p:style>
+        <p:txBody>
+          <a:bodyPr rtlCol="0" anchor="ctr"/>
+          <a:lstStyle/>
+          <a:p>
+            <a:pPr algn="ctr"/>
+          </a:p>
+        </p:txBody>
+      </p:sp>
+      <p:sp>
+        <p:nvSpPr>
+          <p:cNvPr id="13" name="Rectangle 12"/>
+          <p:cNvSpPr/>
+          <p:nvPr/>
+        </p:nvSpPr>
+        <p:spPr>
+          <a:xfrm>
+            <a:off x="6172200" y="4233672"/>
+            <a:ext cx="91440" cy="384048"/>
+          </a:xfrm>
+          <a:prstGeom prst="rect">
+            <a:avLst/>
+          </a:prstGeom>
+          <a:solidFill>
+            <a:srgbClr val="3FC46B"/>
+          </a:solidFill>
+          <a:ln>
+            <a:noFill/>
+          </a:ln>
+          <a:effectLst/>
+        </p:spPr>
+        <p:style>
+          <a:lnRef idx="1">
+            <a:schemeClr val="accent1"/>
+          </a:lnRef>
+          <a:fillRef idx="3">
+            <a:schemeClr val="accent1"/>
+          </a:fillRef>
+          <a:effectRef idx="2">
+            <a:schemeClr val="accent1"/>
+          </a:effectRef>
+          <a:fontRef idx="minor">
+            <a:schemeClr val="lt1"/>
+          </a:fontRef>
+        </p:style>
+        <p:txBody>
+          <a:bodyPr rtlCol="0" anchor="ctr"/>
+          <a:lstStyle/>
+          <a:p>
+            <a:pPr algn="ctr"/>
+          </a:p>
+        </p:txBody>
+      </p:sp>
+      <p:sp>
+        <p:nvSpPr>
+          <p:cNvPr id="14" name="TextBox 13"/>
+          <p:cNvSpPr txBox="1"/>
+          <p:nvPr/>
+        </p:nvSpPr>
+        <p:spPr>
+          <a:xfrm>
+            <a:off x="6446520" y="4251960"/>
+            <a:ext cx="4663440" cy="411480"/>
+          </a:xfrm>
+          <a:prstGeom prst="rect">
+            <a:avLst/>
+          </a:prstGeom>
+          <a:noFill/>
+        </p:spPr>
+        <p:txBody>
+          <a:bodyPr wrap="square" anchor="t" lIns="0" rIns="0" tIns="0" bIns="0">
+            <a:spAutoFit/>
+          </a:bodyPr>
+          <a:lstStyle/>
+          <a:p>
+            <a:pPr algn="l">
+              <a:spcBef>
+                <a:spcPts val="0"/>
+              </a:spcBef>
+              <a:spcAft>
+                <a:spcPts val="400"/>
+              </a:spcAft>
+            </a:pPr>
+            <a:r>
+              <a:rPr sz="1600" b="1">
+                <a:solidFill>
+                  <a:srgbClr val="FFFFFF"/>
+                </a:solidFill>
+                <a:latin typeface="Calibri"/>
+              </a:rPr>
+              <a:t>Reproduire la démo</a:t>
+            </a:r>
+          </a:p>
+        </p:txBody>
+      </p:sp>
+      <p:sp>
+        <p:nvSpPr>
+          <p:cNvPr id="15" name="TextBox 14"/>
+          <p:cNvSpPr txBox="1"/>
+          <p:nvPr/>
+        </p:nvSpPr>
+        <p:spPr>
+          <a:xfrm>
+            <a:off x="6446520" y="4782312"/>
+            <a:ext cx="4617720" cy="1097280"/>
+          </a:xfrm>
+          <a:prstGeom prst="rect">
+            <a:avLst/>
+          </a:prstGeom>
+          <a:noFill/>
+        </p:spPr>
+        <p:txBody>
+          <a:bodyPr wrap="square" lIns="0" rIns="0" tIns="0" bIns="0">
+            <a:spAutoFit/>
+          </a:bodyPr>
+          <a:lstStyle/>
+          <a:p>
+            <a:pPr>
+              <a:spcBef>
+                <a:spcPts val="0"/>
+              </a:spcBef>
+              <a:spcAft>
+                <a:spcPts val="600"/>
+              </a:spcAft>
+            </a:pPr>
+            <a:r>
+              <a:rPr sz="1300" b="1">
+                <a:solidFill>
+                  <a:srgbClr val="979FB0"/>
+                </a:solidFill>
+                <a:latin typeface="Calibri"/>
+              </a:rPr>
+              <a:t>▸  </a:t>
+            </a:r>
+            <a:r>
+              <a:rPr sz="1300" b="0">
+                <a:solidFill>
+                  <a:srgbClr val="979FB0"/>
+                </a:solidFill>
+                <a:latin typeface="Calibri"/>
+              </a:rPr>
+              <a:t>kubectl apply -k manifests/</a:t>
+            </a:r>
+          </a:p>
+          <a:p>
+            <a:pPr>
+              <a:spcBef>
+                <a:spcPts val="0"/>
+              </a:spcBef>
+              <a:spcAft>
+                <a:spcPts val="600"/>
+              </a:spcAft>
+            </a:pPr>
+            <a:r>
+              <a:rPr sz="1300" b="1">
+                <a:solidFill>
+                  <a:srgbClr val="979FB0"/>
+                </a:solidFill>
+                <a:latin typeface="Calibri"/>
+              </a:rPr>
+              <a:t>▸  </a:t>
+            </a:r>
+            <a:r>
+              <a:rPr sz="1300" b="0">
+                <a:solidFill>
+                  <a:srgbClr val="979FB0"/>
+                </a:solidFill>
+                <a:latin typeface="Calibri"/>
+              </a:rPr>
+              <a:t>kubectl argo rollouts get rollout rollouts-demo --watch</a:t>
+            </a:r>
+          </a:p>
+          <a:p>
+            <a:pPr>
+              <a:spcBef>
+                <a:spcPts val="0"/>
+              </a:spcBef>
+              <a:spcAft>
+                <a:spcPts val="600"/>
+              </a:spcAft>
+            </a:pPr>
+            <a:r>
+              <a:rPr sz="1300" b="1">
+                <a:solidFill>
+                  <a:srgbClr val="EF7627"/>
+                </a:solidFill>
+                <a:latin typeface="Calibri"/>
+              </a:rPr>
+              <a:t>▸  </a:t>
+            </a:r>
+            <a:r>
+              <a:rPr sz="1300" b="0">
+                <a:solidFill>
+                  <a:srgbClr val="E8EAED"/>
+                </a:solidFill>
+                <a:latin typeface="Calibri"/>
+              </a:rPr>
+              <a:t>Tout est documenté dans le README</a:t>
             </a:r>
           </a:p>
         </p:txBody>
@@ -7851,7 +8416,7 @@
                 </a:solidFill>
                 <a:latin typeface="Calibri"/>
               </a:rPr>
-              <a:t>POURQUOI ALLER PLUS LOIN</a:t>
+              <a:t>CONTEXTE &amp; DÉMARCHE DU DOSSIER</a:t>
             </a:r>
           </a:p>
           <a:p>
@@ -7870,7 +8435,7 @@
                 </a:solidFill>
                 <a:latin typeface="Calibri"/>
               </a:rPr>
-              <a:t>Le problème : le Deployment classique</a:t>
+              <a:t>Pourquoi ce sujet ?</a:t>
             </a:r>
           </a:p>
         </p:txBody>
@@ -8011,8 +8576,8 @@
         </p:nvSpPr>
         <p:spPr>
           <a:xfrm>
-            <a:off x="777240" y="1508760"/>
-            <a:ext cx="10607040" cy="731520"/>
+            <a:off x="777240" y="1463040"/>
+            <a:ext cx="10607040" cy="868680"/>
           </a:xfrm>
           <a:prstGeom prst="rect">
             <a:avLst/>
@@ -8034,49 +8599,49 @@
               </a:spcAft>
             </a:pPr>
             <a:r>
-              <a:rPr sz="1800" b="0">
+              <a:rPr sz="1600" b="0">
                 <a:solidFill>
                   <a:srgbClr val="E8EAED"/>
                 </a:solidFill>
                 <a:latin typeface="Calibri"/>
               </a:rPr>
-              <a:t>Un </a:t>
-            </a:r>
-            <a:r>
-              <a:rPr sz="1800" b="1">
+              <a:t>Kubernetes et le GitOps sont devenus les </a:t>
+            </a:r>
+            <a:r>
+              <a:rPr sz="1600" b="1">
+                <a:solidFill>
+                  <a:srgbClr val="FFFFFF"/>
+                </a:solidFill>
+                <a:latin typeface="Calibri"/>
+              </a:rPr>
+              <a:t>standards de l'industrie</a:t>
+            </a:r>
+            <a:r>
+              <a:rPr sz="1600" b="0">
+                <a:solidFill>
+                  <a:srgbClr val="E8EAED"/>
+                </a:solidFill>
+                <a:latin typeface="Calibri"/>
+              </a:rPr>
+              <a:t> pour déployer et exploiter les applications. Dans cet écosystème, j'ai choisi de creuser le </a:t>
+            </a:r>
+            <a:r>
+              <a:rPr sz="1600" b="1">
                 <a:solidFill>
                   <a:srgbClr val="EF7627"/>
                 </a:solidFill>
                 <a:latin typeface="Calibri"/>
               </a:rPr>
-              <a:t>Deployment</a:t>
-            </a:r>
-            <a:r>
-              <a:rPr sz="1800" b="0">
+              <a:t>déploiement progressif</a:t>
+            </a:r>
+            <a:r>
+              <a:rPr sz="1600" b="0">
                 <a:solidFill>
                   <a:srgbClr val="E8EAED"/>
                 </a:solidFill>
                 <a:latin typeface="Calibri"/>
               </a:rPr>
-              <a:t> fait un </a:t>
-            </a:r>
-            <a:r>
-              <a:rPr sz="1800" b="1">
-                <a:solidFill>
-                  <a:srgbClr val="FFFFFF"/>
-                </a:solidFill>
-                <a:latin typeface="Calibri"/>
-              </a:rPr>
-              <a:t>rolling update</a:t>
-            </a:r>
-            <a:r>
-              <a:rPr sz="1800" b="0">
-                <a:solidFill>
-                  <a:srgbClr val="E8EAED"/>
-                </a:solidFill>
-                <a:latin typeface="Calibri"/>
-              </a:rPr>
-              <a:t> : il remplace les pods un à un… sans jamais vérifier si la nouvelle version fonctionne.</a:t>
+              <a:t> avec Argo Rollouts.</a:t>
             </a:r>
           </a:p>
         </p:txBody>
@@ -8089,8 +8654,8 @@
         </p:nvSpPr>
         <p:spPr>
           <a:xfrm>
-            <a:off x="777240" y="2423160"/>
-            <a:ext cx="5257800" cy="3383280"/>
+            <a:off x="777240" y="2514600"/>
+            <a:ext cx="5257800" cy="3291840"/>
           </a:xfrm>
           <a:prstGeom prst="roundRect">
             <a:avLst>
@@ -8137,14 +8702,14 @@
         </p:nvSpPr>
         <p:spPr>
           <a:xfrm>
-            <a:off x="777240" y="2587752"/>
+            <a:off x="777240" y="2679192"/>
             <a:ext cx="91440" cy="384048"/>
           </a:xfrm>
           <a:prstGeom prst="rect">
             <a:avLst/>
           </a:prstGeom>
           <a:solidFill>
-            <a:srgbClr val="F0645A"/>
+            <a:srgbClr val="EF7627"/>
           </a:solidFill>
           <a:ln>
             <a:noFill/>
@@ -8181,7 +8746,7 @@
         </p:nvSpPr>
         <p:spPr>
           <a:xfrm>
-            <a:off x="1051560" y="2606040"/>
+            <a:off x="1051560" y="2697480"/>
             <a:ext cx="4800600" cy="411480"/>
           </a:xfrm>
           <a:prstGeom prst="rect">
@@ -8210,7 +8775,7 @@
                 </a:solidFill>
                 <a:latin typeface="Calibri"/>
               </a:rPr>
-              <a:t>Les risques</a:t>
+              <a:t>Pourquoi Argo Rollouts ?</a:t>
             </a:r>
           </a:p>
         </p:txBody>
@@ -8223,8 +8788,8 @@
         </p:nvSpPr>
         <p:spPr>
           <a:xfrm>
-            <a:off x="1051560" y="3136391"/>
-            <a:ext cx="4754880" cy="2468880"/>
+            <a:off x="1051560" y="3227832"/>
+            <a:ext cx="4754880" cy="2377440"/>
           </a:xfrm>
           <a:prstGeom prst="rect">
             <a:avLst/>
@@ -8246,22 +8811,22 @@
               </a:spcAft>
             </a:pPr>
             <a:r>
-              <a:rPr sz="1500" b="1">
-                <a:solidFill>
-                  <a:srgbClr val="F0645A"/>
-                </a:solidFill>
-                <a:latin typeface="Calibri"/>
-              </a:rPr>
-              <a:t>✕  </a:t>
-            </a:r>
-            <a:r>
-              <a:rPr sz="1500" b="1">
-                <a:solidFill>
-                  <a:srgbClr val="F0645A"/>
-                </a:solidFill>
-                <a:latin typeface="Calibri"/>
-              </a:rPr>
-              <a:t>Une v2 buggée part vers 100 % des utilisateurs</a:t>
+              <a:rPr sz="1400" b="1">
+                <a:solidFill>
+                  <a:srgbClr val="EF7627"/>
+                </a:solidFill>
+                <a:latin typeface="Calibri"/>
+              </a:rPr>
+              <a:t>▸  </a:t>
+            </a:r>
+            <a:r>
+              <a:rPr sz="1400" b="0">
+                <a:solidFill>
+                  <a:srgbClr val="E8EAED"/>
+                </a:solidFill>
+                <a:latin typeface="Calibri"/>
+              </a:rPr>
+              <a:t>Répond à un problème universel : déployer sans risque ni coupure</a:t>
             </a:r>
           </a:p>
           <a:p>
@@ -8274,22 +8839,22 @@
               </a:spcAft>
             </a:pPr>
             <a:r>
-              <a:rPr sz="1500" b="1">
-                <a:solidFill>
-                  <a:srgbClr val="F0645A"/>
-                </a:solidFill>
-                <a:latin typeface="Calibri"/>
-              </a:rPr>
-              <a:t>✕  </a:t>
-            </a:r>
-            <a:r>
-              <a:rPr sz="1500" b="1">
-                <a:solidFill>
-                  <a:srgbClr val="F0645A"/>
-                </a:solidFill>
-                <a:latin typeface="Calibri"/>
-              </a:rPr>
-              <a:t>Détection tardive : alertes, support, churn</a:t>
+              <a:rPr sz="1400" b="1">
+                <a:solidFill>
+                  <a:srgbClr val="EF7627"/>
+                </a:solidFill>
+                <a:latin typeface="Calibri"/>
+              </a:rPr>
+              <a:t>▸  </a:t>
+            </a:r>
+            <a:r>
+              <a:rPr sz="1400" b="0">
+                <a:solidFill>
+                  <a:srgbClr val="E8EAED"/>
+                </a:solidFill>
+                <a:latin typeface="Calibri"/>
+              </a:rPr>
+              <a:t>Brique concrète, très utilisée en entreprise</a:t>
             </a:r>
           </a:p>
           <a:p>
@@ -8302,22 +8867,22 @@
               </a:spcAft>
             </a:pPr>
             <a:r>
-              <a:rPr sz="1500" b="1">
-                <a:solidFill>
-                  <a:srgbClr val="F0645A"/>
-                </a:solidFill>
-                <a:latin typeface="Calibri"/>
-              </a:rPr>
-              <a:t>✕  </a:t>
-            </a:r>
-            <a:r>
-              <a:rPr sz="1500" b="1">
-                <a:solidFill>
-                  <a:srgbClr val="F0645A"/>
-                </a:solidFill>
-                <a:latin typeface="Calibri"/>
-              </a:rPr>
-              <a:t>Rollback manuel, sous stress, en plein incident</a:t>
+              <a:rPr sz="1400" b="1">
+                <a:solidFill>
+                  <a:srgbClr val="EF7627"/>
+                </a:solidFill>
+                <a:latin typeface="Calibri"/>
+              </a:rPr>
+              <a:t>▸  </a:t>
+            </a:r>
+            <a:r>
+              <a:rPr sz="1400" b="0">
+                <a:solidFill>
+                  <a:srgbClr val="E8EAED"/>
+                </a:solidFill>
+                <a:latin typeface="Calibri"/>
+              </a:rPr>
+              <a:t>Même éditeur qu'ArgoCD (déjà au cœur du GitOps)</a:t>
             </a:r>
           </a:p>
           <a:p>
@@ -8330,22 +8895,22 @@
               </a:spcAft>
             </a:pPr>
             <a:r>
-              <a:rPr sz="1500" b="1">
-                <a:solidFill>
-                  <a:srgbClr val="F0645A"/>
-                </a:solidFill>
-                <a:latin typeface="Calibri"/>
-              </a:rPr>
-              <a:t>✕  </a:t>
-            </a:r>
-            <a:r>
-              <a:rPr sz="1500" b="1">
-                <a:solidFill>
-                  <a:srgbClr val="F0645A"/>
-                </a:solidFill>
-                <a:latin typeface="Calibri"/>
-              </a:rPr>
-              <a:t>Aucune mesure objective avant de généraliser</a:t>
+              <a:rPr sz="1400" b="1">
+                <a:solidFill>
+                  <a:srgbClr val="EF7627"/>
+                </a:solidFill>
+                <a:latin typeface="Calibri"/>
+              </a:rPr>
+              <a:t>▸  </a:t>
+            </a:r>
+            <a:r>
+              <a:rPr sz="1400" b="0">
+                <a:solidFill>
+                  <a:srgbClr val="E8EAED"/>
+                </a:solidFill>
+                <a:latin typeface="Calibri"/>
+              </a:rPr>
+              <a:t>Sujet aligné avec mon intérêt pour le DevOps / SRE</a:t>
             </a:r>
           </a:p>
         </p:txBody>
@@ -8358,8 +8923,8 @@
         </p:nvSpPr>
         <p:spPr>
           <a:xfrm>
-            <a:off x="6263640" y="2423160"/>
-            <a:ext cx="5120640" cy="3383280"/>
+            <a:off x="6263640" y="2514600"/>
+            <a:ext cx="5120640" cy="3291840"/>
           </a:xfrm>
           <a:prstGeom prst="roundRect">
             <a:avLst>
@@ -8406,14 +8971,14 @@
         </p:nvSpPr>
         <p:spPr>
           <a:xfrm>
-            <a:off x="6263640" y="2587752"/>
+            <a:off x="6263640" y="2679192"/>
             <a:ext cx="91440" cy="384048"/>
           </a:xfrm>
           <a:prstGeom prst="rect">
             <a:avLst/>
           </a:prstGeom>
           <a:solidFill>
-            <a:srgbClr val="3FC46B"/>
+            <a:srgbClr val="55A8F5"/>
           </a:solidFill>
           <a:ln>
             <a:noFill/>
@@ -8450,7 +9015,7 @@
         </p:nvSpPr>
         <p:spPr>
           <a:xfrm>
-            <a:off x="6537959" y="2606040"/>
+            <a:off x="6537959" y="2697480"/>
             <a:ext cx="4663440" cy="411480"/>
           </a:xfrm>
           <a:prstGeom prst="rect">
@@ -8479,7 +9044,7 @@
                 </a:solidFill>
                 <a:latin typeface="Calibri"/>
               </a:rPr>
-              <a:t>Le besoin</a:t>
+              <a:t>Démarche de ce dossier</a:t>
             </a:r>
           </a:p>
         </p:txBody>
@@ -8492,8 +9057,8 @@
         </p:nvSpPr>
         <p:spPr>
           <a:xfrm>
-            <a:off x="6537959" y="3136391"/>
-            <a:ext cx="4617720" cy="2468880"/>
+            <a:off x="6537959" y="3227832"/>
+            <a:ext cx="4617720" cy="2377440"/>
           </a:xfrm>
           <a:prstGeom prst="rect">
             <a:avLst/>
@@ -8515,7 +9080,7 @@
               </a:spcAft>
             </a:pPr>
             <a:r>
-              <a:rPr sz="1500" b="1">
+              <a:rPr sz="1400" b="1">
                 <a:solidFill>
                   <a:srgbClr val="EF7627"/>
                 </a:solidFill>
@@ -8524,13 +9089,13 @@
               <a:t>▸  </a:t>
             </a:r>
             <a:r>
-              <a:rPr sz="1500" b="0">
+              <a:rPr sz="1400" b="0">
                 <a:solidFill>
                   <a:srgbClr val="E8EAED"/>
                 </a:solidFill>
                 <a:latin typeface="Calibri"/>
               </a:rPr>
-              <a:t>Exposer la v2 à une fraction du trafic d'abord</a:t>
+              <a:t>Recherche : comprendre la techno et ses usages</a:t>
             </a:r>
           </a:p>
           <a:p>
@@ -8543,7 +9108,7 @@
               </a:spcAft>
             </a:pPr>
             <a:r>
-              <a:rPr sz="1500" b="1">
+              <a:rPr sz="1400" b="1">
                 <a:solidFill>
                   <a:srgbClr val="EF7627"/>
                 </a:solidFill>
@@ -8552,13 +9117,13 @@
               <a:t>▸  </a:t>
             </a:r>
             <a:r>
-              <a:rPr sz="1500" b="0">
+              <a:rPr sz="1400" b="0">
                 <a:solidFill>
                   <a:srgbClr val="E8EAED"/>
                 </a:solidFill>
                 <a:latin typeface="Calibri"/>
               </a:rPr>
-              <a:t>Mesurer sa santé en conditions réelles</a:t>
+              <a:t>Implémentation réelle sur un cluster Kubernetes</a:t>
             </a:r>
           </a:p>
           <a:p>
@@ -8571,7 +9136,7 @@
               </a:spcAft>
             </a:pPr>
             <a:r>
-              <a:rPr sz="1500" b="1">
+              <a:rPr sz="1400" b="1">
                 <a:solidFill>
                   <a:srgbClr val="EF7627"/>
                 </a:solidFill>
@@ -8580,13 +9145,13 @@
               <a:t>▸  </a:t>
             </a:r>
             <a:r>
-              <a:rPr sz="1500" b="0">
+              <a:rPr sz="1400" b="0">
                 <a:solidFill>
                   <a:srgbClr val="E8EAED"/>
                 </a:solidFill>
                 <a:latin typeface="Calibri"/>
               </a:rPr>
-              <a:t>Promouvoir seulement si les métriques sont bonnes</a:t>
+              <a:t>Captures et logs authentiques à l'appui</a:t>
             </a:r>
           </a:p>
           <a:p>
@@ -8599,22 +9164,22 @@
               </a:spcAft>
             </a:pPr>
             <a:r>
-              <a:rPr sz="1500" b="1">
-                <a:solidFill>
-                  <a:srgbClr val="EF7627"/>
-                </a:solidFill>
-                <a:latin typeface="Calibri"/>
-              </a:rPr>
-              <a:t>▸  </a:t>
-            </a:r>
-            <a:r>
-              <a:rPr sz="1500" b="0">
-                <a:solidFill>
-                  <a:srgbClr val="E8EAED"/>
-                </a:solidFill>
-                <a:latin typeface="Calibri"/>
-              </a:rPr>
-              <a:t>Revenir en arrière automatiquement sinon</a:t>
+              <a:rPr sz="1400" b="1">
+                <a:solidFill>
+                  <a:srgbClr val="3FC46B"/>
+                </a:solidFill>
+                <a:latin typeface="Calibri"/>
+              </a:rPr>
+              <a:t>✓  </a:t>
+            </a:r>
+            <a:r>
+              <a:rPr sz="1400" b="1">
+                <a:solidFill>
+                  <a:srgbClr val="3FC46B"/>
+                </a:solidFill>
+                <a:latin typeface="Calibri"/>
+              </a:rPr>
+              <a:t>Document pensé pour se comprendre seul, sans oral</a:t>
             </a:r>
           </a:p>
         </p:txBody>
@@ -8726,7 +9291,7 @@
                 </a:solidFill>
                 <a:latin typeface="Calibri"/>
               </a:rPr>
-              <a:t>DÉFINITION</a:t>
+              <a:t>POURQUOI ALLER PLUS LOIN</a:t>
             </a:r>
           </a:p>
           <a:p>
@@ -8745,7 +9310,7 @@
                 </a:solidFill>
                 <a:latin typeface="Calibri"/>
               </a:rPr>
-              <a:t>Qu'est-ce qu'Argo Rollouts ?</a:t>
+              <a:t>Le problème : le Deployment classique</a:t>
             </a:r>
           </a:p>
         </p:txBody>
@@ -8887,7 +9452,7 @@
         <p:spPr>
           <a:xfrm>
             <a:off x="777240" y="1508760"/>
-            <a:ext cx="10607040" cy="822960"/>
+            <a:ext cx="10607040" cy="731520"/>
           </a:xfrm>
           <a:prstGeom prst="rect">
             <a:avLst/>
@@ -8920,11 +9485,29 @@
             <a:r>
               <a:rPr sz="1800" b="1">
                 <a:solidFill>
+                  <a:srgbClr val="EF7627"/>
+                </a:solidFill>
+                <a:latin typeface="Calibri"/>
+              </a:rPr>
+              <a:t>Deployment</a:t>
+            </a:r>
+            <a:r>
+              <a:rPr sz="1800" b="0">
+                <a:solidFill>
+                  <a:srgbClr val="E8EAED"/>
+                </a:solidFill>
+                <a:latin typeface="Calibri"/>
+              </a:rPr>
+              <a:t> fait un </a:t>
+            </a:r>
+            <a:r>
+              <a:rPr sz="1800" b="1">
+                <a:solidFill>
                   <a:srgbClr val="FFFFFF"/>
                 </a:solidFill>
                 <a:latin typeface="Calibri"/>
               </a:rPr>
-              <a:t>contrôleur Kubernetes</a:t>
+              <a:t>rolling update</a:t>
             </a:r>
             <a:r>
               <a:rPr sz="1800" b="0">
@@ -8933,25 +9516,7 @@
                 </a:solidFill>
                 <a:latin typeface="Calibri"/>
               </a:rPr>
-              <a:t> (projet CNCF, famille Argo) qui remplace le Deployment par une ressource </a:t>
-            </a:r>
-            <a:r>
-              <a:rPr sz="1800" b="1">
-                <a:solidFill>
-                  <a:srgbClr val="EF7627"/>
-                </a:solidFill>
-                <a:latin typeface="Calibri"/>
-              </a:rPr>
-              <a:t>Rollout</a:t>
-            </a:r>
-            <a:r>
-              <a:rPr sz="1800" b="0">
-                <a:solidFill>
-                  <a:srgbClr val="E8EAED"/>
-                </a:solidFill>
-                <a:latin typeface="Calibri"/>
-              </a:rPr>
-              <a:t> offrant la progressive delivery.</a:t>
+              <a:t> : il remplace les pods un à un… sans jamais vérifier si la nouvelle version fonctionne.</a:t>
             </a:r>
           </a:p>
         </p:txBody>
@@ -8964,8 +9529,8 @@
         </p:nvSpPr>
         <p:spPr>
           <a:xfrm>
-            <a:off x="777240" y="2468880"/>
-            <a:ext cx="3429000" cy="3200400"/>
+            <a:off x="777240" y="2423160"/>
+            <a:ext cx="5257800" cy="3383280"/>
           </a:xfrm>
           <a:prstGeom prst="roundRect">
             <a:avLst>
@@ -9012,14 +9577,14 @@
         </p:nvSpPr>
         <p:spPr>
           <a:xfrm>
-            <a:off x="777240" y="2633472"/>
+            <a:off x="777240" y="2587752"/>
             <a:ext cx="91440" cy="384048"/>
           </a:xfrm>
           <a:prstGeom prst="rect">
             <a:avLst/>
           </a:prstGeom>
           <a:solidFill>
-            <a:srgbClr val="EF7627"/>
+            <a:srgbClr val="F0645A"/>
           </a:solidFill>
           <a:ln>
             <a:noFill/>
@@ -9056,8 +9621,8 @@
         </p:nvSpPr>
         <p:spPr>
           <a:xfrm>
-            <a:off x="1051560" y="2651760"/>
-            <a:ext cx="2971800" cy="411480"/>
+            <a:off x="1051560" y="2606040"/>
+            <a:ext cx="4800600" cy="411480"/>
           </a:xfrm>
           <a:prstGeom prst="rect">
             <a:avLst/>
@@ -9085,7 +9650,7 @@
                 </a:solidFill>
                 <a:latin typeface="Calibri"/>
               </a:rPr>
-              <a:t>Canary</a:t>
+              <a:t>Les risques</a:t>
             </a:r>
           </a:p>
         </p:txBody>
@@ -9098,8 +9663,8 @@
         </p:nvSpPr>
         <p:spPr>
           <a:xfrm>
-            <a:off x="1051560" y="3182112"/>
-            <a:ext cx="2926080" cy="2286000"/>
+            <a:off x="1051560" y="3136391"/>
+            <a:ext cx="4754880" cy="2468880"/>
           </a:xfrm>
           <a:prstGeom prst="rect">
             <a:avLst/>
@@ -9123,20 +9688,20 @@
             <a:r>
               <a:rPr sz="1500" b="1">
                 <a:solidFill>
-                  <a:srgbClr val="EF7627"/>
-                </a:solidFill>
-                <a:latin typeface="Calibri"/>
-              </a:rPr>
-              <a:t>▸  </a:t>
-            </a:r>
-            <a:r>
-              <a:rPr sz="1500" b="0">
-                <a:solidFill>
-                  <a:srgbClr val="E8EAED"/>
-                </a:solidFill>
-                <a:latin typeface="Calibri"/>
-              </a:rPr>
-              <a:t>% croissant du trafic vers la v2</a:t>
+                  <a:srgbClr val="F0645A"/>
+                </a:solidFill>
+                <a:latin typeface="Calibri"/>
+              </a:rPr>
+              <a:t>✕  </a:t>
+            </a:r>
+            <a:r>
+              <a:rPr sz="1500" b="1">
+                <a:solidFill>
+                  <a:srgbClr val="F0645A"/>
+                </a:solidFill>
+                <a:latin typeface="Calibri"/>
+              </a:rPr>
+              <a:t>Une v2 buggée part vers 100 % des utilisateurs</a:t>
             </a:r>
           </a:p>
           <a:p>
@@ -9151,20 +9716,76 @@
             <a:r>
               <a:rPr sz="1500" b="1">
                 <a:solidFill>
-                  <a:srgbClr val="979FB0"/>
-                </a:solidFill>
-                <a:latin typeface="Calibri"/>
-              </a:rPr>
-              <a:t>▸  </a:t>
-            </a:r>
-            <a:r>
-              <a:rPr sz="1500" b="0">
-                <a:solidFill>
-                  <a:srgbClr val="979FB0"/>
-                </a:solidFill>
-                <a:latin typeface="Calibri"/>
-              </a:rPr>
-              <a:t>20% → 40% → 60% → 100%</a:t>
+                  <a:srgbClr val="F0645A"/>
+                </a:solidFill>
+                <a:latin typeface="Calibri"/>
+              </a:rPr>
+              <a:t>✕  </a:t>
+            </a:r>
+            <a:r>
+              <a:rPr sz="1500" b="1">
+                <a:solidFill>
+                  <a:srgbClr val="F0645A"/>
+                </a:solidFill>
+                <a:latin typeface="Calibri"/>
+              </a:rPr>
+              <a:t>Détection tardive : alertes, support, churn</a:t>
+            </a:r>
+          </a:p>
+          <a:p>
+            <a:pPr>
+              <a:spcBef>
+                <a:spcPts val="0"/>
+              </a:spcBef>
+              <a:spcAft>
+                <a:spcPts val="600"/>
+              </a:spcAft>
+            </a:pPr>
+            <a:r>
+              <a:rPr sz="1500" b="1">
+                <a:solidFill>
+                  <a:srgbClr val="F0645A"/>
+                </a:solidFill>
+                <a:latin typeface="Calibri"/>
+              </a:rPr>
+              <a:t>✕  </a:t>
+            </a:r>
+            <a:r>
+              <a:rPr sz="1500" b="1">
+                <a:solidFill>
+                  <a:srgbClr val="F0645A"/>
+                </a:solidFill>
+                <a:latin typeface="Calibri"/>
+              </a:rPr>
+              <a:t>Rollback manuel, sous stress, en plein incident</a:t>
+            </a:r>
+          </a:p>
+          <a:p>
+            <a:pPr>
+              <a:spcBef>
+                <a:spcPts val="0"/>
+              </a:spcBef>
+              <a:spcAft>
+                <a:spcPts val="600"/>
+              </a:spcAft>
+            </a:pPr>
+            <a:r>
+              <a:rPr sz="1500" b="1">
+                <a:solidFill>
+                  <a:srgbClr val="F0645A"/>
+                </a:solidFill>
+                <a:latin typeface="Calibri"/>
+              </a:rPr>
+              <a:t>✕  </a:t>
+            </a:r>
+            <a:r>
+              <a:rPr sz="1500" b="1">
+                <a:solidFill>
+                  <a:srgbClr val="F0645A"/>
+                </a:solidFill>
+                <a:latin typeface="Calibri"/>
+              </a:rPr>
+              <a:t>Aucune mesure objective avant de généraliser</a:t>
             </a:r>
           </a:p>
         </p:txBody>
@@ -9177,8 +9798,8 @@
         </p:nvSpPr>
         <p:spPr>
           <a:xfrm>
-            <a:off x="4370832" y="2468880"/>
-            <a:ext cx="3429000" cy="3200400"/>
+            <a:off x="6263640" y="2423160"/>
+            <a:ext cx="5120640" cy="3383280"/>
           </a:xfrm>
           <a:prstGeom prst="roundRect">
             <a:avLst>
@@ -9225,220 +9846,7 @@
         </p:nvSpPr>
         <p:spPr>
           <a:xfrm>
-            <a:off x="4370832" y="2633472"/>
-            <a:ext cx="91440" cy="384048"/>
-          </a:xfrm>
-          <a:prstGeom prst="rect">
-            <a:avLst/>
-          </a:prstGeom>
-          <a:solidFill>
-            <a:srgbClr val="55A8F5"/>
-          </a:solidFill>
-          <a:ln>
-            <a:noFill/>
-          </a:ln>
-          <a:effectLst/>
-        </p:spPr>
-        <p:style>
-          <a:lnRef idx="1">
-            <a:schemeClr val="accent1"/>
-          </a:lnRef>
-          <a:fillRef idx="3">
-            <a:schemeClr val="accent1"/>
-          </a:fillRef>
-          <a:effectRef idx="2">
-            <a:schemeClr val="accent1"/>
-          </a:effectRef>
-          <a:fontRef idx="minor">
-            <a:schemeClr val="lt1"/>
-          </a:fontRef>
-        </p:style>
-        <p:txBody>
-          <a:bodyPr rtlCol="0" anchor="ctr"/>
-          <a:lstStyle/>
-          <a:p>
-            <a:pPr algn="ctr"/>
-          </a:p>
-        </p:txBody>
-      </p:sp>
-      <p:sp>
-        <p:nvSpPr>
-          <p:cNvPr id="14" name="TextBox 13"/>
-          <p:cNvSpPr txBox="1"/>
-          <p:nvPr/>
-        </p:nvSpPr>
-        <p:spPr>
-          <a:xfrm>
-            <a:off x="4645152" y="2651760"/>
-            <a:ext cx="2971800" cy="411480"/>
-          </a:xfrm>
-          <a:prstGeom prst="rect">
-            <a:avLst/>
-          </a:prstGeom>
-          <a:noFill/>
-        </p:spPr>
-        <p:txBody>
-          <a:bodyPr wrap="square" anchor="t" lIns="0" rIns="0" tIns="0" bIns="0">
-            <a:spAutoFit/>
-          </a:bodyPr>
-          <a:lstStyle/>
-          <a:p>
-            <a:pPr algn="l">
-              <a:spcBef>
-                <a:spcPts val="0"/>
-              </a:spcBef>
-              <a:spcAft>
-                <a:spcPts val="400"/>
-              </a:spcAft>
-            </a:pPr>
-            <a:r>
-              <a:rPr sz="1600" b="1">
-                <a:solidFill>
-                  <a:srgbClr val="FFFFFF"/>
-                </a:solidFill>
-                <a:latin typeface="Calibri"/>
-              </a:rPr>
-              <a:t>Blue-Green</a:t>
-            </a:r>
-          </a:p>
-        </p:txBody>
-      </p:sp>
-      <p:sp>
-        <p:nvSpPr>
-          <p:cNvPr id="15" name="TextBox 14"/>
-          <p:cNvSpPr txBox="1"/>
-          <p:nvPr/>
-        </p:nvSpPr>
-        <p:spPr>
-          <a:xfrm>
-            <a:off x="4645152" y="3182112"/>
-            <a:ext cx="2926080" cy="2286000"/>
-          </a:xfrm>
-          <a:prstGeom prst="rect">
-            <a:avLst/>
-          </a:prstGeom>
-          <a:noFill/>
-        </p:spPr>
-        <p:txBody>
-          <a:bodyPr wrap="square" lIns="0" rIns="0" tIns="0" bIns="0">
-            <a:spAutoFit/>
-          </a:bodyPr>
-          <a:lstStyle/>
-          <a:p>
-            <a:pPr>
-              <a:spcBef>
-                <a:spcPts val="0"/>
-              </a:spcBef>
-              <a:spcAft>
-                <a:spcPts val="600"/>
-              </a:spcAft>
-            </a:pPr>
-            <a:r>
-              <a:rPr sz="1500" b="1">
-                <a:solidFill>
-                  <a:srgbClr val="EF7627"/>
-                </a:solidFill>
-                <a:latin typeface="Calibri"/>
-              </a:rPr>
-              <a:t>▸  </a:t>
-            </a:r>
-            <a:r>
-              <a:rPr sz="1500" b="0">
-                <a:solidFill>
-                  <a:srgbClr val="E8EAED"/>
-                </a:solidFill>
-                <a:latin typeface="Calibri"/>
-              </a:rPr>
-              <a:t>Deux environnements isolés</a:t>
-            </a:r>
-          </a:p>
-          <a:p>
-            <a:pPr>
-              <a:spcBef>
-                <a:spcPts val="0"/>
-              </a:spcBef>
-              <a:spcAft>
-                <a:spcPts val="600"/>
-              </a:spcAft>
-            </a:pPr>
-            <a:r>
-              <a:rPr sz="1500" b="1">
-                <a:solidFill>
-                  <a:srgbClr val="979FB0"/>
-                </a:solidFill>
-                <a:latin typeface="Calibri"/>
-              </a:rPr>
-              <a:t>▸  </a:t>
-            </a:r>
-            <a:r>
-              <a:rPr sz="1500" b="0">
-                <a:solidFill>
-                  <a:srgbClr val="979FB0"/>
-                </a:solidFill>
-                <a:latin typeface="Calibri"/>
-              </a:rPr>
-              <a:t>Bascule instantanée</a:t>
-            </a:r>
-          </a:p>
-        </p:txBody>
-      </p:sp>
-      <p:sp>
-        <p:nvSpPr>
-          <p:cNvPr id="16" name="Rounded Rectangle 15"/>
-          <p:cNvSpPr/>
-          <p:nvPr/>
-        </p:nvSpPr>
-        <p:spPr>
-          <a:xfrm>
-            <a:off x="7955279" y="2468880"/>
-            <a:ext cx="3429000" cy="3200400"/>
-          </a:xfrm>
-          <a:prstGeom prst="roundRect">
-            <a:avLst>
-              <a:gd name="adj" fmla="val 6000"/>
-            </a:avLst>
-          </a:prstGeom>
-          <a:solidFill>
-            <a:srgbClr val="1E2533"/>
-          </a:solidFill>
-          <a:ln w="12700">
-            <a:solidFill>
-              <a:srgbClr val="323C4F"/>
-            </a:solidFill>
-          </a:ln>
-          <a:effectLst/>
-        </p:spPr>
-        <p:style>
-          <a:lnRef idx="1">
-            <a:schemeClr val="accent1"/>
-          </a:lnRef>
-          <a:fillRef idx="3">
-            <a:schemeClr val="accent1"/>
-          </a:fillRef>
-          <a:effectRef idx="2">
-            <a:schemeClr val="accent1"/>
-          </a:effectRef>
-          <a:fontRef idx="minor">
-            <a:schemeClr val="lt1"/>
-          </a:fontRef>
-        </p:style>
-        <p:txBody>
-          <a:bodyPr rtlCol="0" anchor="ctr"/>
-          <a:lstStyle/>
-          <a:p>
-            <a:pPr algn="ctr"/>
-          </a:p>
-        </p:txBody>
-      </p:sp>
-      <p:sp>
-        <p:nvSpPr>
-          <p:cNvPr id="17" name="Rectangle 16"/>
-          <p:cNvSpPr/>
-          <p:nvPr/>
-        </p:nvSpPr>
-        <p:spPr>
-          <a:xfrm>
-            <a:off x="7955279" y="2633472"/>
+            <a:off x="6263640" y="2587752"/>
             <a:ext cx="91440" cy="384048"/>
           </a:xfrm>
           <a:prstGeom prst="rect">
@@ -9476,14 +9884,14 @@
       </p:sp>
       <p:sp>
         <p:nvSpPr>
-          <p:cNvPr id="18" name="TextBox 17"/>
+          <p:cNvPr id="14" name="TextBox 13"/>
           <p:cNvSpPr txBox="1"/>
           <p:nvPr/>
         </p:nvSpPr>
         <p:spPr>
           <a:xfrm>
-            <a:off x="8229600" y="2651760"/>
-            <a:ext cx="2971800" cy="411480"/>
+            <a:off x="6537959" y="2606040"/>
+            <a:ext cx="4663440" cy="411480"/>
           </a:xfrm>
           <a:prstGeom prst="rect">
             <a:avLst/>
@@ -9511,21 +9919,21 @@
                 </a:solidFill>
                 <a:latin typeface="Calibri"/>
               </a:rPr>
-              <a:t>Analyse auto</a:t>
-            </a:r>
-          </a:p>
-        </p:txBody>
-      </p:sp>
-      <p:sp>
-        <p:nvSpPr>
-          <p:cNvPr id="19" name="TextBox 18"/>
+              <a:t>Le besoin</a:t>
+            </a:r>
+          </a:p>
+        </p:txBody>
+      </p:sp>
+      <p:sp>
+        <p:nvSpPr>
+          <p:cNvPr id="15" name="TextBox 14"/>
           <p:cNvSpPr txBox="1"/>
           <p:nvPr/>
         </p:nvSpPr>
         <p:spPr>
           <a:xfrm>
-            <a:off x="8229600" y="3182112"/>
-            <a:ext cx="2926080" cy="2286000"/>
+            <a:off x="6537959" y="3136391"/>
+            <a:ext cx="4617720" cy="2468880"/>
           </a:xfrm>
           <a:prstGeom prst="rect">
             <a:avLst/>
@@ -9562,7 +9970,7 @@
                 </a:solidFill>
                 <a:latin typeface="Calibri"/>
               </a:rPr>
-              <a:t>Décision pilotée par métriques</a:t>
+              <a:t>Exposer la v2 à une fraction du trafic d'abord</a:t>
             </a:r>
           </a:p>
           <a:p>
@@ -9577,7 +9985,7 @@
             <a:r>
               <a:rPr sz="1500" b="1">
                 <a:solidFill>
-                  <a:srgbClr val="979FB0"/>
+                  <a:srgbClr val="EF7627"/>
                 </a:solidFill>
                 <a:latin typeface="Calibri"/>
               </a:rPr>
@@ -9586,62 +9994,67 @@
             <a:r>
               <a:rPr sz="1500" b="0">
                 <a:solidFill>
-                  <a:srgbClr val="979FB0"/>
-                </a:solidFill>
-                <a:latin typeface="Calibri"/>
-              </a:rPr>
-              <a:t>Promotion ou rollback</a:t>
-            </a:r>
-          </a:p>
-        </p:txBody>
-      </p:sp>
-      <p:sp>
-        <p:nvSpPr>
-          <p:cNvPr id="20" name="TextBox 19"/>
-          <p:cNvSpPr txBox="1"/>
-          <p:nvPr/>
-        </p:nvSpPr>
-        <p:spPr>
-          <a:xfrm>
-            <a:off x="777240" y="5806440"/>
-            <a:ext cx="10607040" cy="457200"/>
-          </a:xfrm>
-          <a:prstGeom prst="rect">
-            <a:avLst/>
-          </a:prstGeom>
-          <a:noFill/>
-        </p:spPr>
-        <p:txBody>
-          <a:bodyPr wrap="square" anchor="t" lIns="0" rIns="0" tIns="0" bIns="0">
-            <a:spAutoFit/>
-          </a:bodyPr>
-          <a:lstStyle/>
-          <a:p>
-            <a:pPr algn="l">
-              <a:spcBef>
-                <a:spcPts val="0"/>
-              </a:spcBef>
-              <a:spcAft>
-                <a:spcPts val="400"/>
-              </a:spcAft>
-            </a:pPr>
-            <a:r>
-              <a:rPr sz="1600" b="0">
-                <a:solidFill>
                   <a:srgbClr val="E8EAED"/>
                 </a:solidFill>
                 <a:latin typeface="Calibri"/>
               </a:rPr>
-              <a:t>→ Objectif : une mise en production </a:t>
-            </a:r>
-            <a:r>
-              <a:rPr sz="1600" b="1">
+              <a:t>Mesurer sa santé en conditions réelles</a:t>
+            </a:r>
+          </a:p>
+          <a:p>
+            <a:pPr>
+              <a:spcBef>
+                <a:spcPts val="0"/>
+              </a:spcBef>
+              <a:spcAft>
+                <a:spcPts val="600"/>
+              </a:spcAft>
+            </a:pPr>
+            <a:r>
+              <a:rPr sz="1500" b="1">
                 <a:solidFill>
                   <a:srgbClr val="EF7627"/>
                 </a:solidFill>
                 <a:latin typeface="Calibri"/>
               </a:rPr>
-              <a:t>graduelle, mesurée et réversible automatiquement.</a:t>
+              <a:t>▸  </a:t>
+            </a:r>
+            <a:r>
+              <a:rPr sz="1500" b="0">
+                <a:solidFill>
+                  <a:srgbClr val="E8EAED"/>
+                </a:solidFill>
+                <a:latin typeface="Calibri"/>
+              </a:rPr>
+              <a:t>Promouvoir seulement si les métriques sont bonnes</a:t>
+            </a:r>
+          </a:p>
+          <a:p>
+            <a:pPr>
+              <a:spcBef>
+                <a:spcPts val="0"/>
+              </a:spcBef>
+              <a:spcAft>
+                <a:spcPts val="600"/>
+              </a:spcAft>
+            </a:pPr>
+            <a:r>
+              <a:rPr sz="1500" b="1">
+                <a:solidFill>
+                  <a:srgbClr val="EF7627"/>
+                </a:solidFill>
+                <a:latin typeface="Calibri"/>
+              </a:rPr>
+              <a:t>▸  </a:t>
+            </a:r>
+            <a:r>
+              <a:rPr sz="1500" b="0">
+                <a:solidFill>
+                  <a:srgbClr val="E8EAED"/>
+                </a:solidFill>
+                <a:latin typeface="Calibri"/>
+              </a:rPr>
+              <a:t>Revenir en arrière automatiquement sinon</a:t>
             </a:r>
           </a:p>
         </p:txBody>
@@ -9753,7 +10166,7 @@
                 </a:solidFill>
                 <a:latin typeface="Calibri"/>
               </a:rPr>
-              <a:t>ARCHITECTURE INTERNE</a:t>
+              <a:t>DÉFINITION</a:t>
             </a:r>
           </a:p>
           <a:p>
@@ -9772,7 +10185,7 @@
                 </a:solidFill>
                 <a:latin typeface="Calibri"/>
               </a:rPr>
-              <a:t>Fonctionnement global</a:t>
+              <a:t>Qu'est-ce qu'Argo Rollouts ?</a:t>
             </a:r>
           </a:p>
         </p:txBody>
@@ -9907,18 +10320,96 @@
       </p:sp>
       <p:sp>
         <p:nvSpPr>
-          <p:cNvPr id="7" name="Rounded Rectangle 6"/>
+          <p:cNvPr id="7" name="TextBox 6"/>
+          <p:cNvSpPr txBox="1"/>
+          <p:nvPr/>
+        </p:nvSpPr>
+        <p:spPr>
+          <a:xfrm>
+            <a:off x="777240" y="1508760"/>
+            <a:ext cx="10607040" cy="822960"/>
+          </a:xfrm>
+          <a:prstGeom prst="rect">
+            <a:avLst/>
+          </a:prstGeom>
+          <a:noFill/>
+        </p:spPr>
+        <p:txBody>
+          <a:bodyPr wrap="square" anchor="t" lIns="0" rIns="0" tIns="0" bIns="0">
+            <a:spAutoFit/>
+          </a:bodyPr>
+          <a:lstStyle/>
+          <a:p>
+            <a:pPr algn="l">
+              <a:spcBef>
+                <a:spcPts val="0"/>
+              </a:spcBef>
+              <a:spcAft>
+                <a:spcPts val="400"/>
+              </a:spcAft>
+            </a:pPr>
+            <a:r>
+              <a:rPr sz="1800" b="0">
+                <a:solidFill>
+                  <a:srgbClr val="E8EAED"/>
+                </a:solidFill>
+                <a:latin typeface="Calibri"/>
+              </a:rPr>
+              <a:t>Un </a:t>
+            </a:r>
+            <a:r>
+              <a:rPr sz="1800" b="1">
+                <a:solidFill>
+                  <a:srgbClr val="FFFFFF"/>
+                </a:solidFill>
+                <a:latin typeface="Calibri"/>
+              </a:rPr>
+              <a:t>contrôleur Kubernetes</a:t>
+            </a:r>
+            <a:r>
+              <a:rPr sz="1800" b="0">
+                <a:solidFill>
+                  <a:srgbClr val="E8EAED"/>
+                </a:solidFill>
+                <a:latin typeface="Calibri"/>
+              </a:rPr>
+              <a:t> (projet CNCF, famille Argo) qui remplace le Deployment par une ressource </a:t>
+            </a:r>
+            <a:r>
+              <a:rPr sz="1800" b="1">
+                <a:solidFill>
+                  <a:srgbClr val="EF7627"/>
+                </a:solidFill>
+                <a:latin typeface="Calibri"/>
+              </a:rPr>
+              <a:t>Rollout</a:t>
+            </a:r>
+            <a:r>
+              <a:rPr sz="1800" b="0">
+                <a:solidFill>
+                  <a:srgbClr val="E8EAED"/>
+                </a:solidFill>
+                <a:latin typeface="Calibri"/>
+              </a:rPr>
+              <a:t> offrant la progressive delivery.</a:t>
+            </a:r>
+          </a:p>
+        </p:txBody>
+      </p:sp>
+      <p:sp>
+        <p:nvSpPr>
+          <p:cNvPr id="8" name="Rounded Rectangle 7"/>
           <p:cNvSpPr/>
           <p:nvPr/>
         </p:nvSpPr>
         <p:spPr>
           <a:xfrm>
-            <a:off x="777240" y="1600200"/>
-            <a:ext cx="5486400" cy="2286000"/>
+            <a:off x="777240" y="2468880"/>
+            <a:ext cx="3429000" cy="3200400"/>
           </a:xfrm>
           <a:prstGeom prst="roundRect">
             <a:avLst>
-              <a:gd name="adj" fmla="val 5000"/>
+              <a:gd name="adj" fmla="val 6000"/>
             </a:avLst>
           </a:prstGeom>
           <a:solidFill>
@@ -9955,14 +10446,58 @@
       </p:sp>
       <p:sp>
         <p:nvSpPr>
-          <p:cNvPr id="8" name="TextBox 7"/>
+          <p:cNvPr id="9" name="Rectangle 8"/>
+          <p:cNvSpPr/>
+          <p:nvPr/>
+        </p:nvSpPr>
+        <p:spPr>
+          <a:xfrm>
+            <a:off x="777240" y="2633472"/>
+            <a:ext cx="91440" cy="384048"/>
+          </a:xfrm>
+          <a:prstGeom prst="rect">
+            <a:avLst/>
+          </a:prstGeom>
+          <a:solidFill>
+            <a:srgbClr val="EF7627"/>
+          </a:solidFill>
+          <a:ln>
+            <a:noFill/>
+          </a:ln>
+          <a:effectLst/>
+        </p:spPr>
+        <p:style>
+          <a:lnRef idx="1">
+            <a:schemeClr val="accent1"/>
+          </a:lnRef>
+          <a:fillRef idx="3">
+            <a:schemeClr val="accent1"/>
+          </a:fillRef>
+          <a:effectRef idx="2">
+            <a:schemeClr val="accent1"/>
+          </a:effectRef>
+          <a:fontRef idx="minor">
+            <a:schemeClr val="lt1"/>
+          </a:fontRef>
+        </p:style>
+        <p:txBody>
+          <a:bodyPr rtlCol="0" anchor="ctr"/>
+          <a:lstStyle/>
+          <a:p>
+            <a:pPr algn="ctr"/>
+          </a:p>
+        </p:txBody>
+      </p:sp>
+      <p:sp>
+        <p:nvSpPr>
+          <p:cNvPr id="10" name="TextBox 9"/>
           <p:cNvSpPr txBox="1"/>
           <p:nvPr/>
         </p:nvSpPr>
         <p:spPr>
           <a:xfrm>
-            <a:off x="1005840" y="1709928"/>
-            <a:ext cx="5029200" cy="274320"/>
+            <a:off x="1051560" y="2651760"/>
+            <a:ext cx="2971800" cy="411480"/>
           </a:xfrm>
           <a:prstGeom prst="rect">
             <a:avLst/>
@@ -9984,27 +10519,27 @@
               </a:spcAft>
             </a:pPr>
             <a:r>
-              <a:rPr sz="1100" b="1">
-                <a:solidFill>
-                  <a:srgbClr val="979FB0"/>
-                </a:solidFill>
-                <a:latin typeface="Consolas"/>
-              </a:rPr>
-              <a:t>ressources gérées</a:t>
-            </a:r>
-          </a:p>
-        </p:txBody>
-      </p:sp>
-      <p:sp>
-        <p:nvSpPr>
-          <p:cNvPr id="9" name="TextBox 8"/>
+              <a:rPr sz="1600" b="1">
+                <a:solidFill>
+                  <a:srgbClr val="FFFFFF"/>
+                </a:solidFill>
+                <a:latin typeface="Calibri"/>
+              </a:rPr>
+              <a:t>Canary</a:t>
+            </a:r>
+          </a:p>
+        </p:txBody>
+      </p:sp>
+      <p:sp>
+        <p:nvSpPr>
+          <p:cNvPr id="11" name="TextBox 10"/>
           <p:cNvSpPr txBox="1"/>
           <p:nvPr/>
         </p:nvSpPr>
         <p:spPr>
           <a:xfrm>
-            <a:off x="1005840" y="2020824"/>
-            <a:ext cx="5029200" cy="2011680"/>
+            <a:off x="1051560" y="3182112"/>
+            <a:ext cx="2926080" cy="2286000"/>
           </a:xfrm>
           <a:prstGeom prst="rect">
             <a:avLst/>
@@ -10012,102 +10547,78 @@
           <a:noFill/>
         </p:spPr>
         <p:txBody>
-          <a:bodyPr wrap="none" lIns="0" tIns="0" rIns="0" bIns="0">
+          <a:bodyPr wrap="square" lIns="0" rIns="0" tIns="0" bIns="0">
             <a:spAutoFit/>
           </a:bodyPr>
           <a:lstStyle/>
           <a:p>
             <a:pPr>
-              <a:spcAft>
-                <a:spcPts val="200"/>
-              </a:spcAft>
-            </a:pPr>
-            <a:r>
-              <a:rPr sz="1500">
-                <a:solidFill>
-                  <a:srgbClr val="FFFFFF"/>
-                </a:solidFill>
-                <a:latin typeface="Consolas"/>
-              </a:rPr>
-              <a:t>Rollout  (remplace Deployment)</a:t>
+              <a:spcBef>
+                <a:spcPts val="0"/>
+              </a:spcBef>
+              <a:spcAft>
+                <a:spcPts val="600"/>
+              </a:spcAft>
+            </a:pPr>
+            <a:r>
+              <a:rPr sz="1500" b="1">
+                <a:solidFill>
+                  <a:srgbClr val="EF7627"/>
+                </a:solidFill>
+                <a:latin typeface="Calibri"/>
+              </a:rPr>
+              <a:t>▸  </a:t>
+            </a:r>
+            <a:r>
+              <a:rPr sz="1500" b="0">
+                <a:solidFill>
+                  <a:srgbClr val="E8EAED"/>
+                </a:solidFill>
+                <a:latin typeface="Calibri"/>
+              </a:rPr>
+              <a:t>% croissant du trafic vers la v2</a:t>
             </a:r>
           </a:p>
           <a:p>
             <a:pPr>
-              <a:spcAft>
-                <a:spcPts val="200"/>
-              </a:spcAft>
-            </a:pPr>
-            <a:r>
-              <a:rPr sz="1500">
+              <a:spcBef>
+                <a:spcPts val="0"/>
+              </a:spcBef>
+              <a:spcAft>
+                <a:spcPts val="600"/>
+              </a:spcAft>
+            </a:pPr>
+            <a:r>
+              <a:rPr sz="1500" b="1">
                 <a:solidFill>
                   <a:srgbClr val="979FB0"/>
                 </a:solidFill>
-                <a:latin typeface="Consolas"/>
-              </a:rPr>
-              <a:t>   │</a:t>
-            </a:r>
-          </a:p>
-          <a:p>
-            <a:pPr>
-              <a:spcAft>
-                <a:spcPts val="200"/>
-              </a:spcAft>
-            </a:pPr>
-            <a:r>
-              <a:rPr sz="1500">
-                <a:solidFill>
-                  <a:srgbClr val="3FC46B"/>
-                </a:solidFill>
-                <a:latin typeface="Consolas"/>
-              </a:rPr>
-              <a:t>   ├─ ReplicaSet STABLE   v actuelle</a:t>
-            </a:r>
-          </a:p>
-          <a:p>
-            <a:pPr>
-              <a:spcAft>
-                <a:spcPts val="200"/>
-              </a:spcAft>
-            </a:pPr>
-            <a:r>
-              <a:rPr sz="1500">
-                <a:solidFill>
-                  <a:srgbClr val="EF7627"/>
-                </a:solidFill>
-                <a:latin typeface="Consolas"/>
-              </a:rPr>
-              <a:t>   ├─ ReplicaSet CANARY   v nouvelle</a:t>
-            </a:r>
-          </a:p>
-          <a:p>
-            <a:pPr>
-              <a:spcAft>
-                <a:spcPts val="200"/>
-              </a:spcAft>
-            </a:pPr>
-            <a:r>
-              <a:rPr sz="1500">
-                <a:solidFill>
-                  <a:srgbClr val="55A8F5"/>
-                </a:solidFill>
-                <a:latin typeface="Consolas"/>
-              </a:rPr>
-              <a:t>   └─ AnalysisRun         décide</a:t>
-            </a:r>
-          </a:p>
-        </p:txBody>
-      </p:sp>
-      <p:sp>
-        <p:nvSpPr>
-          <p:cNvPr id="10" name="Rounded Rectangle 9"/>
+                <a:latin typeface="Calibri"/>
+              </a:rPr>
+              <a:t>▸  </a:t>
+            </a:r>
+            <a:r>
+              <a:rPr sz="1500" b="0">
+                <a:solidFill>
+                  <a:srgbClr val="979FB0"/>
+                </a:solidFill>
+                <a:latin typeface="Calibri"/>
+              </a:rPr>
+              <a:t>20% → 40% → 60% → 100%</a:t>
+            </a:r>
+          </a:p>
+        </p:txBody>
+      </p:sp>
+      <p:sp>
+        <p:nvSpPr>
+          <p:cNvPr id="12" name="Rounded Rectangle 11"/>
           <p:cNvSpPr/>
           <p:nvPr/>
         </p:nvSpPr>
         <p:spPr>
           <a:xfrm>
-            <a:off x="6492240" y="1600200"/>
-            <a:ext cx="4892040" cy="4206240"/>
+            <a:off x="4370832" y="2468880"/>
+            <a:ext cx="3429000" cy="3200400"/>
           </a:xfrm>
           <a:prstGeom prst="roundRect">
             <a:avLst>
@@ -10148,20 +10659,20 @@
       </p:sp>
       <p:sp>
         <p:nvSpPr>
-          <p:cNvPr id="11" name="Rectangle 10"/>
+          <p:cNvPr id="13" name="Rectangle 12"/>
           <p:cNvSpPr/>
           <p:nvPr/>
         </p:nvSpPr>
         <p:spPr>
           <a:xfrm>
-            <a:off x="6492240" y="1764792"/>
+            <a:off x="4370832" y="2633472"/>
             <a:ext cx="91440" cy="384048"/>
           </a:xfrm>
           <a:prstGeom prst="rect">
             <a:avLst/>
           </a:prstGeom>
           <a:solidFill>
-            <a:srgbClr val="EF7627"/>
+            <a:srgbClr val="55A8F5"/>
           </a:solidFill>
           <a:ln>
             <a:noFill/>
@@ -10192,14 +10703,14 @@
       </p:sp>
       <p:sp>
         <p:nvSpPr>
-          <p:cNvPr id="12" name="TextBox 11"/>
+          <p:cNvPr id="14" name="TextBox 13"/>
           <p:cNvSpPr txBox="1"/>
           <p:nvPr/>
         </p:nvSpPr>
         <p:spPr>
           <a:xfrm>
-            <a:off x="6766559" y="1783080"/>
-            <a:ext cx="4434840" cy="411480"/>
+            <a:off x="4645152" y="2651760"/>
+            <a:ext cx="2971800" cy="411480"/>
           </a:xfrm>
           <a:prstGeom prst="rect">
             <a:avLst/>
@@ -10227,21 +10738,21 @@
                 </a:solidFill>
                 <a:latin typeface="Calibri"/>
               </a:rPr>
-              <a:t>À chaque palier, le contrôleur</a:t>
-            </a:r>
-          </a:p>
-        </p:txBody>
-      </p:sp>
-      <p:sp>
-        <p:nvSpPr>
-          <p:cNvPr id="13" name="TextBox 12"/>
+              <a:t>Blue-Green</a:t>
+            </a:r>
+          </a:p>
+        </p:txBody>
+      </p:sp>
+      <p:sp>
+        <p:nvSpPr>
+          <p:cNvPr id="15" name="TextBox 14"/>
           <p:cNvSpPr txBox="1"/>
           <p:nvPr/>
         </p:nvSpPr>
         <p:spPr>
           <a:xfrm>
-            <a:off x="6766559" y="2313432"/>
-            <a:ext cx="4389120" cy="3291839"/>
+            <a:off x="4645152" y="3182112"/>
+            <a:ext cx="2926080" cy="2286000"/>
           </a:xfrm>
           <a:prstGeom prst="rect">
             <a:avLst/>
@@ -10278,7 +10789,7 @@
                 </a:solidFill>
                 <a:latin typeface="Calibri"/>
               </a:rPr>
-              <a:t>Ajuste la proportion de trafic/pods canary</a:t>
+              <a:t>Deux environnements isolés</a:t>
             </a:r>
           </a:p>
           <a:p>
@@ -10293,7 +10804,7 @@
             <a:r>
               <a:rPr sz="1500" b="1">
                 <a:solidFill>
-                  <a:srgbClr val="EF7627"/>
+                  <a:srgbClr val="979FB0"/>
                 </a:solidFill>
                 <a:latin typeface="Calibri"/>
               </a:rPr>
@@ -10302,113 +10813,29 @@
             <a:r>
               <a:rPr sz="1500" b="0">
                 <a:solidFill>
-                  <a:srgbClr val="E8EAED"/>
-                </a:solidFill>
-                <a:latin typeface="Calibri"/>
-              </a:rPr>
-              <a:t>Marque une pause (minutée ou manuelle)</a:t>
-            </a:r>
-          </a:p>
-          <a:p>
-            <a:pPr>
-              <a:spcBef>
-                <a:spcPts val="0"/>
-              </a:spcBef>
-              <a:spcAft>
-                <a:spcPts val="600"/>
-              </a:spcAft>
-            </a:pPr>
-            <a:r>
-              <a:rPr sz="1500" b="1">
-                <a:solidFill>
-                  <a:srgbClr val="EF7627"/>
-                </a:solidFill>
-                <a:latin typeface="Calibri"/>
-              </a:rPr>
-              <a:t>▸  </a:t>
-            </a:r>
-            <a:r>
-              <a:rPr sz="1500" b="0">
-                <a:solidFill>
-                  <a:srgbClr val="E8EAED"/>
-                </a:solidFill>
-                <a:latin typeface="Calibri"/>
-              </a:rPr>
-              <a:t>Lance une analyse de la santé du canary</a:t>
-            </a:r>
-          </a:p>
-          <a:p>
-            <a:pPr>
-              <a:spcBef>
-                <a:spcPts val="0"/>
-              </a:spcBef>
-              <a:spcAft>
-                <a:spcPts val="600"/>
-              </a:spcAft>
-            </a:pPr>
-            <a:r>
-              <a:rPr sz="1500" b="1">
-                <a:solidFill>
-                  <a:srgbClr val="3FC46B"/>
-                </a:solidFill>
-                <a:latin typeface="Calibri"/>
-              </a:rPr>
-              <a:t>✓  </a:t>
-            </a:r>
-            <a:r>
-              <a:rPr sz="1500" b="1">
-                <a:solidFill>
-                  <a:srgbClr val="3FC46B"/>
-                </a:solidFill>
-                <a:latin typeface="Calibri"/>
-              </a:rPr>
-              <a:t>Promeut si OK</a:t>
-            </a:r>
-          </a:p>
-          <a:p>
-            <a:pPr>
-              <a:spcBef>
-                <a:spcPts val="0"/>
-              </a:spcBef>
-              <a:spcAft>
-                <a:spcPts val="600"/>
-              </a:spcAft>
-            </a:pPr>
-            <a:r>
-              <a:rPr sz="1500" b="1">
-                <a:solidFill>
-                  <a:srgbClr val="F0645A"/>
-                </a:solidFill>
-                <a:latin typeface="Calibri"/>
-              </a:rPr>
-              <a:t>✕  </a:t>
-            </a:r>
-            <a:r>
-              <a:rPr sz="1500" b="1">
-                <a:solidFill>
-                  <a:srgbClr val="F0645A"/>
-                </a:solidFill>
-                <a:latin typeface="Calibri"/>
-              </a:rPr>
-              <a:t>Rollback automatique si KO</a:t>
-            </a:r>
-          </a:p>
-        </p:txBody>
-      </p:sp>
-      <p:sp>
-        <p:nvSpPr>
-          <p:cNvPr id="14" name="Rounded Rectangle 13"/>
+                  <a:srgbClr val="979FB0"/>
+                </a:solidFill>
+                <a:latin typeface="Calibri"/>
+              </a:rPr>
+              <a:t>Bascule instantanée</a:t>
+            </a:r>
+          </a:p>
+        </p:txBody>
+      </p:sp>
+      <p:sp>
+        <p:nvSpPr>
+          <p:cNvPr id="16" name="Rounded Rectangle 15"/>
           <p:cNvSpPr/>
           <p:nvPr/>
         </p:nvSpPr>
         <p:spPr>
           <a:xfrm>
-            <a:off x="777240" y="4069080"/>
-            <a:ext cx="5486400" cy="1737360"/>
+            <a:off x="7955279" y="2468880"/>
+            <a:ext cx="3429000" cy="3200400"/>
           </a:xfrm>
           <a:prstGeom prst="roundRect">
             <a:avLst>
-              <a:gd name="adj" fmla="val 5000"/>
+              <a:gd name="adj" fmla="val 6000"/>
             </a:avLst>
           </a:prstGeom>
           <a:solidFill>
@@ -10445,14 +10872,58 @@
       </p:sp>
       <p:sp>
         <p:nvSpPr>
-          <p:cNvPr id="15" name="TextBox 14"/>
+          <p:cNvPr id="17" name="Rectangle 16"/>
+          <p:cNvSpPr/>
+          <p:nvPr/>
+        </p:nvSpPr>
+        <p:spPr>
+          <a:xfrm>
+            <a:off x="7955279" y="2633472"/>
+            <a:ext cx="91440" cy="384048"/>
+          </a:xfrm>
+          <a:prstGeom prst="rect">
+            <a:avLst/>
+          </a:prstGeom>
+          <a:solidFill>
+            <a:srgbClr val="3FC46B"/>
+          </a:solidFill>
+          <a:ln>
+            <a:noFill/>
+          </a:ln>
+          <a:effectLst/>
+        </p:spPr>
+        <p:style>
+          <a:lnRef idx="1">
+            <a:schemeClr val="accent1"/>
+          </a:lnRef>
+          <a:fillRef idx="3">
+            <a:schemeClr val="accent1"/>
+          </a:fillRef>
+          <a:effectRef idx="2">
+            <a:schemeClr val="accent1"/>
+          </a:effectRef>
+          <a:fontRef idx="minor">
+            <a:schemeClr val="lt1"/>
+          </a:fontRef>
+        </p:style>
+        <p:txBody>
+          <a:bodyPr rtlCol="0" anchor="ctr"/>
+          <a:lstStyle/>
+          <a:p>
+            <a:pPr algn="ctr"/>
+          </a:p>
+        </p:txBody>
+      </p:sp>
+      <p:sp>
+        <p:nvSpPr>
+          <p:cNvPr id="18" name="TextBox 17"/>
           <p:cNvSpPr txBox="1"/>
           <p:nvPr/>
         </p:nvSpPr>
         <p:spPr>
           <a:xfrm>
-            <a:off x="1005840" y="4178808"/>
-            <a:ext cx="5029200" cy="274320"/>
+            <a:off x="8229600" y="2651760"/>
+            <a:ext cx="2971800" cy="411480"/>
           </a:xfrm>
           <a:prstGeom prst="rect">
             <a:avLst/>
@@ -10474,27 +10945,27 @@
               </a:spcAft>
             </a:pPr>
             <a:r>
-              <a:rPr sz="1100" b="1">
-                <a:solidFill>
-                  <a:srgbClr val="979FB0"/>
-                </a:solidFill>
-                <a:latin typeface="Consolas"/>
-              </a:rPr>
-              <a:t>exemple de stratégie</a:t>
-            </a:r>
-          </a:p>
-        </p:txBody>
-      </p:sp>
-      <p:sp>
-        <p:nvSpPr>
-          <p:cNvPr id="16" name="TextBox 15"/>
+              <a:rPr sz="1600" b="1">
+                <a:solidFill>
+                  <a:srgbClr val="FFFFFF"/>
+                </a:solidFill>
+                <a:latin typeface="Calibri"/>
+              </a:rPr>
+              <a:t>Analyse auto</a:t>
+            </a:r>
+          </a:p>
+        </p:txBody>
+      </p:sp>
+      <p:sp>
+        <p:nvSpPr>
+          <p:cNvPr id="19" name="TextBox 18"/>
           <p:cNvSpPr txBox="1"/>
           <p:nvPr/>
         </p:nvSpPr>
         <p:spPr>
           <a:xfrm>
-            <a:off x="1005840" y="4489704"/>
-            <a:ext cx="5029200" cy="1463039"/>
+            <a:off x="8229600" y="3182112"/>
+            <a:ext cx="2926080" cy="2286000"/>
           </a:xfrm>
           <a:prstGeom prst="rect">
             <a:avLst/>
@@ -10502,72 +10973,115 @@
           <a:noFill/>
         </p:spPr>
         <p:txBody>
-          <a:bodyPr wrap="none" lIns="0" tIns="0" rIns="0" bIns="0">
+          <a:bodyPr wrap="square" lIns="0" rIns="0" tIns="0" bIns="0">
             <a:spAutoFit/>
           </a:bodyPr>
           <a:lstStyle/>
           <a:p>
             <a:pPr>
-              <a:spcAft>
-                <a:spcPts val="200"/>
-              </a:spcAft>
-            </a:pPr>
-            <a:r>
-              <a:rPr sz="1400">
-                <a:solidFill>
-                  <a:srgbClr val="FFFFFF"/>
-                </a:solidFill>
-                <a:latin typeface="Consolas"/>
-              </a:rPr>
-              <a:t>steps:</a:t>
+              <a:spcBef>
+                <a:spcPts val="0"/>
+              </a:spcBef>
+              <a:spcAft>
+                <a:spcPts val="600"/>
+              </a:spcAft>
+            </a:pPr>
+            <a:r>
+              <a:rPr sz="1500" b="1">
+                <a:solidFill>
+                  <a:srgbClr val="EF7627"/>
+                </a:solidFill>
+                <a:latin typeface="Calibri"/>
+              </a:rPr>
+              <a:t>▸  </a:t>
+            </a:r>
+            <a:r>
+              <a:rPr sz="1500" b="0">
+                <a:solidFill>
+                  <a:srgbClr val="E8EAED"/>
+                </a:solidFill>
+                <a:latin typeface="Calibri"/>
+              </a:rPr>
+              <a:t>Décision pilotée par métriques</a:t>
             </a:r>
           </a:p>
           <a:p>
             <a:pPr>
-              <a:spcAft>
-                <a:spcPts val="200"/>
-              </a:spcAft>
-            </a:pPr>
-            <a:r>
-              <a:rPr sz="1400">
+              <a:spcBef>
+                <a:spcPts val="0"/>
+              </a:spcBef>
+              <a:spcAft>
+                <a:spcPts val="600"/>
+              </a:spcAft>
+            </a:pPr>
+            <a:r>
+              <a:rPr sz="1500" b="1">
+                <a:solidFill>
+                  <a:srgbClr val="979FB0"/>
+                </a:solidFill>
+                <a:latin typeface="Calibri"/>
+              </a:rPr>
+              <a:t>▸  </a:t>
+            </a:r>
+            <a:r>
+              <a:rPr sz="1500" b="0">
+                <a:solidFill>
+                  <a:srgbClr val="979FB0"/>
+                </a:solidFill>
+                <a:latin typeface="Calibri"/>
+              </a:rPr>
+              <a:t>Promotion ou rollback</a:t>
+            </a:r>
+          </a:p>
+        </p:txBody>
+      </p:sp>
+      <p:sp>
+        <p:nvSpPr>
+          <p:cNvPr id="20" name="TextBox 19"/>
+          <p:cNvSpPr txBox="1"/>
+          <p:nvPr/>
+        </p:nvSpPr>
+        <p:spPr>
+          <a:xfrm>
+            <a:off x="777240" y="5806440"/>
+            <a:ext cx="10607040" cy="457200"/>
+          </a:xfrm>
+          <a:prstGeom prst="rect">
+            <a:avLst/>
+          </a:prstGeom>
+          <a:noFill/>
+        </p:spPr>
+        <p:txBody>
+          <a:bodyPr wrap="square" anchor="t" lIns="0" rIns="0" tIns="0" bIns="0">
+            <a:spAutoFit/>
+          </a:bodyPr>
+          <a:lstStyle/>
+          <a:p>
+            <a:pPr algn="l">
+              <a:spcBef>
+                <a:spcPts val="0"/>
+              </a:spcBef>
+              <a:spcAft>
+                <a:spcPts val="400"/>
+              </a:spcAft>
+            </a:pPr>
+            <a:r>
+              <a:rPr sz="1600" b="0">
                 <a:solidFill>
                   <a:srgbClr val="E8EAED"/>
                 </a:solidFill>
-                <a:latin typeface="Consolas"/>
-              </a:rPr>
-              <a:t>  - setWeight: 20</a:t>
-            </a:r>
-          </a:p>
-          <a:p>
-            <a:pPr>
-              <a:spcAft>
-                <a:spcPts val="200"/>
-              </a:spcAft>
-            </a:pPr>
-            <a:r>
-              <a:rPr sz="1400">
-                <a:solidFill>
-                  <a:srgbClr val="E8EAED"/>
-                </a:solidFill>
-                <a:latin typeface="Consolas"/>
-              </a:rPr>
-              <a:t>  - pause: { duration: 30s }</a:t>
-            </a:r>
-          </a:p>
-          <a:p>
-            <a:pPr>
-              <a:spcAft>
-                <a:spcPts val="200"/>
-              </a:spcAft>
-            </a:pPr>
-            <a:r>
-              <a:rPr sz="1400">
+                <a:latin typeface="Calibri"/>
+              </a:rPr>
+              <a:t>→ Objectif : une mise en production </a:t>
+            </a:r>
+            <a:r>
+              <a:rPr sz="1600" b="1">
                 <a:solidFill>
                   <a:srgbClr val="EF7627"/>
                 </a:solidFill>
-                <a:latin typeface="Consolas"/>
-              </a:rPr>
-              <a:t>  - analysis: { success-rate }</a:t>
+                <a:latin typeface="Calibri"/>
+              </a:rPr>
+              <a:t>graduelle, mesurée et réversible automatiquement.</a:t>
             </a:r>
           </a:p>
         </p:txBody>
@@ -10679,7 +11193,7 @@
                 </a:solidFill>
                 <a:latin typeface="Calibri"/>
               </a:rPr>
-              <a:t>ADOPTION</a:t>
+              <a:t>ARCHITECTURE INTERNE</a:t>
             </a:r>
           </a:p>
           <a:p>
@@ -10698,7 +11212,7 @@
                 </a:solidFill>
                 <a:latin typeface="Calibri"/>
               </a:rPr>
-              <a:t>Cas d'usage en entreprise &amp; écosystème</a:t>
+              <a:t>Fonctionnement global</a:t>
             </a:r>
           </a:p>
         </p:txBody>
@@ -10840,11 +11354,11 @@
         <p:spPr>
           <a:xfrm>
             <a:off x="777240" y="1600200"/>
-            <a:ext cx="5257800" cy="4206240"/>
+            <a:ext cx="5486400" cy="2286000"/>
           </a:xfrm>
           <a:prstGeom prst="roundRect">
             <a:avLst>
-              <a:gd name="adj" fmla="val 6000"/>
+              <a:gd name="adj" fmla="val 5000"/>
             </a:avLst>
           </a:prstGeom>
           <a:solidFill>
@@ -10881,58 +11395,14 @@
       </p:sp>
       <p:sp>
         <p:nvSpPr>
-          <p:cNvPr id="8" name="Rectangle 7"/>
-          <p:cNvSpPr/>
-          <p:nvPr/>
-        </p:nvSpPr>
-        <p:spPr>
-          <a:xfrm>
-            <a:off x="777240" y="1764792"/>
-            <a:ext cx="91440" cy="384048"/>
-          </a:xfrm>
-          <a:prstGeom prst="rect">
-            <a:avLst/>
-          </a:prstGeom>
-          <a:solidFill>
-            <a:srgbClr val="EF7627"/>
-          </a:solidFill>
-          <a:ln>
-            <a:noFill/>
-          </a:ln>
-          <a:effectLst/>
-        </p:spPr>
-        <p:style>
-          <a:lnRef idx="1">
-            <a:schemeClr val="accent1"/>
-          </a:lnRef>
-          <a:fillRef idx="3">
-            <a:schemeClr val="accent1"/>
-          </a:fillRef>
-          <a:effectRef idx="2">
-            <a:schemeClr val="accent1"/>
-          </a:effectRef>
-          <a:fontRef idx="minor">
-            <a:schemeClr val="lt1"/>
-          </a:fontRef>
-        </p:style>
-        <p:txBody>
-          <a:bodyPr rtlCol="0" anchor="ctr"/>
-          <a:lstStyle/>
-          <a:p>
-            <a:pPr algn="ctr"/>
-          </a:p>
-        </p:txBody>
-      </p:sp>
-      <p:sp>
-        <p:nvSpPr>
-          <p:cNvPr id="9" name="TextBox 8"/>
+          <p:cNvPr id="8" name="TextBox 7"/>
           <p:cNvSpPr txBox="1"/>
           <p:nvPr/>
         </p:nvSpPr>
         <p:spPr>
           <a:xfrm>
-            <a:off x="1051560" y="1783080"/>
-            <a:ext cx="4800600" cy="411480"/>
+            <a:off x="1005840" y="1709928"/>
+            <a:ext cx="5029200" cy="274320"/>
           </a:xfrm>
           <a:prstGeom prst="rect">
             <a:avLst/>
@@ -10954,27 +11424,27 @@
               </a:spcAft>
             </a:pPr>
             <a:r>
-              <a:rPr sz="1600" b="1">
-                <a:solidFill>
-                  <a:srgbClr val="FFFFFF"/>
-                </a:solidFill>
-                <a:latin typeface="Calibri"/>
-              </a:rPr>
-              <a:t>Utilisation en production</a:t>
-            </a:r>
-          </a:p>
-        </p:txBody>
-      </p:sp>
-      <p:sp>
-        <p:nvSpPr>
-          <p:cNvPr id="10" name="TextBox 9"/>
+              <a:rPr sz="1100" b="1">
+                <a:solidFill>
+                  <a:srgbClr val="979FB0"/>
+                </a:solidFill>
+                <a:latin typeface="Consolas"/>
+              </a:rPr>
+              <a:t>ressources gérées</a:t>
+            </a:r>
+          </a:p>
+        </p:txBody>
+      </p:sp>
+      <p:sp>
+        <p:nvSpPr>
+          <p:cNvPr id="9" name="TextBox 8"/>
           <p:cNvSpPr txBox="1"/>
           <p:nvPr/>
         </p:nvSpPr>
         <p:spPr>
           <a:xfrm>
-            <a:off x="1051560" y="2313432"/>
-            <a:ext cx="4754880" cy="3291839"/>
+            <a:off x="1005840" y="2020824"/>
+            <a:ext cx="5029200" cy="2011680"/>
           </a:xfrm>
           <a:prstGeom prst="rect">
             <a:avLst/>
@@ -10982,162 +11452,102 @@
           <a:noFill/>
         </p:spPr>
         <p:txBody>
-          <a:bodyPr wrap="square" lIns="0" rIns="0" tIns="0" bIns="0">
+          <a:bodyPr wrap="none" lIns="0" tIns="0" rIns="0" bIns="0">
             <a:spAutoFit/>
           </a:bodyPr>
           <a:lstStyle/>
           <a:p>
             <a:pPr>
-              <a:spcBef>
-                <a:spcPts val="0"/>
-              </a:spcBef>
-              <a:spcAft>
-                <a:spcPts val="600"/>
-              </a:spcAft>
-            </a:pPr>
-            <a:r>
-              <a:rPr sz="1500" b="1">
+              <a:spcAft>
+                <a:spcPts val="200"/>
+              </a:spcAft>
+            </a:pPr>
+            <a:r>
+              <a:rPr sz="1500">
+                <a:solidFill>
+                  <a:srgbClr val="FFFFFF"/>
+                </a:solidFill>
+                <a:latin typeface="Consolas"/>
+              </a:rPr>
+              <a:t>Rollout  (remplace Deployment)</a:t>
+            </a:r>
+          </a:p>
+          <a:p>
+            <a:pPr>
+              <a:spcAft>
+                <a:spcPts val="200"/>
+              </a:spcAft>
+            </a:pPr>
+            <a:r>
+              <a:rPr sz="1500">
+                <a:solidFill>
+                  <a:srgbClr val="979FB0"/>
+                </a:solidFill>
+                <a:latin typeface="Consolas"/>
+              </a:rPr>
+              <a:t>   │</a:t>
+            </a:r>
+          </a:p>
+          <a:p>
+            <a:pPr>
+              <a:spcAft>
+                <a:spcPts val="200"/>
+              </a:spcAft>
+            </a:pPr>
+            <a:r>
+              <a:rPr sz="1500">
+                <a:solidFill>
+                  <a:srgbClr val="3FC46B"/>
+                </a:solidFill>
+                <a:latin typeface="Consolas"/>
+              </a:rPr>
+              <a:t>   ├─ ReplicaSet STABLE   v actuelle</a:t>
+            </a:r>
+          </a:p>
+          <a:p>
+            <a:pPr>
+              <a:spcAft>
+                <a:spcPts val="200"/>
+              </a:spcAft>
+            </a:pPr>
+            <a:r>
+              <a:rPr sz="1500">
                 <a:solidFill>
                   <a:srgbClr val="EF7627"/>
                 </a:solidFill>
-                <a:latin typeface="Calibri"/>
-              </a:rPr>
-              <a:t>▸  </a:t>
-            </a:r>
-            <a:r>
-              <a:rPr sz="1500" b="0">
-                <a:solidFill>
-                  <a:srgbClr val="E8EAED"/>
-                </a:solidFill>
-                <a:latin typeface="Calibri"/>
-              </a:rPr>
-              <a:t>Réduire le risque : tester la v2 sur 5–10 % du trafic</a:t>
+                <a:latin typeface="Consolas"/>
+              </a:rPr>
+              <a:t>   ├─ ReplicaSet CANARY   v nouvelle</a:t>
             </a:r>
           </a:p>
           <a:p>
             <a:pPr>
-              <a:spcBef>
-                <a:spcPts val="0"/>
-              </a:spcBef>
-              <a:spcAft>
-                <a:spcPts val="600"/>
-              </a:spcAft>
-            </a:pPr>
-            <a:r>
-              <a:rPr sz="1500" b="1">
-                <a:solidFill>
-                  <a:srgbClr val="EF7627"/>
-                </a:solidFill>
-                <a:latin typeface="Calibri"/>
-              </a:rPr>
-              <a:t>▸  </a:t>
-            </a:r>
-            <a:r>
-              <a:rPr sz="1500" b="0">
-                <a:solidFill>
-                  <a:srgbClr val="E8EAED"/>
-                </a:solidFill>
-                <a:latin typeface="Calibri"/>
-              </a:rPr>
-              <a:t>Déployer plusieurs fois/jour sans maintenance</a:t>
-            </a:r>
-          </a:p>
-          <a:p>
-            <a:pPr>
-              <a:spcBef>
-                <a:spcPts val="0"/>
-              </a:spcBef>
-              <a:spcAft>
-                <a:spcPts val="600"/>
-              </a:spcAft>
-            </a:pPr>
-            <a:r>
-              <a:rPr sz="1500" b="1">
-                <a:solidFill>
-                  <a:srgbClr val="EF7627"/>
-                </a:solidFill>
-                <a:latin typeface="Calibri"/>
-              </a:rPr>
-              <a:t>▸  </a:t>
-            </a:r>
-            <a:r>
-              <a:rPr sz="1500" b="0">
-                <a:solidFill>
-                  <a:srgbClr val="E8EAED"/>
-                </a:solidFill>
-                <a:latin typeface="Calibri"/>
-              </a:rPr>
-              <a:t>SLO-driven : promotion liée aux métriques</a:t>
-            </a:r>
-          </a:p>
-          <a:p>
-            <a:pPr lvl="1">
-              <a:spcBef>
-                <a:spcPts val="0"/>
-              </a:spcBef>
-              <a:spcAft>
-                <a:spcPts val="600"/>
-              </a:spcAft>
-            </a:pPr>
-            <a:r>
-              <a:rPr sz="1500" b="1">
-                <a:solidFill>
-                  <a:srgbClr val="979FB0"/>
-                </a:solidFill>
-                <a:latin typeface="Calibri"/>
-              </a:rPr>
-              <a:t>–  </a:t>
-            </a:r>
-            <a:r>
-              <a:rPr sz="1500" b="0">
-                <a:solidFill>
-                  <a:srgbClr val="E8EAED"/>
-                </a:solidFill>
-                <a:latin typeface="Calibri"/>
-              </a:rPr>
-              <a:t>latence, taux d'erreur, succès (Prometheus, Datadog…)</a:t>
-            </a:r>
-          </a:p>
-          <a:p>
-            <a:pPr>
-              <a:spcBef>
-                <a:spcPts val="0"/>
-              </a:spcBef>
-              <a:spcAft>
-                <a:spcPts val="600"/>
-              </a:spcAft>
-            </a:pPr>
-            <a:r>
-              <a:rPr sz="1500" b="1">
-                <a:solidFill>
-                  <a:srgbClr val="EF7627"/>
-                </a:solidFill>
-                <a:latin typeface="Calibri"/>
-              </a:rPr>
-              <a:t>▸  </a:t>
-            </a:r>
-            <a:r>
-              <a:rPr sz="1500" b="0">
-                <a:solidFill>
-                  <a:srgbClr val="E8EAED"/>
-                </a:solidFill>
-                <a:latin typeface="Calibri"/>
-              </a:rPr>
-              <a:t>Couplé au GitOps (ArgoCD / Flux)</a:t>
-            </a:r>
-          </a:p>
-        </p:txBody>
-      </p:sp>
-      <p:sp>
-        <p:nvSpPr>
-          <p:cNvPr id="11" name="Rounded Rectangle 10"/>
+              <a:spcAft>
+                <a:spcPts val="200"/>
+              </a:spcAft>
+            </a:pPr>
+            <a:r>
+              <a:rPr sz="1500">
+                <a:solidFill>
+                  <a:srgbClr val="55A8F5"/>
+                </a:solidFill>
+                <a:latin typeface="Consolas"/>
+              </a:rPr>
+              <a:t>   └─ AnalysisRun         décide</a:t>
+            </a:r>
+          </a:p>
+        </p:txBody>
+      </p:sp>
+      <p:sp>
+        <p:nvSpPr>
+          <p:cNvPr id="10" name="Rounded Rectangle 9"/>
           <p:cNvSpPr/>
           <p:nvPr/>
         </p:nvSpPr>
         <p:spPr>
           <a:xfrm>
-            <a:off x="6263640" y="1600200"/>
-            <a:ext cx="5120640" cy="4206240"/>
+            <a:off x="6492240" y="1600200"/>
+            <a:ext cx="4892040" cy="4206240"/>
           </a:xfrm>
           <a:prstGeom prst="roundRect">
             <a:avLst>
@@ -11178,20 +11588,20 @@
       </p:sp>
       <p:sp>
         <p:nvSpPr>
-          <p:cNvPr id="12" name="Rectangle 11"/>
+          <p:cNvPr id="11" name="Rectangle 10"/>
           <p:cNvSpPr/>
           <p:nvPr/>
         </p:nvSpPr>
         <p:spPr>
           <a:xfrm>
-            <a:off x="6263640" y="1764792"/>
+            <a:off x="6492240" y="1764792"/>
             <a:ext cx="91440" cy="384048"/>
           </a:xfrm>
           <a:prstGeom prst="rect">
             <a:avLst/>
           </a:prstGeom>
           <a:solidFill>
-            <a:srgbClr val="55A8F5"/>
+            <a:srgbClr val="EF7627"/>
           </a:solidFill>
           <a:ln>
             <a:noFill/>
@@ -11222,14 +11632,14 @@
       </p:sp>
       <p:sp>
         <p:nvSpPr>
-          <p:cNvPr id="13" name="TextBox 12"/>
+          <p:cNvPr id="12" name="TextBox 11"/>
           <p:cNvSpPr txBox="1"/>
           <p:nvPr/>
         </p:nvSpPr>
         <p:spPr>
           <a:xfrm>
-            <a:off x="6537959" y="1783080"/>
-            <a:ext cx="4663440" cy="411480"/>
+            <a:off x="6766559" y="1783080"/>
+            <a:ext cx="4434840" cy="411480"/>
           </a:xfrm>
           <a:prstGeom prst="rect">
             <a:avLst/>
@@ -11257,21 +11667,21 @@
                 </a:solidFill>
                 <a:latin typeface="Calibri"/>
               </a:rPr>
-              <a:t>Écosystème</a:t>
-            </a:r>
-          </a:p>
-        </p:txBody>
-      </p:sp>
-      <p:sp>
-        <p:nvSpPr>
-          <p:cNvPr id="14" name="TextBox 13"/>
+              <a:t>À chaque palier, le contrôleur</a:t>
+            </a:r>
+          </a:p>
+        </p:txBody>
+      </p:sp>
+      <p:sp>
+        <p:nvSpPr>
+          <p:cNvPr id="13" name="TextBox 12"/>
           <p:cNvSpPr txBox="1"/>
           <p:nvPr/>
         </p:nvSpPr>
         <p:spPr>
           <a:xfrm>
-            <a:off x="6537959" y="2313432"/>
-            <a:ext cx="4617720" cy="3291839"/>
+            <a:off x="6766559" y="2313432"/>
+            <a:ext cx="4389120" cy="3291839"/>
           </a:xfrm>
           <a:prstGeom prst="rect">
             <a:avLst/>
@@ -11308,7 +11718,7 @@
                 </a:solidFill>
                 <a:latin typeface="Calibri"/>
               </a:rPr>
-              <a:t>Projet CNCF (Argoproj), combo standard avec ArgoCD</a:t>
+              <a:t>Ajuste la proportion de trafic/pods canary</a:t>
             </a:r>
           </a:p>
           <a:p>
@@ -11336,7 +11746,7 @@
                 </a:solidFill>
                 <a:latin typeface="Calibri"/>
               </a:rPr>
-              <a:t>Voisins : Flagger (Flux), Spinnaker</a:t>
+              <a:t>Marque une pause (minutée ou manuelle)</a:t>
             </a:r>
           </a:p>
           <a:p>
@@ -11364,11 +11774,11 @@
                 </a:solidFill>
                 <a:latin typeface="Calibri"/>
               </a:rPr>
-              <a:t>Analyse native : Prometheus, Datadog, New Relic,</a:t>
-            </a:r>
-          </a:p>
-          <a:p>
-            <a:pPr lvl="1">
+              <a:t>Lance une analyse de la santé du canary</a:t>
+            </a:r>
+          </a:p>
+          <a:p>
+            <a:pPr>
               <a:spcBef>
                 <a:spcPts val="0"/>
               </a:spcBef>
@@ -11379,48 +11789,225 @@
             <a:r>
               <a:rPr sz="1500" b="1">
                 <a:solidFill>
+                  <a:srgbClr val="3FC46B"/>
+                </a:solidFill>
+                <a:latin typeface="Calibri"/>
+              </a:rPr>
+              <a:t>✓  </a:t>
+            </a:r>
+            <a:r>
+              <a:rPr sz="1500" b="1">
+                <a:solidFill>
+                  <a:srgbClr val="3FC46B"/>
+                </a:solidFill>
+                <a:latin typeface="Calibri"/>
+              </a:rPr>
+              <a:t>Promeut si OK</a:t>
+            </a:r>
+          </a:p>
+          <a:p>
+            <a:pPr>
+              <a:spcBef>
+                <a:spcPts val="0"/>
+              </a:spcBef>
+              <a:spcAft>
+                <a:spcPts val="600"/>
+              </a:spcAft>
+            </a:pPr>
+            <a:r>
+              <a:rPr sz="1500" b="1">
+                <a:solidFill>
+                  <a:srgbClr val="F0645A"/>
+                </a:solidFill>
+                <a:latin typeface="Calibri"/>
+              </a:rPr>
+              <a:t>✕  </a:t>
+            </a:r>
+            <a:r>
+              <a:rPr sz="1500" b="1">
+                <a:solidFill>
+                  <a:srgbClr val="F0645A"/>
+                </a:solidFill>
+                <a:latin typeface="Calibri"/>
+              </a:rPr>
+              <a:t>Rollback automatique si KO</a:t>
+            </a:r>
+          </a:p>
+        </p:txBody>
+      </p:sp>
+      <p:sp>
+        <p:nvSpPr>
+          <p:cNvPr id="14" name="Rounded Rectangle 13"/>
+          <p:cNvSpPr/>
+          <p:nvPr/>
+        </p:nvSpPr>
+        <p:spPr>
+          <a:xfrm>
+            <a:off x="777240" y="4069080"/>
+            <a:ext cx="5486400" cy="1737360"/>
+          </a:xfrm>
+          <a:prstGeom prst="roundRect">
+            <a:avLst>
+              <a:gd name="adj" fmla="val 5000"/>
+            </a:avLst>
+          </a:prstGeom>
+          <a:solidFill>
+            <a:srgbClr val="1E2533"/>
+          </a:solidFill>
+          <a:ln w="12700">
+            <a:solidFill>
+              <a:srgbClr val="323C4F"/>
+            </a:solidFill>
+          </a:ln>
+          <a:effectLst/>
+        </p:spPr>
+        <p:style>
+          <a:lnRef idx="1">
+            <a:schemeClr val="accent1"/>
+          </a:lnRef>
+          <a:fillRef idx="3">
+            <a:schemeClr val="accent1"/>
+          </a:fillRef>
+          <a:effectRef idx="2">
+            <a:schemeClr val="accent1"/>
+          </a:effectRef>
+          <a:fontRef idx="minor">
+            <a:schemeClr val="lt1"/>
+          </a:fontRef>
+        </p:style>
+        <p:txBody>
+          <a:bodyPr rtlCol="0" anchor="ctr"/>
+          <a:lstStyle/>
+          <a:p>
+            <a:pPr algn="ctr"/>
+          </a:p>
+        </p:txBody>
+      </p:sp>
+      <p:sp>
+        <p:nvSpPr>
+          <p:cNvPr id="15" name="TextBox 14"/>
+          <p:cNvSpPr txBox="1"/>
+          <p:nvPr/>
+        </p:nvSpPr>
+        <p:spPr>
+          <a:xfrm>
+            <a:off x="1005840" y="4178808"/>
+            <a:ext cx="5029200" cy="274320"/>
+          </a:xfrm>
+          <a:prstGeom prst="rect">
+            <a:avLst/>
+          </a:prstGeom>
+          <a:noFill/>
+        </p:spPr>
+        <p:txBody>
+          <a:bodyPr wrap="square" anchor="t" lIns="0" rIns="0" tIns="0" bIns="0">
+            <a:spAutoFit/>
+          </a:bodyPr>
+          <a:lstStyle/>
+          <a:p>
+            <a:pPr algn="l">
+              <a:spcBef>
+                <a:spcPts val="0"/>
+              </a:spcBef>
+              <a:spcAft>
+                <a:spcPts val="400"/>
+              </a:spcAft>
+            </a:pPr>
+            <a:r>
+              <a:rPr sz="1100" b="1">
+                <a:solidFill>
                   <a:srgbClr val="979FB0"/>
                 </a:solidFill>
-                <a:latin typeface="Calibri"/>
-              </a:rPr>
-              <a:t>–  </a:t>
-            </a:r>
-            <a:r>
-              <a:rPr sz="1500" b="0">
+                <a:latin typeface="Consolas"/>
+              </a:rPr>
+              <a:t>exemple de stratégie</a:t>
+            </a:r>
+          </a:p>
+        </p:txBody>
+      </p:sp>
+      <p:sp>
+        <p:nvSpPr>
+          <p:cNvPr id="16" name="TextBox 15"/>
+          <p:cNvSpPr txBox="1"/>
+          <p:nvPr/>
+        </p:nvSpPr>
+        <p:spPr>
+          <a:xfrm>
+            <a:off x="1005840" y="4489704"/>
+            <a:ext cx="5029200" cy="1463039"/>
+          </a:xfrm>
+          <a:prstGeom prst="rect">
+            <a:avLst/>
+          </a:prstGeom>
+          <a:noFill/>
+        </p:spPr>
+        <p:txBody>
+          <a:bodyPr wrap="none" lIns="0" tIns="0" rIns="0" bIns="0">
+            <a:spAutoFit/>
+          </a:bodyPr>
+          <a:lstStyle/>
+          <a:p>
+            <a:pPr>
+              <a:spcAft>
+                <a:spcPts val="200"/>
+              </a:spcAft>
+            </a:pPr>
+            <a:r>
+              <a:rPr sz="1400">
+                <a:solidFill>
+                  <a:srgbClr val="FFFFFF"/>
+                </a:solidFill>
+                <a:latin typeface="Consolas"/>
+              </a:rPr>
+              <a:t>steps:</a:t>
+            </a:r>
+          </a:p>
+          <a:p>
+            <a:pPr>
+              <a:spcAft>
+                <a:spcPts val="200"/>
+              </a:spcAft>
+            </a:pPr>
+            <a:r>
+              <a:rPr sz="1400">
                 <a:solidFill>
                   <a:srgbClr val="E8EAED"/>
                 </a:solidFill>
-                <a:latin typeface="Calibri"/>
-              </a:rPr>
-              <a:t>CloudWatch, Graphite, Job / Web custom</a:t>
+                <a:latin typeface="Consolas"/>
+              </a:rPr>
+              <a:t>  - setWeight: 20</a:t>
             </a:r>
           </a:p>
           <a:p>
             <a:pPr>
-              <a:spcBef>
-                <a:spcPts val="0"/>
-              </a:spcBef>
-              <a:spcAft>
-                <a:spcPts val="600"/>
-              </a:spcAft>
-            </a:pPr>
-            <a:r>
-              <a:rPr sz="1500" b="1">
+              <a:spcAft>
+                <a:spcPts val="200"/>
+              </a:spcAft>
+            </a:pPr>
+            <a:r>
+              <a:rPr sz="1400">
+                <a:solidFill>
+                  <a:srgbClr val="E8EAED"/>
+                </a:solidFill>
+                <a:latin typeface="Consolas"/>
+              </a:rPr>
+              <a:t>  - pause: { duration: 30s }</a:t>
+            </a:r>
+          </a:p>
+          <a:p>
+            <a:pPr>
+              <a:spcAft>
+                <a:spcPts val="200"/>
+              </a:spcAft>
+            </a:pPr>
+            <a:r>
+              <a:rPr sz="1400">
                 <a:solidFill>
                   <a:srgbClr val="EF7627"/>
                 </a:solidFill>
-                <a:latin typeface="Calibri"/>
-              </a:rPr>
-              <a:t>▸  </a:t>
-            </a:r>
-            <a:r>
-              <a:rPr sz="1500" b="0">
-                <a:solidFill>
-                  <a:srgbClr val="E8EAED"/>
-                </a:solidFill>
-                <a:latin typeface="Calibri"/>
-              </a:rPr>
-              <a:t>Contextes : microservices, API critiques, e-commerce, SaaS</a:t>
+                <a:latin typeface="Consolas"/>
+              </a:rPr>
+              <a:t>  - analysis: { success-rate }</a:t>
             </a:r>
           </a:p>
         </p:txBody>
@@ -11532,7 +12119,7 @@
                 </a:solidFill>
                 <a:latin typeface="Calibri"/>
               </a:rPr>
-              <a:t>ANALYSE CRITIQUE</a:t>
+              <a:t>ADOPTION</a:t>
             </a:r>
           </a:p>
           <a:p>
@@ -11551,7 +12138,7 @@
                 </a:solidFill>
                 <a:latin typeface="Calibri"/>
               </a:rPr>
-              <a:t>Avantages &amp; limites</a:t>
+              <a:t>Cas d'usage en entreprise &amp; écosystème</a:t>
             </a:r>
           </a:p>
         </p:txBody>
@@ -11747,7 +12334,7 @@
             <a:avLst/>
           </a:prstGeom>
           <a:solidFill>
-            <a:srgbClr val="3FC46B"/>
+            <a:srgbClr val="EF7627"/>
           </a:solidFill>
           <a:ln>
             <a:noFill/>
@@ -11813,7 +12400,7 @@
                 </a:solidFill>
                 <a:latin typeface="Calibri"/>
               </a:rPr>
-              <a:t>Avantages</a:t>
+              <a:t>Utilisation en production</a:t>
             </a:r>
           </a:p>
         </p:txBody>
@@ -11851,20 +12438,48 @@
             <a:r>
               <a:rPr sz="1500" b="1">
                 <a:solidFill>
-                  <a:srgbClr val="3FC46B"/>
-                </a:solidFill>
-                <a:latin typeface="Calibri"/>
-              </a:rPr>
-              <a:t>✓  </a:t>
-            </a:r>
+                  <a:srgbClr val="EF7627"/>
+                </a:solidFill>
+                <a:latin typeface="Calibri"/>
+              </a:rPr>
+              <a:t>▸  </a:t>
+            </a:r>
+            <a:r>
+              <a:rPr sz="1500" b="0">
+                <a:solidFill>
+                  <a:srgbClr val="E8EAED"/>
+                </a:solidFill>
+                <a:latin typeface="Calibri"/>
+              </a:rPr>
+              <a:t>Réduire le risque : tester la v2 sur 5–10 % du trafic</a:t>
+            </a:r>
+          </a:p>
+          <a:p>
+            <a:pPr>
+              <a:spcBef>
+                <a:spcPts val="0"/>
+              </a:spcBef>
+              <a:spcAft>
+                <a:spcPts val="600"/>
+              </a:spcAft>
+            </a:pPr>
             <a:r>
               <a:rPr sz="1500" b="1">
                 <a:solidFill>
-                  <a:srgbClr val="3FC46B"/>
-                </a:solidFill>
-                <a:latin typeface="Calibri"/>
-              </a:rPr>
-              <a:t>Rollback automatique → moins d'incidents</a:t>
+                  <a:srgbClr val="EF7627"/>
+                </a:solidFill>
+                <a:latin typeface="Calibri"/>
+              </a:rPr>
+              <a:t>▸  </a:t>
+            </a:r>
+            <a:r>
+              <a:rPr sz="1500" b="0">
+                <a:solidFill>
+                  <a:srgbClr val="E8EAED"/>
+                </a:solidFill>
+                <a:latin typeface="Calibri"/>
+              </a:rPr>
+              <a:t>Déployer plusieurs fois/jour sans maintenance</a:t>
             </a:r>
           </a:p>
           <a:p>
@@ -11879,20 +12494,48 @@
             <a:r>
               <a:rPr sz="1500" b="1">
                 <a:solidFill>
-                  <a:srgbClr val="3FC46B"/>
-                </a:solidFill>
-                <a:latin typeface="Calibri"/>
-              </a:rPr>
-              <a:t>✓  </a:t>
-            </a:r>
+                  <a:srgbClr val="EF7627"/>
+                </a:solidFill>
+                <a:latin typeface="Calibri"/>
+              </a:rPr>
+              <a:t>▸  </a:t>
+            </a:r>
+            <a:r>
+              <a:rPr sz="1500" b="0">
+                <a:solidFill>
+                  <a:srgbClr val="E8EAED"/>
+                </a:solidFill>
+                <a:latin typeface="Calibri"/>
+              </a:rPr>
+              <a:t>SLO-driven : promotion liée aux métriques</a:t>
+            </a:r>
+          </a:p>
+          <a:p>
+            <a:pPr lvl="1">
+              <a:spcBef>
+                <a:spcPts val="0"/>
+              </a:spcBef>
+              <a:spcAft>
+                <a:spcPts val="600"/>
+              </a:spcAft>
+            </a:pPr>
             <a:r>
               <a:rPr sz="1500" b="1">
                 <a:solidFill>
-                  <a:srgbClr val="3FC46B"/>
-                </a:solidFill>
-                <a:latin typeface="Calibri"/>
-              </a:rPr>
-              <a:t>Pas de downtime, exposition contrôlée</a:t>
+                  <a:srgbClr val="979FB0"/>
+                </a:solidFill>
+                <a:latin typeface="Calibri"/>
+              </a:rPr>
+              <a:t>–  </a:t>
+            </a:r>
+            <a:r>
+              <a:rPr sz="1500" b="0">
+                <a:solidFill>
+                  <a:srgbClr val="E8EAED"/>
+                </a:solidFill>
+                <a:latin typeface="Calibri"/>
+              </a:rPr>
+              <a:t>latence, taux d'erreur, succès (Prometheus, Datadog…)</a:t>
             </a:r>
           </a:p>
           <a:p>
@@ -11907,48 +12550,20 @@
             <a:r>
               <a:rPr sz="1500" b="1">
                 <a:solidFill>
-                  <a:srgbClr val="3FC46B"/>
-                </a:solidFill>
-                <a:latin typeface="Calibri"/>
-              </a:rPr>
-              <a:t>✓  </a:t>
-            </a:r>
-            <a:r>
-              <a:rPr sz="1500" b="1">
-                <a:solidFill>
-                  <a:srgbClr val="3FC46B"/>
-                </a:solidFill>
-                <a:latin typeface="Calibri"/>
-              </a:rPr>
-              <a:t>Décision objective (métriques), pas « au feeling »</a:t>
-            </a:r>
-          </a:p>
-          <a:p>
-            <a:pPr>
-              <a:spcBef>
-                <a:spcPts val="0"/>
-              </a:spcBef>
-              <a:spcAft>
-                <a:spcPts val="600"/>
-              </a:spcAft>
-            </a:pPr>
-            <a:r>
-              <a:rPr sz="1500" b="1">
-                <a:solidFill>
-                  <a:srgbClr val="3FC46B"/>
-                </a:solidFill>
-                <a:latin typeface="Calibri"/>
-              </a:rPr>
-              <a:t>✓  </a:t>
-            </a:r>
-            <a:r>
-              <a:rPr sz="1500" b="1">
-                <a:solidFill>
-                  <a:srgbClr val="3FC46B"/>
-                </a:solidFill>
-                <a:latin typeface="Calibri"/>
-              </a:rPr>
-              <a:t>Intégration native : ArgoCD, Prometheus, Istio</a:t>
+                  <a:srgbClr val="EF7627"/>
+                </a:solidFill>
+                <a:latin typeface="Calibri"/>
+              </a:rPr>
+              <a:t>▸  </a:t>
+            </a:r>
+            <a:r>
+              <a:rPr sz="1500" b="0">
+                <a:solidFill>
+                  <a:srgbClr val="E8EAED"/>
+                </a:solidFill>
+                <a:latin typeface="Calibri"/>
+              </a:rPr>
+              <a:t>Couplé au GitOps (ArgoCD / Flux)</a:t>
             </a:r>
           </a:p>
         </p:txBody>
@@ -12016,7 +12631,7 @@
             <a:avLst/>
           </a:prstGeom>
           <a:solidFill>
-            <a:srgbClr val="F0645A"/>
+            <a:srgbClr val="55A8F5"/>
           </a:solidFill>
           <a:ln>
             <a:noFill/>
@@ -12082,7 +12697,7 @@
                 </a:solidFill>
                 <a:latin typeface="Calibri"/>
               </a:rPr>
-              <a:t>Limites</a:t>
+              <a:t>Écosystème</a:t>
             </a:r>
           </a:p>
         </p:txBody>
@@ -12120,20 +12735,48 @@
             <a:r>
               <a:rPr sz="1500" b="1">
                 <a:solidFill>
-                  <a:srgbClr val="F0645A"/>
-                </a:solidFill>
-                <a:latin typeface="Calibri"/>
-              </a:rPr>
-              <a:t>✕  </a:t>
-            </a:r>
+                  <a:srgbClr val="EF7627"/>
+                </a:solidFill>
+                <a:latin typeface="Calibri"/>
+              </a:rPr>
+              <a:t>▸  </a:t>
+            </a:r>
+            <a:r>
+              <a:rPr sz="1500" b="0">
+                <a:solidFill>
+                  <a:srgbClr val="E8EAED"/>
+                </a:solidFill>
+                <a:latin typeface="Calibri"/>
+              </a:rPr>
+              <a:t>Projet CNCF (Argoproj), combo standard avec ArgoCD</a:t>
+            </a:r>
+          </a:p>
+          <a:p>
+            <a:pPr>
+              <a:spcBef>
+                <a:spcPts val="0"/>
+              </a:spcBef>
+              <a:spcAft>
+                <a:spcPts val="600"/>
+              </a:spcAft>
+            </a:pPr>
             <a:r>
               <a:rPr sz="1500" b="1">
                 <a:solidFill>
-                  <a:srgbClr val="F0645A"/>
-                </a:solidFill>
-                <a:latin typeface="Calibri"/>
-              </a:rPr>
-              <a:t>Complexité accrue (CRD, analyse, parfois mesh)</a:t>
+                  <a:srgbClr val="EF7627"/>
+                </a:solidFill>
+                <a:latin typeface="Calibri"/>
+              </a:rPr>
+              <a:t>▸  </a:t>
+            </a:r>
+            <a:r>
+              <a:rPr sz="1500" b="0">
+                <a:solidFill>
+                  <a:srgbClr val="E8EAED"/>
+                </a:solidFill>
+                <a:latin typeface="Calibri"/>
+              </a:rPr>
+              <a:t>Voisins : Flagger (Flux), Spinnaker</a:t>
             </a:r>
           </a:p>
           <a:p>
@@ -12148,20 +12791,48 @@
             <a:r>
               <a:rPr sz="1500" b="1">
                 <a:solidFill>
-                  <a:srgbClr val="F0645A"/>
-                </a:solidFill>
-                <a:latin typeface="Calibri"/>
-              </a:rPr>
-              <a:t>✕  </a:t>
-            </a:r>
+                  <a:srgbClr val="EF7627"/>
+                </a:solidFill>
+                <a:latin typeface="Calibri"/>
+              </a:rPr>
+              <a:t>▸  </a:t>
+            </a:r>
+            <a:r>
+              <a:rPr sz="1500" b="0">
+                <a:solidFill>
+                  <a:srgbClr val="E8EAED"/>
+                </a:solidFill>
+                <a:latin typeface="Calibri"/>
+              </a:rPr>
+              <a:t>Analyse native : Prometheus, Datadog, New Relic,</a:t>
+            </a:r>
+          </a:p>
+          <a:p>
+            <a:pPr lvl="1">
+              <a:spcBef>
+                <a:spcPts val="0"/>
+              </a:spcBef>
+              <a:spcAft>
+                <a:spcPts val="600"/>
+              </a:spcAft>
+            </a:pPr>
             <a:r>
               <a:rPr sz="1500" b="1">
                 <a:solidFill>
-                  <a:srgbClr val="F0645A"/>
-                </a:solidFill>
-                <a:latin typeface="Calibri"/>
-              </a:rPr>
-              <a:t>Trafic fin = Istio / NGINX / SMI requis</a:t>
+                  <a:srgbClr val="979FB0"/>
+                </a:solidFill>
+                <a:latin typeface="Calibri"/>
+              </a:rPr>
+              <a:t>–  </a:t>
+            </a:r>
+            <a:r>
+              <a:rPr sz="1500" b="0">
+                <a:solidFill>
+                  <a:srgbClr val="E8EAED"/>
+                </a:solidFill>
+                <a:latin typeface="Calibri"/>
+              </a:rPr>
+              <a:t>CloudWatch, Graphite, Job / Web custom</a:t>
             </a:r>
           </a:p>
           <a:p>
@@ -12176,48 +12847,20 @@
             <a:r>
               <a:rPr sz="1500" b="1">
                 <a:solidFill>
-                  <a:srgbClr val="F0645A"/>
-                </a:solidFill>
-                <a:latin typeface="Calibri"/>
-              </a:rPr>
-              <a:t>✕  </a:t>
-            </a:r>
-            <a:r>
-              <a:rPr sz="1500" b="1">
-                <a:solidFill>
-                  <a:srgbClr val="F0645A"/>
-                </a:solidFill>
-                <a:latin typeface="Calibri"/>
-              </a:rPr>
-              <a:t>Nécessite de bonnes métriques (sinon fausse confiance)</a:t>
-            </a:r>
-          </a:p>
-          <a:p>
-            <a:pPr>
-              <a:spcBef>
-                <a:spcPts val="0"/>
-              </a:spcBef>
-              <a:spcAft>
-                <a:spcPts val="600"/>
-              </a:spcAft>
-            </a:pPr>
-            <a:r>
-              <a:rPr sz="1500" b="1">
-                <a:solidFill>
-                  <a:srgbClr val="F0645A"/>
-                </a:solidFill>
-                <a:latin typeface="Calibri"/>
-              </a:rPr>
-              <a:t>✕  </a:t>
-            </a:r>
-            <a:r>
-              <a:rPr sz="1500" b="1">
-                <a:solidFill>
-                  <a:srgbClr val="F0645A"/>
-                </a:solidFill>
-                <a:latin typeface="Calibri"/>
-              </a:rPr>
-              <a:t>Courbe d'apprentissage, observabilité indispensable</a:t>
+                  <a:srgbClr val="EF7627"/>
+                </a:solidFill>
+                <a:latin typeface="Calibri"/>
+              </a:rPr>
+              <a:t>▸  </a:t>
+            </a:r>
+            <a:r>
+              <a:rPr sz="1500" b="0">
+                <a:solidFill>
+                  <a:srgbClr val="E8EAED"/>
+                </a:solidFill>
+                <a:latin typeface="Calibri"/>
+              </a:rPr>
+              <a:t>Contextes : microservices, API critiques, e-commerce, SaaS</a:t>
             </a:r>
           </a:p>
         </p:txBody>
@@ -12329,7 +12972,7 @@
                 </a:solidFill>
                 <a:latin typeface="Calibri"/>
               </a:rPr>
-              <a:t>STACK &amp; FLUX</a:t>
+              <a:t>ANALYSE CRITIQUE</a:t>
             </a:r>
           </a:p>
           <a:p>
@@ -12348,7 +12991,7 @@
                 </a:solidFill>
                 <a:latin typeface="Calibri"/>
               </a:rPr>
-              <a:t>Architecture de la démo</a:t>
+              <a:t>Avantages &amp; limites</a:t>
             </a:r>
           </a:p>
         </p:txBody>
@@ -12490,11 +13133,11 @@
         <p:spPr>
           <a:xfrm>
             <a:off x="777240" y="1600200"/>
-            <a:ext cx="10607040" cy="1965960"/>
+            <a:ext cx="5257800" cy="4206240"/>
           </a:xfrm>
           <a:prstGeom prst="roundRect">
             <a:avLst>
-              <a:gd name="adj" fmla="val 5000"/>
+              <a:gd name="adj" fmla="val 6000"/>
             </a:avLst>
           </a:prstGeom>
           <a:solidFill>
@@ -12531,14 +13174,58 @@
       </p:sp>
       <p:sp>
         <p:nvSpPr>
-          <p:cNvPr id="8" name="TextBox 7"/>
+          <p:cNvPr id="8" name="Rectangle 7"/>
+          <p:cNvSpPr/>
+          <p:nvPr/>
+        </p:nvSpPr>
+        <p:spPr>
+          <a:xfrm>
+            <a:off x="777240" y="1764792"/>
+            <a:ext cx="91440" cy="384048"/>
+          </a:xfrm>
+          <a:prstGeom prst="rect">
+            <a:avLst/>
+          </a:prstGeom>
+          <a:solidFill>
+            <a:srgbClr val="3FC46B"/>
+          </a:solidFill>
+          <a:ln>
+            <a:noFill/>
+          </a:ln>
+          <a:effectLst/>
+        </p:spPr>
+        <p:style>
+          <a:lnRef idx="1">
+            <a:schemeClr val="accent1"/>
+          </a:lnRef>
+          <a:fillRef idx="3">
+            <a:schemeClr val="accent1"/>
+          </a:fillRef>
+          <a:effectRef idx="2">
+            <a:schemeClr val="accent1"/>
+          </a:effectRef>
+          <a:fontRef idx="minor">
+            <a:schemeClr val="lt1"/>
+          </a:fontRef>
+        </p:style>
+        <p:txBody>
+          <a:bodyPr rtlCol="0" anchor="ctr"/>
+          <a:lstStyle/>
+          <a:p>
+            <a:pPr algn="ctr"/>
+          </a:p>
+        </p:txBody>
+      </p:sp>
+      <p:sp>
+        <p:nvSpPr>
+          <p:cNvPr id="9" name="TextBox 8"/>
           <p:cNvSpPr txBox="1"/>
           <p:nvPr/>
         </p:nvSpPr>
         <p:spPr>
           <a:xfrm>
-            <a:off x="1005840" y="1709928"/>
-            <a:ext cx="10149840" cy="274320"/>
+            <a:off x="1051560" y="1783080"/>
+            <a:ext cx="4800600" cy="411480"/>
           </a:xfrm>
           <a:prstGeom prst="rect">
             <a:avLst/>
@@ -12560,27 +13247,27 @@
               </a:spcAft>
             </a:pPr>
             <a:r>
-              <a:rPr sz="1100" b="1">
-                <a:solidFill>
-                  <a:srgbClr val="979FB0"/>
-                </a:solidFill>
-                <a:latin typeface="Consolas"/>
-              </a:rPr>
-              <a:t>flux GitOps de bout en bout</a:t>
-            </a:r>
-          </a:p>
-        </p:txBody>
-      </p:sp>
-      <p:sp>
-        <p:nvSpPr>
-          <p:cNvPr id="9" name="TextBox 8"/>
+              <a:rPr sz="1600" b="1">
+                <a:solidFill>
+                  <a:srgbClr val="FFFFFF"/>
+                </a:solidFill>
+                <a:latin typeface="Calibri"/>
+              </a:rPr>
+              <a:t>Avantages</a:t>
+            </a:r>
+          </a:p>
+        </p:txBody>
+      </p:sp>
+      <p:sp>
+        <p:nvSpPr>
+          <p:cNvPr id="10" name="TextBox 9"/>
           <p:cNvSpPr txBox="1"/>
           <p:nvPr/>
         </p:nvSpPr>
         <p:spPr>
           <a:xfrm>
-            <a:off x="1005840" y="2020824"/>
-            <a:ext cx="10149840" cy="1691639"/>
+            <a:off x="1051560" y="2313432"/>
+            <a:ext cx="4754880" cy="3291839"/>
           </a:xfrm>
           <a:prstGeom prst="rect">
             <a:avLst/>
@@ -12588,86 +13275,134 @@
           <a:noFill/>
         </p:spPr>
         <p:txBody>
-          <a:bodyPr wrap="none" lIns="0" tIns="0" rIns="0" bIns="0">
+          <a:bodyPr wrap="square" lIns="0" rIns="0" tIns="0" bIns="0">
             <a:spAutoFit/>
           </a:bodyPr>
           <a:lstStyle/>
           <a:p>
             <a:pPr>
-              <a:spcAft>
-                <a:spcPts val="200"/>
-              </a:spcAft>
-            </a:pPr>
-            <a:r>
-              <a:rPr sz="1500">
-                <a:solidFill>
-                  <a:srgbClr val="E8EAED"/>
-                </a:solidFill>
-                <a:latin typeface="Consolas"/>
-              </a:rPr>
-              <a:t>git push ─▶ GitHub Actions (lint + validation des manifests)</a:t>
+              <a:spcBef>
+                <a:spcPts val="0"/>
+              </a:spcBef>
+              <a:spcAft>
+                <a:spcPts val="600"/>
+              </a:spcAft>
+            </a:pPr>
+            <a:r>
+              <a:rPr sz="1500" b="1">
+                <a:solidFill>
+                  <a:srgbClr val="3FC46B"/>
+                </a:solidFill>
+                <a:latin typeface="Calibri"/>
+              </a:rPr>
+              <a:t>✓  </a:t>
+            </a:r>
+            <a:r>
+              <a:rPr sz="1500" b="1">
+                <a:solidFill>
+                  <a:srgbClr val="3FC46B"/>
+                </a:solidFill>
+                <a:latin typeface="Calibri"/>
+              </a:rPr>
+              <a:t>Rollback automatique → moins d'incidents</a:t>
             </a:r>
           </a:p>
           <a:p>
             <a:pPr>
-              <a:spcAft>
-                <a:spcPts val="200"/>
-              </a:spcAft>
-            </a:pPr>
-            <a:r>
-              <a:rPr sz="1500">
-                <a:solidFill>
-                  <a:srgbClr val="EF7627"/>
-                </a:solidFill>
-                <a:latin typeface="Consolas"/>
-              </a:rPr>
-              <a:t>        └─▶ ArgoCD (pull) ─▶ Rollout ─▶ Contrôleur Argo Rollouts</a:t>
+              <a:spcBef>
+                <a:spcPts val="0"/>
+              </a:spcBef>
+              <a:spcAft>
+                <a:spcPts val="600"/>
+              </a:spcAft>
+            </a:pPr>
+            <a:r>
+              <a:rPr sz="1500" b="1">
+                <a:solidFill>
+                  <a:srgbClr val="3FC46B"/>
+                </a:solidFill>
+                <a:latin typeface="Calibri"/>
+              </a:rPr>
+              <a:t>✓  </a:t>
+            </a:r>
+            <a:r>
+              <a:rPr sz="1500" b="1">
+                <a:solidFill>
+                  <a:srgbClr val="3FC46B"/>
+                </a:solidFill>
+                <a:latin typeface="Calibri"/>
+              </a:rPr>
+              <a:t>Pas de downtime, exposition contrôlée</a:t>
             </a:r>
           </a:p>
           <a:p>
             <a:pPr>
-              <a:spcAft>
-                <a:spcPts val="200"/>
-              </a:spcAft>
-            </a:pPr>
-            <a:r>
-              <a:rPr sz="1500">
+              <a:spcBef>
+                <a:spcPts val="0"/>
+              </a:spcBef>
+              <a:spcAft>
+                <a:spcPts val="600"/>
+              </a:spcAft>
+            </a:pPr>
+            <a:r>
+              <a:rPr sz="1500" b="1">
                 <a:solidFill>
                   <a:srgbClr val="3FC46B"/>
                 </a:solidFill>
-                <a:latin typeface="Consolas"/>
-              </a:rPr>
-              <a:t>                                          ├─ ReplicaSet stable / canary</a:t>
+                <a:latin typeface="Calibri"/>
+              </a:rPr>
+              <a:t>✓  </a:t>
+            </a:r>
+            <a:r>
+              <a:rPr sz="1500" b="1">
+                <a:solidFill>
+                  <a:srgbClr val="3FC46B"/>
+                </a:solidFill>
+                <a:latin typeface="Calibri"/>
+              </a:rPr>
+              <a:t>Décision objective (métriques), pas « au feeling »</a:t>
             </a:r>
           </a:p>
           <a:p>
             <a:pPr>
-              <a:spcAft>
-                <a:spcPts val="200"/>
-              </a:spcAft>
-            </a:pPr>
-            <a:r>
-              <a:rPr sz="1500">
-                <a:solidFill>
-                  <a:srgbClr val="55A8F5"/>
-                </a:solidFill>
-                <a:latin typeface="Consolas"/>
-              </a:rPr>
-              <a:t>                                          └─ AnalysisRun (Job de sonde HTTP)</a:t>
-            </a:r>
-          </a:p>
-        </p:txBody>
-      </p:sp>
-      <p:sp>
-        <p:nvSpPr>
-          <p:cNvPr id="10" name="Rounded Rectangle 9"/>
+              <a:spcBef>
+                <a:spcPts val="0"/>
+              </a:spcBef>
+              <a:spcAft>
+                <a:spcPts val="600"/>
+              </a:spcAft>
+            </a:pPr>
+            <a:r>
+              <a:rPr sz="1500" b="1">
+                <a:solidFill>
+                  <a:srgbClr val="3FC46B"/>
+                </a:solidFill>
+                <a:latin typeface="Calibri"/>
+              </a:rPr>
+              <a:t>✓  </a:t>
+            </a:r>
+            <a:r>
+              <a:rPr sz="1500" b="1">
+                <a:solidFill>
+                  <a:srgbClr val="3FC46B"/>
+                </a:solidFill>
+                <a:latin typeface="Calibri"/>
+              </a:rPr>
+              <a:t>Intégration native : ArgoCD, Prometheus, Istio</a:t>
+            </a:r>
+          </a:p>
+        </p:txBody>
+      </p:sp>
+      <p:sp>
+        <p:nvSpPr>
+          <p:cNvPr id="11" name="Rounded Rectangle 10"/>
           <p:cNvSpPr/>
           <p:nvPr/>
         </p:nvSpPr>
         <p:spPr>
           <a:xfrm>
-            <a:off x="777240" y="3794760"/>
-            <a:ext cx="5212080" cy="2331720"/>
+            <a:off x="6263640" y="1600200"/>
+            <a:ext cx="5120640" cy="4206240"/>
           </a:xfrm>
           <a:prstGeom prst="roundRect">
             <a:avLst>
@@ -12708,20 +13443,20 @@
       </p:sp>
       <p:sp>
         <p:nvSpPr>
-          <p:cNvPr id="11" name="Rectangle 10"/>
+          <p:cNvPr id="12" name="Rectangle 11"/>
           <p:cNvSpPr/>
           <p:nvPr/>
         </p:nvSpPr>
         <p:spPr>
           <a:xfrm>
-            <a:off x="777240" y="3959352"/>
+            <a:off x="6263640" y="1764792"/>
             <a:ext cx="91440" cy="384048"/>
           </a:xfrm>
           <a:prstGeom prst="rect">
             <a:avLst/>
           </a:prstGeom>
           <a:solidFill>
-            <a:srgbClr val="EF7627"/>
+            <a:srgbClr val="F0645A"/>
           </a:solidFill>
           <a:ln>
             <a:noFill/>
@@ -12752,14 +13487,14 @@
       </p:sp>
       <p:sp>
         <p:nvSpPr>
-          <p:cNvPr id="12" name="TextBox 11"/>
+          <p:cNvPr id="13" name="TextBox 12"/>
           <p:cNvSpPr txBox="1"/>
           <p:nvPr/>
         </p:nvSpPr>
         <p:spPr>
           <a:xfrm>
-            <a:off x="1051560" y="3977640"/>
-            <a:ext cx="4754880" cy="411480"/>
+            <a:off x="6537959" y="1783080"/>
+            <a:ext cx="4663440" cy="411480"/>
           </a:xfrm>
           <a:prstGeom prst="rect">
             <a:avLst/>
@@ -12787,21 +13522,21 @@
                 </a:solidFill>
                 <a:latin typeface="Calibri"/>
               </a:rPr>
-              <a:t>Environnement &amp; astuce</a:t>
-            </a:r>
-          </a:p>
-        </p:txBody>
-      </p:sp>
-      <p:sp>
-        <p:nvSpPr>
-          <p:cNvPr id="13" name="TextBox 12"/>
+              <a:t>Limites</a:t>
+            </a:r>
+          </a:p>
+        </p:txBody>
+      </p:sp>
+      <p:sp>
+        <p:nvSpPr>
+          <p:cNvPr id="14" name="TextBox 13"/>
           <p:cNvSpPr txBox="1"/>
           <p:nvPr/>
         </p:nvSpPr>
         <p:spPr>
           <a:xfrm>
-            <a:off x="1051560" y="4507992"/>
-            <a:ext cx="4709160" cy="1417319"/>
+            <a:off x="6537959" y="2313432"/>
+            <a:ext cx="4617720" cy="3291839"/>
           </a:xfrm>
           <a:prstGeom prst="rect">
             <a:avLst/>
@@ -12823,22 +13558,22 @@
               </a:spcAft>
             </a:pPr>
             <a:r>
-              <a:rPr sz="1400" b="1">
-                <a:solidFill>
-                  <a:srgbClr val="EF7627"/>
-                </a:solidFill>
-                <a:latin typeface="Calibri"/>
-              </a:rPr>
-              <a:t>▸  </a:t>
-            </a:r>
-            <a:r>
-              <a:rPr sz="1400" b="0">
-                <a:solidFill>
-                  <a:srgbClr val="E8EAED"/>
-                </a:solidFill>
-                <a:latin typeface="Calibri"/>
-              </a:rPr>
-              <a:t>Cluster kind + ArgoCD + Argo Rollouts v1.7.2</a:t>
+              <a:rPr sz="1500" b="1">
+                <a:solidFill>
+                  <a:srgbClr val="F0645A"/>
+                </a:solidFill>
+                <a:latin typeface="Calibri"/>
+              </a:rPr>
+              <a:t>✕  </a:t>
+            </a:r>
+            <a:r>
+              <a:rPr sz="1500" b="1">
+                <a:solidFill>
+                  <a:srgbClr val="F0645A"/>
+                </a:solidFill>
+                <a:latin typeface="Calibri"/>
+              </a:rPr>
+              <a:t>Complexité accrue (CRD, analyse, parfois mesh)</a:t>
             </a:r>
           </a:p>
           <a:p>
@@ -12851,22 +13586,22 @@
               </a:spcAft>
             </a:pPr>
             <a:r>
-              <a:rPr sz="1400" b="1">
-                <a:solidFill>
-                  <a:srgbClr val="EF7627"/>
-                </a:solidFill>
-                <a:latin typeface="Calibri"/>
-              </a:rPr>
-              <a:t>▸  </a:t>
-            </a:r>
-            <a:r>
-              <a:rPr sz="1400" b="0">
-                <a:solidFill>
-                  <a:srgbClr val="E8EAED"/>
-                </a:solidFill>
-                <a:latin typeface="Calibri"/>
-              </a:rPr>
-              <a:t>App rollouts-demo : 1 couleur = 1 version</a:t>
+              <a:rPr sz="1500" b="1">
+                <a:solidFill>
+                  <a:srgbClr val="F0645A"/>
+                </a:solidFill>
+                <a:latin typeface="Calibri"/>
+              </a:rPr>
+              <a:t>✕  </a:t>
+            </a:r>
+            <a:r>
+              <a:rPr sz="1500" b="1">
+                <a:solidFill>
+                  <a:srgbClr val="F0645A"/>
+                </a:solidFill>
+                <a:latin typeface="Calibri"/>
+              </a:rPr>
+              <a:t>Trafic fin = Istio / NGINX / SMI requis</a:t>
             </a:r>
           </a:p>
           <a:p>
@@ -12879,7 +13614,7 @@
               </a:spcAft>
             </a:pPr>
             <a:r>
-              <a:rPr sz="1400" b="1">
+              <a:rPr sz="1500" b="1">
                 <a:solidFill>
                   <a:srgbClr val="F0645A"/>
                 </a:solidFill>
@@ -12888,17 +13623,17 @@
               <a:t>✕  </a:t>
             </a:r>
             <a:r>
-              <a:rPr sz="1400" b="1">
+              <a:rPr sz="1500" b="1">
                 <a:solidFill>
                   <a:srgbClr val="F0645A"/>
                 </a:solidFill>
                 <a:latin typeface="Calibri"/>
               </a:rPr>
-              <a:t>Le tag bad-red renvoie des HTTP 500</a:t>
-            </a:r>
-          </a:p>
-          <a:p>
-            <a:pPr lvl="1">
+              <a:t>Nécessite de bonnes métriques (sinon fausse confiance)</a:t>
+            </a:r>
+          </a:p>
+          <a:p>
+            <a:pPr>
               <a:spcBef>
                 <a:spcPts val="0"/>
               </a:spcBef>
@@ -12907,136 +13642,22 @@
               </a:spcAft>
             </a:pPr>
             <a:r>
-              <a:rPr sz="1400" b="1">
-                <a:solidFill>
-                  <a:srgbClr val="979FB0"/>
-                </a:solidFill>
-                <a:latin typeface="Calibri"/>
-              </a:rPr>
-              <a:t>–  </a:t>
-            </a:r>
-            <a:r>
-              <a:rPr sz="1400" b="0">
-                <a:solidFill>
-                  <a:srgbClr val="E8EAED"/>
-                </a:solidFill>
-                <a:latin typeface="Calibri"/>
-              </a:rPr>
-              <a:t>version « buggée » déterministe pour le rollback</a:t>
-            </a:r>
-          </a:p>
-        </p:txBody>
-      </p:sp>
-      <p:sp>
-        <p:nvSpPr>
-          <p:cNvPr id="14" name="Rounded Rectangle 13"/>
-          <p:cNvSpPr/>
-          <p:nvPr/>
-        </p:nvSpPr>
-        <p:spPr>
-          <a:xfrm>
-            <a:off x="6300216" y="3739896"/>
-            <a:ext cx="4496943" cy="2258568"/>
-          </a:xfrm>
-          <a:prstGeom prst="roundRect">
-            <a:avLst>
-              <a:gd name="adj" fmla="val 3000"/>
-            </a:avLst>
-          </a:prstGeom>
-          <a:solidFill>
-            <a:srgbClr val="1E2533"/>
-          </a:solidFill>
-          <a:ln w="12700">
-            <a:solidFill>
-              <a:srgbClr val="323C4F"/>
-            </a:solidFill>
-          </a:ln>
-          <a:effectLst/>
-        </p:spPr>
-        <p:style>
-          <a:lnRef idx="1">
-            <a:schemeClr val="accent1"/>
-          </a:lnRef>
-          <a:fillRef idx="3">
-            <a:schemeClr val="accent1"/>
-          </a:fillRef>
-          <a:effectRef idx="2">
-            <a:schemeClr val="accent1"/>
-          </a:effectRef>
-          <a:fontRef idx="minor">
-            <a:schemeClr val="lt1"/>
-          </a:fontRef>
-        </p:style>
-        <p:txBody>
-          <a:bodyPr rtlCol="0" anchor="ctr"/>
-          <a:lstStyle/>
-          <a:p>
-            <a:pPr algn="ctr"/>
-          </a:p>
-        </p:txBody>
-      </p:sp>
-      <p:pic>
-        <p:nvPicPr>
-          <p:cNvPr id="15" name="Picture 14" descr="ui-canary-grid.png"/>
-          <p:cNvPicPr>
-            <a:picLocks noChangeAspect="1"/>
-          </p:cNvPicPr>
-          <p:nvPr/>
-        </p:nvPicPr>
-        <p:blipFill>
-          <a:blip r:embed="rId2"/>
-          <a:stretch>
-            <a:fillRect/>
-          </a:stretch>
-        </p:blipFill>
-        <p:spPr>
-          <a:xfrm>
-            <a:off x="6355080" y="3794760"/>
-            <a:ext cx="4387215" cy="2148840"/>
-          </a:xfrm>
-          <a:prstGeom prst="rect">
-            <a:avLst/>
-          </a:prstGeom>
-        </p:spPr>
-      </p:pic>
-      <p:sp>
-        <p:nvSpPr>
-          <p:cNvPr id="16" name="TextBox 15"/>
-          <p:cNvSpPr txBox="1"/>
-          <p:nvPr/>
-        </p:nvSpPr>
-        <p:spPr>
-          <a:xfrm>
-            <a:off x="6355080" y="5961888"/>
-            <a:ext cx="5029200" cy="274320"/>
-          </a:xfrm>
-          <a:prstGeom prst="rect">
-            <a:avLst/>
-          </a:prstGeom>
-          <a:noFill/>
-        </p:spPr>
-        <p:txBody>
-          <a:bodyPr wrap="square" anchor="t" lIns="0" rIns="0" tIns="0" bIns="0">
-            <a:spAutoFit/>
-          </a:bodyPr>
-          <a:lstStyle/>
-          <a:p>
-            <a:pPr algn="l">
-              <a:spcBef>
-                <a:spcPts val="0"/>
-              </a:spcBef>
-              <a:spcAft>
-                <a:spcPts val="400"/>
-              </a:spcAft>
-            </a:pPr>
-            <a:r>
-              <a:rPr sz="1100" b="0">
-                <a:solidFill>
-                  <a:srgbClr val="979FB0"/>
-                </a:solidFill>
-                <a:latin typeface="Calibri"/>
-              </a:rPr>
-              <a:t>UI réelle : trafic réparti vert (canary) / bleu (stable)</a:t>
+              <a:rPr sz="1500" b="1">
+                <a:solidFill>
+                  <a:srgbClr val="F0645A"/>
+                </a:solidFill>
+                <a:latin typeface="Calibri"/>
+              </a:rPr>
+              <a:t>✕  </a:t>
+            </a:r>
+            <a:r>
+              <a:rPr sz="1500" b="1">
+                <a:solidFill>
+                  <a:srgbClr val="F0645A"/>
+                </a:solidFill>
+                <a:latin typeface="Calibri"/>
+              </a:rPr>
+              <a:t>Courbe d'apprentissage, observabilité indispensable</a:t>
             </a:r>
           </a:p>
         </p:txBody>
@@ -13148,7 +13769,7 @@
                 </a:solidFill>
                 <a:latin typeface="Calibri"/>
               </a:rPr>
-              <a:t>DÉCISIONS D'IMPLÉMENTATION</a:t>
+              <a:t>STACK &amp; FLUX</a:t>
             </a:r>
           </a:p>
           <a:p>
@@ -13167,7 +13788,7 @@
                 </a:solidFill>
                 <a:latin typeface="Calibri"/>
               </a:rPr>
-              <a:t>Choix techniques clés</a:t>
+              <a:t>Architecture de la démo</a:t>
             </a:r>
           </a:p>
         </p:txBody>
@@ -13309,11 +13930,11 @@
         <p:spPr>
           <a:xfrm>
             <a:off x="777240" y="1600200"/>
-            <a:ext cx="10607040" cy="4206240"/>
+            <a:ext cx="10607040" cy="1965960"/>
           </a:xfrm>
           <a:prstGeom prst="roundRect">
             <a:avLst>
-              <a:gd name="adj" fmla="val 6000"/>
+              <a:gd name="adj" fmla="val 5000"/>
             </a:avLst>
           </a:prstGeom>
           <a:solidFill>
@@ -13350,13 +13971,190 @@
       </p:sp>
       <p:sp>
         <p:nvSpPr>
-          <p:cNvPr id="8" name="Rectangle 7"/>
+          <p:cNvPr id="8" name="TextBox 7"/>
+          <p:cNvSpPr txBox="1"/>
+          <p:nvPr/>
+        </p:nvSpPr>
+        <p:spPr>
+          <a:xfrm>
+            <a:off x="1005840" y="1709928"/>
+            <a:ext cx="10149840" cy="274320"/>
+          </a:xfrm>
+          <a:prstGeom prst="rect">
+            <a:avLst/>
+          </a:prstGeom>
+          <a:noFill/>
+        </p:spPr>
+        <p:txBody>
+          <a:bodyPr wrap="square" anchor="t" lIns="0" rIns="0" tIns="0" bIns="0">
+            <a:spAutoFit/>
+          </a:bodyPr>
+          <a:lstStyle/>
+          <a:p>
+            <a:pPr algn="l">
+              <a:spcBef>
+                <a:spcPts val="0"/>
+              </a:spcBef>
+              <a:spcAft>
+                <a:spcPts val="400"/>
+              </a:spcAft>
+            </a:pPr>
+            <a:r>
+              <a:rPr sz="1100" b="1">
+                <a:solidFill>
+                  <a:srgbClr val="979FB0"/>
+                </a:solidFill>
+                <a:latin typeface="Consolas"/>
+              </a:rPr>
+              <a:t>flux GitOps de bout en bout</a:t>
+            </a:r>
+          </a:p>
+        </p:txBody>
+      </p:sp>
+      <p:sp>
+        <p:nvSpPr>
+          <p:cNvPr id="9" name="TextBox 8"/>
+          <p:cNvSpPr txBox="1"/>
+          <p:nvPr/>
+        </p:nvSpPr>
+        <p:spPr>
+          <a:xfrm>
+            <a:off x="1005840" y="2020824"/>
+            <a:ext cx="10149840" cy="1691639"/>
+          </a:xfrm>
+          <a:prstGeom prst="rect">
+            <a:avLst/>
+          </a:prstGeom>
+          <a:noFill/>
+        </p:spPr>
+        <p:txBody>
+          <a:bodyPr wrap="none" lIns="0" tIns="0" rIns="0" bIns="0">
+            <a:spAutoFit/>
+          </a:bodyPr>
+          <a:lstStyle/>
+          <a:p>
+            <a:pPr>
+              <a:spcAft>
+                <a:spcPts val="200"/>
+              </a:spcAft>
+            </a:pPr>
+            <a:r>
+              <a:rPr sz="1500">
+                <a:solidFill>
+                  <a:srgbClr val="E8EAED"/>
+                </a:solidFill>
+                <a:latin typeface="Consolas"/>
+              </a:rPr>
+              <a:t>git push ─▶ GitHub Actions (lint + validation des manifests)</a:t>
+            </a:r>
+          </a:p>
+          <a:p>
+            <a:pPr>
+              <a:spcAft>
+                <a:spcPts val="200"/>
+              </a:spcAft>
+            </a:pPr>
+            <a:r>
+              <a:rPr sz="1500">
+                <a:solidFill>
+                  <a:srgbClr val="EF7627"/>
+                </a:solidFill>
+                <a:latin typeface="Consolas"/>
+              </a:rPr>
+              <a:t>        └─▶ ArgoCD (pull) ─▶ Rollout ─▶ Contrôleur Argo Rollouts</a:t>
+            </a:r>
+          </a:p>
+          <a:p>
+            <a:pPr>
+              <a:spcAft>
+                <a:spcPts val="200"/>
+              </a:spcAft>
+            </a:pPr>
+            <a:r>
+              <a:rPr sz="1500">
+                <a:solidFill>
+                  <a:srgbClr val="3FC46B"/>
+                </a:solidFill>
+                <a:latin typeface="Consolas"/>
+              </a:rPr>
+              <a:t>                                          ├─ ReplicaSet stable / canary</a:t>
+            </a:r>
+          </a:p>
+          <a:p>
+            <a:pPr>
+              <a:spcAft>
+                <a:spcPts val="200"/>
+              </a:spcAft>
+            </a:pPr>
+            <a:r>
+              <a:rPr sz="1500">
+                <a:solidFill>
+                  <a:srgbClr val="55A8F5"/>
+                </a:solidFill>
+                <a:latin typeface="Consolas"/>
+              </a:rPr>
+              <a:t>                                          └─ AnalysisRun (Job de sonde HTTP)</a:t>
+            </a:r>
+          </a:p>
+        </p:txBody>
+      </p:sp>
+      <p:sp>
+        <p:nvSpPr>
+          <p:cNvPr id="10" name="Rounded Rectangle 9"/>
           <p:cNvSpPr/>
           <p:nvPr/>
         </p:nvSpPr>
         <p:spPr>
           <a:xfrm>
-            <a:off x="777240" y="1764792"/>
+            <a:off x="777240" y="3794760"/>
+            <a:ext cx="5212080" cy="2331720"/>
+          </a:xfrm>
+          <a:prstGeom prst="roundRect">
+            <a:avLst>
+              <a:gd name="adj" fmla="val 6000"/>
+            </a:avLst>
+          </a:prstGeom>
+          <a:solidFill>
+            <a:srgbClr val="1E2533"/>
+          </a:solidFill>
+          <a:ln w="12700">
+            <a:solidFill>
+              <a:srgbClr val="323C4F"/>
+            </a:solidFill>
+          </a:ln>
+          <a:effectLst/>
+        </p:spPr>
+        <p:style>
+          <a:lnRef idx="1">
+            <a:schemeClr val="accent1"/>
+          </a:lnRef>
+          <a:fillRef idx="3">
+            <a:schemeClr val="accent1"/>
+          </a:fillRef>
+          <a:effectRef idx="2">
+            <a:schemeClr val="accent1"/>
+          </a:effectRef>
+          <a:fontRef idx="minor">
+            <a:schemeClr val="lt1"/>
+          </a:fontRef>
+        </p:style>
+        <p:txBody>
+          <a:bodyPr rtlCol="0" anchor="ctr"/>
+          <a:lstStyle/>
+          <a:p>
+            <a:pPr algn="ctr"/>
+          </a:p>
+        </p:txBody>
+      </p:sp>
+      <p:sp>
+        <p:nvSpPr>
+          <p:cNvPr id="11" name="Rectangle 10"/>
+          <p:cNvSpPr/>
+          <p:nvPr/>
+        </p:nvSpPr>
+        <p:spPr>
+          <a:xfrm>
+            <a:off x="777240" y="3959352"/>
             <a:ext cx="91440" cy="384048"/>
           </a:xfrm>
           <a:prstGeom prst="rect">
@@ -13394,14 +14192,14 @@
       </p:sp>
       <p:sp>
         <p:nvSpPr>
-          <p:cNvPr id="9" name="TextBox 8"/>
+          <p:cNvPr id="12" name="TextBox 11"/>
           <p:cNvSpPr txBox="1"/>
           <p:nvPr/>
         </p:nvSpPr>
         <p:spPr>
           <a:xfrm>
-            <a:off x="1051560" y="1783080"/>
-            <a:ext cx="10149840" cy="411480"/>
+            <a:off x="1051560" y="3977640"/>
+            <a:ext cx="4754880" cy="411480"/>
           </a:xfrm>
           <a:prstGeom prst="rect">
             <a:avLst/>
@@ -13429,21 +14227,21 @@
                 </a:solidFill>
                 <a:latin typeface="Calibri"/>
               </a:rPr>
-              <a:t>4 décisions structurantes</a:t>
-            </a:r>
-          </a:p>
-        </p:txBody>
-      </p:sp>
-      <p:sp>
-        <p:nvSpPr>
-          <p:cNvPr id="10" name="TextBox 9"/>
+              <a:t>Environnement &amp; astuce</a:t>
+            </a:r>
+          </a:p>
+        </p:txBody>
+      </p:sp>
+      <p:sp>
+        <p:nvSpPr>
+          <p:cNvPr id="13" name="TextBox 12"/>
           <p:cNvSpPr txBox="1"/>
           <p:nvPr/>
         </p:nvSpPr>
         <p:spPr>
           <a:xfrm>
-            <a:off x="1051560" y="2313432"/>
-            <a:ext cx="10104119" cy="3291839"/>
+            <a:off x="1051560" y="4507992"/>
+            <a:ext cx="4709160" cy="1417319"/>
           </a:xfrm>
           <a:prstGeom prst="rect">
             <a:avLst/>
@@ -13465,7 +14263,7 @@
               </a:spcAft>
             </a:pPr>
             <a:r>
-              <a:rPr sz="1600" b="1">
+              <a:rPr sz="1400" b="1">
                 <a:solidFill>
                   <a:srgbClr val="EF7627"/>
                 </a:solidFill>
@@ -13474,13 +14272,13 @@
               <a:t>▸  </a:t>
             </a:r>
             <a:r>
-              <a:rPr sz="1600" b="0">
+              <a:rPr sz="1400" b="0">
                 <a:solidFill>
                   <a:srgbClr val="E8EAED"/>
                 </a:solidFill>
                 <a:latin typeface="Calibri"/>
               </a:rPr>
-              <a:t>Canary sans service mesh → split par nombre de pods (simple, portable)</a:t>
+              <a:t>Cluster kind + ArgoCD + Argo Rollouts v1.7.2</a:t>
             </a:r>
           </a:p>
           <a:p>
@@ -13493,7 +14291,7 @@
               </a:spcAft>
             </a:pPr>
             <a:r>
-              <a:rPr sz="1600" b="1">
+              <a:rPr sz="1400" b="1">
                 <a:solidFill>
                   <a:srgbClr val="EF7627"/>
                 </a:solidFill>
@@ -13502,13 +14300,41 @@
               <a:t>▸  </a:t>
             </a:r>
             <a:r>
-              <a:rPr sz="1600" b="0">
+              <a:rPr sz="1400" b="0">
                 <a:solidFill>
                   <a:srgbClr val="E8EAED"/>
                 </a:solidFill>
                 <a:latin typeface="Calibri"/>
               </a:rPr>
-              <a:t>Services stable + canary : le contrôleur y injecte le pod-template-hash</a:t>
+              <a:t>App rollouts-demo : 1 couleur = 1 version</a:t>
+            </a:r>
+          </a:p>
+          <a:p>
+            <a:pPr>
+              <a:spcBef>
+                <a:spcPts val="0"/>
+              </a:spcBef>
+              <a:spcAft>
+                <a:spcPts val="600"/>
+              </a:spcAft>
+            </a:pPr>
+            <a:r>
+              <a:rPr sz="1400" b="1">
+                <a:solidFill>
+                  <a:srgbClr val="F0645A"/>
+                </a:solidFill>
+                <a:latin typeface="Calibri"/>
+              </a:rPr>
+              <a:t>✕  </a:t>
+            </a:r>
+            <a:r>
+              <a:rPr sz="1400" b="1">
+                <a:solidFill>
+                  <a:srgbClr val="F0645A"/>
+                </a:solidFill>
+                <a:latin typeface="Calibri"/>
+              </a:rPr>
+              <a:t>Le tag bad-red renvoie des HTTP 500</a:t>
             </a:r>
           </a:p>
           <a:p>
@@ -13521,7 +14347,7 @@
               </a:spcAft>
             </a:pPr>
             <a:r>
-              <a:rPr sz="1600" b="1">
+              <a:rPr sz="1400" b="1">
                 <a:solidFill>
                   <a:srgbClr val="979FB0"/>
                 </a:solidFill>
@@ -13530,125 +14356,127 @@
               <a:t>–  </a:t>
             </a:r>
             <a:r>
-              <a:rPr sz="1600" b="0">
+              <a:rPr sz="1400" b="0">
                 <a:solidFill>
                   <a:srgbClr val="E8EAED"/>
                 </a:solidFill>
                 <a:latin typeface="Calibri"/>
               </a:rPr>
-              <a:t>la sonde cible ainsi précisément les pods canary</a:t>
-            </a:r>
-          </a:p>
-          <a:p>
-            <a:pPr>
-              <a:spcBef>
-                <a:spcPts val="0"/>
-              </a:spcBef>
-              <a:spcAft>
-                <a:spcPts val="600"/>
-              </a:spcAft>
-            </a:pPr>
-            <a:r>
-              <a:rPr sz="1600" b="1">
-                <a:solidFill>
-                  <a:srgbClr val="EF7627"/>
-                </a:solidFill>
-                <a:latin typeface="Calibri"/>
-              </a:rPr>
-              <a:t>▸  </a:t>
-            </a:r>
-            <a:r>
-              <a:rPr sz="1600" b="0">
-                <a:solidFill>
-                  <a:srgbClr val="E8EAED"/>
-                </a:solidFill>
-                <a:latin typeface="Calibri"/>
-              </a:rPr>
-              <a:t>Probes TCP (et non HTTP /color) : les pods bad-red restent Ready malgré les 500</a:t>
-            </a:r>
-          </a:p>
-          <a:p>
-            <a:pPr lvl="1">
-              <a:spcBef>
-                <a:spcPts val="0"/>
-              </a:spcBef>
-              <a:spcAft>
-                <a:spcPts val="600"/>
-              </a:spcAft>
-            </a:pPr>
-            <a:r>
-              <a:rPr sz="1600" b="1">
+              <a:t>version « buggée » déterministe pour le rollback</a:t>
+            </a:r>
+          </a:p>
+        </p:txBody>
+      </p:sp>
+      <p:sp>
+        <p:nvSpPr>
+          <p:cNvPr id="14" name="Rounded Rectangle 13"/>
+          <p:cNvSpPr/>
+          <p:nvPr/>
+        </p:nvSpPr>
+        <p:spPr>
+          <a:xfrm>
+            <a:off x="6300216" y="3739896"/>
+            <a:ext cx="4496943" cy="2258568"/>
+          </a:xfrm>
+          <a:prstGeom prst="roundRect">
+            <a:avLst>
+              <a:gd name="adj" fmla="val 3000"/>
+            </a:avLst>
+          </a:prstGeom>
+          <a:solidFill>
+            <a:srgbClr val="1E2533"/>
+          </a:solidFill>
+          <a:ln w="12700">
+            <a:solidFill>
+              <a:srgbClr val="323C4F"/>
+            </a:solidFill>
+          </a:ln>
+          <a:effectLst/>
+        </p:spPr>
+        <p:style>
+          <a:lnRef idx="1">
+            <a:schemeClr val="accent1"/>
+          </a:lnRef>
+          <a:fillRef idx="3">
+            <a:schemeClr val="accent1"/>
+          </a:fillRef>
+          <a:effectRef idx="2">
+            <a:schemeClr val="accent1"/>
+          </a:effectRef>
+          <a:fontRef idx="minor">
+            <a:schemeClr val="lt1"/>
+          </a:fontRef>
+        </p:style>
+        <p:txBody>
+          <a:bodyPr rtlCol="0" anchor="ctr"/>
+          <a:lstStyle/>
+          <a:p>
+            <a:pPr algn="ctr"/>
+          </a:p>
+        </p:txBody>
+      </p:sp>
+      <p:pic>
+        <p:nvPicPr>
+          <p:cNvPr id="15" name="Picture 14" descr="ui-canary-grid.png"/>
+          <p:cNvPicPr>
+            <a:picLocks noChangeAspect="1"/>
+          </p:cNvPicPr>
+          <p:nvPr/>
+        </p:nvPicPr>
+        <p:blipFill>
+          <a:blip r:embed="rId2"/>
+          <a:stretch>
+            <a:fillRect/>
+          </a:stretch>
+        </p:blipFill>
+        <p:spPr>
+          <a:xfrm>
+            <a:off x="6355080" y="3794760"/>
+            <a:ext cx="4387215" cy="2148840"/>
+          </a:xfrm>
+          <a:prstGeom prst="rect">
+            <a:avLst/>
+          </a:prstGeom>
+        </p:spPr>
+      </p:pic>
+      <p:sp>
+        <p:nvSpPr>
+          <p:cNvPr id="16" name="TextBox 15"/>
+          <p:cNvSpPr txBox="1"/>
+          <p:nvPr/>
+        </p:nvSpPr>
+        <p:spPr>
+          <a:xfrm>
+            <a:off x="6355080" y="5961888"/>
+            <a:ext cx="5029200" cy="274320"/>
+          </a:xfrm>
+          <a:prstGeom prst="rect">
+            <a:avLst/>
+          </a:prstGeom>
+          <a:noFill/>
+        </p:spPr>
+        <p:txBody>
+          <a:bodyPr wrap="square" anchor="t" lIns="0" rIns="0" tIns="0" bIns="0">
+            <a:spAutoFit/>
+          </a:bodyPr>
+          <a:lstStyle/>
+          <a:p>
+            <a:pPr algn="l">
+              <a:spcBef>
+                <a:spcPts val="0"/>
+              </a:spcBef>
+              <a:spcAft>
+                <a:spcPts val="400"/>
+              </a:spcAft>
+            </a:pPr>
+            <a:r>
+              <a:rPr sz="1100" b="0">
                 <a:solidFill>
                   <a:srgbClr val="979FB0"/>
                 </a:solidFill>
                 <a:latin typeface="Calibri"/>
               </a:rPr>
-              <a:t>–  </a:t>
-            </a:r>
-            <a:r>
-              <a:rPr sz="1600" b="0">
-                <a:solidFill>
-                  <a:srgbClr val="E8EAED"/>
-                </a:solidFill>
-                <a:latin typeface="Calibri"/>
-              </a:rPr>
-              <a:t>on démontre un rollback piloté par l'ANALYSE, pas par la santé</a:t>
-            </a:r>
-          </a:p>
-          <a:p>
-            <a:pPr>
-              <a:spcBef>
-                <a:spcPts val="0"/>
-              </a:spcBef>
-              <a:spcAft>
-                <a:spcPts val="600"/>
-              </a:spcAft>
-            </a:pPr>
-            <a:r>
-              <a:rPr sz="1600" b="1">
-                <a:solidFill>
-                  <a:srgbClr val="EF7627"/>
-                </a:solidFill>
-                <a:latin typeface="Calibri"/>
-              </a:rPr>
-              <a:t>▸  </a:t>
-            </a:r>
-            <a:r>
-              <a:rPr sz="1600" b="0">
-                <a:solidFill>
-                  <a:srgbClr val="E8EAED"/>
-                </a:solidFill>
-                <a:latin typeface="Calibri"/>
-              </a:rPr>
-              <a:t>AnalysisTemplate de type Job : sonde 30 requêtes, exige ≥ 95 % de succès</a:t>
-            </a:r>
-          </a:p>
-          <a:p>
-            <a:pPr lvl="1">
-              <a:spcBef>
-                <a:spcPts val="0"/>
-              </a:spcBef>
-              <a:spcAft>
-                <a:spcPts val="600"/>
-              </a:spcAft>
-            </a:pPr>
-            <a:r>
-              <a:rPr sz="1600" b="1">
-                <a:solidFill>
-                  <a:srgbClr val="979FB0"/>
-                </a:solidFill>
-                <a:latin typeface="Calibri"/>
-              </a:rPr>
-              <a:t>–  </a:t>
-            </a:r>
-            <a:r>
-              <a:rPr sz="1600" b="0">
-                <a:solidFill>
-                  <a:srgbClr val="E8EAED"/>
-                </a:solidFill>
-                <a:latin typeface="Calibri"/>
-              </a:rPr>
-              <a:t>autonome ; variante Prometheus fournie pour la production</a:t>
+              <a:t>UI réelle : trafic réparti vert (canary) / bleu (stable)</a:t>
             </a:r>
           </a:p>
         </p:txBody>

--- a/slides/argo-rollouts.pptx
+++ b/slides/argo-rollouts.pptx
@@ -4774,7 +4774,7 @@
                 </a:solidFill>
                 <a:latin typeface="Calibri"/>
               </a:rPr>
-              <a:t> sur la révision canary → la promotion se poursuit.</a:t>
+              <a:t> sur la révision canary → canary validé, promotion autorisée.</a:t>
             </a:r>
           </a:p>
         </p:txBody>
